--- a/publications/SCIL_2026_MG_Tensors/slides/SCIL_2026_MG_Tensors_Slides.pptx
+++ b/publications/SCIL_2026_MG_Tensors/slides/SCIL_2026_MG_Tensors_Slides.pptx
@@ -32205,7 +32205,7 @@
         </p:nvSpPr>
         <p:spPr>
           <a:xfrm>
-            <a:off x="311700" y="721410"/>
+            <a:off x="311700" y="475824"/>
             <a:ext cx="8520600" cy="841800"/>
           </a:xfrm>
           <a:prstGeom prst="rect">
@@ -32293,36 +32293,6 @@
           </a:p>
         </p:txBody>
       </p:sp>
-      <p:pic>
-        <p:nvPicPr>
-          <p:cNvPr id="3" name="Picture 2">
-            <a:extLst>
-              <a:ext uri="{FF2B5EF4-FFF2-40B4-BE49-F238E27FC236}">
-                <a16:creationId xmlns:a16="http://schemas.microsoft.com/office/drawing/2014/main" id="{0B3E5C6B-4E1C-98A5-DDA0-7D095AA10FAF}"/>
-              </a:ext>
-            </a:extLst>
-          </p:cNvPr>
-          <p:cNvPicPr>
-            <a:picLocks noChangeAspect="1"/>
-          </p:cNvPicPr>
-          <p:nvPr/>
-        </p:nvPicPr>
-        <p:blipFill>
-          <a:blip r:embed="rId3"/>
-          <a:stretch>
-            <a:fillRect/>
-          </a:stretch>
-        </p:blipFill>
-        <p:spPr>
-          <a:xfrm>
-            <a:off x="5798126" y="1960108"/>
-            <a:ext cx="2135449" cy="2135449"/>
-          </a:xfrm>
-          <a:prstGeom prst="rect">
-            <a:avLst/>
-          </a:prstGeom>
-        </p:spPr>
-      </p:pic>
       <p:sp>
         <p:nvSpPr>
           <p:cNvPr id="4" name="TextBox 3">
@@ -32377,8 +32347,8 @@
         </p:nvSpPr>
         <p:spPr>
           <a:xfrm>
-            <a:off x="5712458" y="4095557"/>
-            <a:ext cx="2306781" cy="338554"/>
+            <a:off x="5531076" y="4095556"/>
+            <a:ext cx="2669542" cy="338554"/>
           </a:xfrm>
           <a:prstGeom prst="rect">
             <a:avLst/>
@@ -32391,20 +32361,91 @@
           </a:bodyPr>
           <a:lstStyle/>
           <a:p>
+            <a:pPr algn="ctr"/>
             <a:r>
               <a:rPr lang="en-US" sz="800" dirty="0">
                 <a:solidFill>
                   <a:schemeClr val="accent1"/>
                 </a:solidFill>
-                <a:hlinkClick r:id="rId4"/>
+                <a:hlinkClick r:id="rId3"/>
               </a:rPr>
-              <a:t>https://github.com/JPJ280/jpj280.github.io/tree/master/publications/SCIL_2026_MG_Tensors</a:t>
+              <a:t>https://github.com/JPJ280/jpj280.github.io/tree/master/publications/SCIL_2026_MG_Tensors/slides</a:t>
             </a:r>
             <a:endParaRPr lang="en-US" sz="800" dirty="0">
               <a:solidFill>
                 <a:schemeClr val="accent1"/>
               </a:solidFill>
             </a:endParaRPr>
+          </a:p>
+        </p:txBody>
+      </p:sp>
+      <p:pic>
+        <p:nvPicPr>
+          <p:cNvPr id="5" name="Picture 4">
+            <a:extLst>
+              <a:ext uri="{FF2B5EF4-FFF2-40B4-BE49-F238E27FC236}">
+                <a16:creationId xmlns:a16="http://schemas.microsoft.com/office/drawing/2014/main" id="{4C5F67C1-ECC6-D7F1-9590-CE75862F7F53}"/>
+              </a:ext>
+            </a:extLst>
+          </p:cNvPr>
+          <p:cNvPicPr>
+            <a:picLocks noChangeAspect="1"/>
+          </p:cNvPicPr>
+          <p:nvPr/>
+        </p:nvPicPr>
+        <p:blipFill>
+          <a:blip r:embed="rId4"/>
+          <a:stretch>
+            <a:fillRect/>
+          </a:stretch>
+        </p:blipFill>
+        <p:spPr>
+          <a:xfrm>
+            <a:off x="5798123" y="1960108"/>
+            <a:ext cx="2135449" cy="2135449"/>
+          </a:xfrm>
+          <a:prstGeom prst="rect">
+            <a:avLst/>
+          </a:prstGeom>
+        </p:spPr>
+      </p:pic>
+      <p:sp>
+        <p:nvSpPr>
+          <p:cNvPr id="7" name="TextBox 6">
+            <a:extLst>
+              <a:ext uri="{FF2B5EF4-FFF2-40B4-BE49-F238E27FC236}">
+                <a16:creationId xmlns:a16="http://schemas.microsoft.com/office/drawing/2014/main" id="{DEAB3748-C45E-1C61-2270-70386F7B2A66}"/>
+              </a:ext>
+            </a:extLst>
+          </p:cNvPr>
+          <p:cNvSpPr txBox="1"/>
+          <p:nvPr/>
+        </p:nvSpPr>
+        <p:spPr>
+          <a:xfrm>
+            <a:off x="1740984" y="1563210"/>
+            <a:ext cx="1091967" cy="461665"/>
+          </a:xfrm>
+          <a:prstGeom prst="rect">
+            <a:avLst/>
+          </a:prstGeom>
+          <a:noFill/>
+        </p:spPr>
+        <p:txBody>
+          <a:bodyPr wrap="none" rtlCol="0">
+            <a:spAutoFit/>
+          </a:bodyPr>
+          <a:lstStyle/>
+          <a:p>
+            <a:pPr algn="ctr"/>
+            <a:r>
+              <a:rPr lang="en-US" sz="2400" dirty="0">
+                <a:solidFill>
+                  <a:schemeClr val="tx1"/>
+                </a:solidFill>
+              </a:rPr>
+              <a:t>Paper:</a:t>
+            </a:r>
           </a:p>
         </p:txBody>
       </p:sp>

--- a/publications/SCIL_2026_MG_Tensors/slides/SCIL_2026_MG_Tensors_Slides.pptx
+++ b/publications/SCIL_2026_MG_Tensors/slides/SCIL_2026_MG_Tensors_Slides.pptx
@@ -5,7 +5,7 @@
     <p:sldMasterId id="2147483659" r:id="rId1"/>
   </p:sldMasterIdLst>
   <p:notesMasterIdLst>
-    <p:notesMasterId r:id="rId33"/>
+    <p:notesMasterId r:id="rId39"/>
   </p:notesMasterIdLst>
   <p:sldIdLst>
     <p:sldId id="256" r:id="rId2"/>
@@ -39,6 +39,12 @@
     <p:sldId id="299" r:id="rId30"/>
     <p:sldId id="300" r:id="rId31"/>
     <p:sldId id="325" r:id="rId32"/>
+    <p:sldId id="328" r:id="rId33"/>
+    <p:sldId id="333" r:id="rId34"/>
+    <p:sldId id="331" r:id="rId35"/>
+    <p:sldId id="332" r:id="rId36"/>
+    <p:sldId id="329" r:id="rId37"/>
+    <p:sldId id="330" r:id="rId38"/>
   </p:sldIdLst>
   <p:sldSz cx="9144000" cy="5143500" type="screen16x9"/>
   <p:notesSz cx="6858000" cy="9144000"/>
@@ -307,6 +313,12 @@
             <p14:sldId id="299"/>
             <p14:sldId id="300"/>
             <p14:sldId id="325"/>
+            <p14:sldId id="328"/>
+            <p14:sldId id="333"/>
+            <p14:sldId id="331"/>
+            <p14:sldId id="332"/>
+            <p14:sldId id="329"/>
+            <p14:sldId id="330"/>
           </p14:sldIdLst>
         </p14:section>
       </p14:sectionLst>
@@ -7615,7 +7627,7 @@
             </a:lvl9pPr>
           </a:lstStyle>
           <a:p>
-            <a:endParaRPr/>
+            <a:endParaRPr dirty="0"/>
           </a:p>
         </p:txBody>
       </p:sp>
@@ -11072,7 +11084,7 @@
         </p:nvSpPr>
         <p:spPr>
           <a:xfrm>
-            <a:off x="311700" y="3079175"/>
+            <a:off x="311700" y="2329225"/>
             <a:ext cx="2534700" cy="1046700"/>
           </a:xfrm>
           <a:prstGeom prst="rect">
@@ -11194,7 +11206,7 @@
         </p:nvSpPr>
         <p:spPr>
           <a:xfrm>
-            <a:off x="3304650" y="3079175"/>
+            <a:off x="3304650" y="2329225"/>
             <a:ext cx="2534700" cy="1046700"/>
           </a:xfrm>
           <a:prstGeom prst="rect">
@@ -11321,7 +11333,7 @@
         </p:nvSpPr>
         <p:spPr>
           <a:xfrm>
-            <a:off x="6297600" y="2986775"/>
+            <a:off x="6297600" y="2236825"/>
             <a:ext cx="2534700" cy="1231500"/>
           </a:xfrm>
           <a:prstGeom prst="rect">
@@ -11348,14 +11360,14 @@
               <a:buNone/>
             </a:pPr>
             <a:r>
-              <a:rPr lang="en" sz="2000">
+              <a:rPr lang="en" sz="2000" dirty="0">
                 <a:solidFill>
                   <a:schemeClr val="dk2"/>
                 </a:solidFill>
               </a:rPr>
               <a:t>Jon Rawski</a:t>
             </a:r>
-            <a:endParaRPr sz="1200">
+            <a:endParaRPr sz="1200" dirty="0">
               <a:solidFill>
                 <a:schemeClr val="dk2"/>
               </a:solidFill>
@@ -11372,14 +11384,14 @@
               <a:buNone/>
             </a:pPr>
             <a:r>
-              <a:rPr lang="en" sz="1200">
+              <a:rPr lang="en" sz="1200" dirty="0">
                 <a:solidFill>
                   <a:schemeClr val="dk2"/>
                 </a:solidFill>
               </a:rPr>
               <a:t>Dept. of Linguistics and Language Development</a:t>
             </a:r>
-            <a:endParaRPr sz="1200">
+            <a:endParaRPr sz="1200" dirty="0">
               <a:solidFill>
                 <a:schemeClr val="dk2"/>
               </a:solidFill>
@@ -11396,14 +11408,14 @@
               <a:buNone/>
             </a:pPr>
             <a:r>
-              <a:rPr lang="en" sz="1200">
+              <a:rPr lang="en" sz="1200" dirty="0">
                 <a:solidFill>
                   <a:schemeClr val="dk2"/>
                 </a:solidFill>
               </a:rPr>
               <a:t>San Jose State University</a:t>
             </a:r>
-            <a:endParaRPr sz="1200">
+            <a:endParaRPr sz="1200" dirty="0">
               <a:solidFill>
                 <a:schemeClr val="dk2"/>
               </a:solidFill>
@@ -11420,14 +11432,14 @@
               <a:buNone/>
             </a:pPr>
             <a:r>
-              <a:rPr lang="en" sz="1200">
+              <a:rPr lang="en" sz="1200" dirty="0">
                 <a:solidFill>
                   <a:schemeClr val="dk2"/>
                 </a:solidFill>
               </a:rPr>
               <a:t>jon.rawski@sjsu.edu</a:t>
             </a:r>
-            <a:endParaRPr sz="1200">
+            <a:endParaRPr sz="1200" dirty="0">
               <a:solidFill>
                 <a:schemeClr val="dk2"/>
               </a:solidFill>
@@ -11435,6 +11447,66 @@
           </a:p>
         </p:txBody>
       </p:sp>
+      <p:pic>
+        <p:nvPicPr>
+          <p:cNvPr id="3" name="Picture 2">
+            <a:extLst>
+              <a:ext uri="{FF2B5EF4-FFF2-40B4-BE49-F238E27FC236}">
+                <a16:creationId xmlns:a16="http://schemas.microsoft.com/office/drawing/2014/main" id="{055286CC-AB80-F9CC-D88E-1172CA9DE69D}"/>
+              </a:ext>
+            </a:extLst>
+          </p:cNvPr>
+          <p:cNvPicPr>
+            <a:picLocks noChangeAspect="1"/>
+          </p:cNvPicPr>
+          <p:nvPr/>
+        </p:nvPicPr>
+        <p:blipFill>
+          <a:blip r:embed="rId3"/>
+          <a:stretch>
+            <a:fillRect/>
+          </a:stretch>
+        </p:blipFill>
+        <p:spPr>
+          <a:xfrm>
+            <a:off x="1858877" y="3872345"/>
+            <a:ext cx="1975045" cy="832811"/>
+          </a:xfrm>
+          <a:prstGeom prst="rect">
+            <a:avLst/>
+          </a:prstGeom>
+        </p:spPr>
+      </p:pic>
+      <p:pic>
+        <p:nvPicPr>
+          <p:cNvPr id="4" name="Picture 3">
+            <a:extLst>
+              <a:ext uri="{FF2B5EF4-FFF2-40B4-BE49-F238E27FC236}">
+                <a16:creationId xmlns:a16="http://schemas.microsoft.com/office/drawing/2014/main" id="{6983E796-3802-EA37-7F09-3ECCAA1F037C}"/>
+              </a:ext>
+            </a:extLst>
+          </p:cNvPr>
+          <p:cNvPicPr>
+            <a:picLocks noChangeAspect="1"/>
+          </p:cNvPicPr>
+          <p:nvPr/>
+        </p:nvPicPr>
+        <p:blipFill>
+          <a:blip r:embed="rId4"/>
+          <a:stretch>
+            <a:fillRect/>
+          </a:stretch>
+        </p:blipFill>
+        <p:spPr>
+          <a:xfrm>
+            <a:off x="4787454" y="4005253"/>
+            <a:ext cx="3020291" cy="566996"/>
+          </a:xfrm>
+          <a:prstGeom prst="rect">
+            <a:avLst/>
+          </a:prstGeom>
+        </p:spPr>
+      </p:pic>
     </p:spTree>
   </p:cSld>
   <p:clrMapOvr>
@@ -13740,6 +13812,9 @@
                   <m:oMath xmlns:m="http://schemas.openxmlformats.org/officeDocument/2006/math">
                     <m:r>
                       <a:rPr lang="en-US" i="1" dirty="0" smtClean="0">
+                        <a:solidFill>
+                          <a:srgbClr val="7030A0"/>
+                        </a:solidFill>
                         <a:latin typeface="Cambria Math" panose="02040503050406030204" pitchFamily="18" charset="0"/>
                       </a:rPr>
                       <m:t>𝑘</m:t>
@@ -13747,8 +13822,16 @@
                   </m:oMath>
                 </a14:m>
                 <a:r>
+                  <a:rPr lang="en-US" dirty="0">
+                    <a:solidFill>
+                      <a:srgbClr val="7030A0"/>
+                    </a:solidFill>
+                  </a:rPr>
+                  <a:t>-dimensional grid </a:t>
+                </a:r>
+                <a:r>
                   <a:rPr lang="en-US" dirty="0"/>
-                  <a:t>-dimensional grid of numbers </a:t>
+                  <a:t>of numbers </a:t>
                 </a:r>
               </a:p>
               <a:p>
@@ -13768,7 +13851,15 @@
                 </a14:m>
                 <a:r>
                   <a:rPr lang="en-US" dirty="0"/>
-                  <a:t> tensor is a vector in the tensor product </a:t>
+                  <a:t> tensor is a </a:t>
+                </a:r>
+                <a:r>
+                  <a:rPr lang="en-US" dirty="0">
+                    <a:solidFill>
+                      <a:srgbClr val="7030A0"/>
+                    </a:solidFill>
+                  </a:rPr>
+                  <a:t>vector in the tensor product </a:t>
                 </a:r>
                 <a14:m>
                   <m:oMath xmlns:m="http://schemas.openxmlformats.org/officeDocument/2006/math">
@@ -28121,19 +28212,63 @@
           <a:p>
             <a:r>
               <a:rPr lang="en-US" dirty="0"/>
-              <a:t>We incorporate Minimalist Grammars into vector-based semantic models</a:t>
+              <a:t>We incorporate </a:t>
+            </a:r>
+            <a:r>
+              <a:rPr lang="en-US" dirty="0">
+                <a:solidFill>
+                  <a:srgbClr val="7030A0"/>
+                </a:solidFill>
+              </a:rPr>
+              <a:t>Minimalist Grammars </a:t>
+            </a:r>
+            <a:r>
+              <a:rPr lang="en-US" dirty="0"/>
+              <a:t>into </a:t>
+            </a:r>
+            <a:r>
+              <a:rPr lang="en-US" dirty="0">
+                <a:solidFill>
+                  <a:srgbClr val="7030A0"/>
+                </a:solidFill>
+              </a:rPr>
+              <a:t>vector-based semantic </a:t>
+            </a:r>
+            <a:r>
+              <a:rPr lang="en-US" dirty="0"/>
+              <a:t>models</a:t>
             </a:r>
           </a:p>
           <a:p>
             <a:r>
               <a:rPr lang="en-US" dirty="0"/>
-              <a:t>The resulting vector semantic models can build the meaning of larger expressions compositionally, by combining the meaning of smaller expressions</a:t>
+              <a:t>The resulting vector semantic models can </a:t>
+            </a:r>
+            <a:r>
+              <a:rPr lang="en-US" dirty="0">
+                <a:solidFill>
+                  <a:srgbClr val="7030A0"/>
+                </a:solidFill>
+              </a:rPr>
+              <a:t>build the meaning of larger expressions compositionally</a:t>
+            </a:r>
+            <a:r>
+              <a:rPr lang="en-US" dirty="0"/>
+              <a:t>, by combining the meaning of smaller expressions</a:t>
             </a:r>
           </a:p>
           <a:p>
             <a:r>
               <a:rPr lang="en-US" dirty="0"/>
-              <a:t>This compositionality is guided by the Minimalist Grammar syntax</a:t>
+              <a:t>This compositionality is </a:t>
+            </a:r>
+            <a:r>
+              <a:rPr lang="en-US" dirty="0">
+                <a:solidFill>
+                  <a:srgbClr val="7030A0"/>
+                </a:solidFill>
+              </a:rPr>
+              <a:t>guided by the Minimalist Grammar syntax</a:t>
             </a:r>
           </a:p>
         </p:txBody>
@@ -31194,15 +31329,35 @@
               <a:t>We have constructed a </a:t>
             </a:r>
             <a:r>
-              <a:rPr lang="en" b="1" dirty="0"/>
+              <a:rPr lang="en" dirty="0">
+                <a:solidFill>
+                  <a:srgbClr val="7030A0"/>
+                </a:solidFill>
+              </a:rPr>
               <a:t>tensor semantics for MGs</a:t>
             </a:r>
             <a:r>
               <a:rPr lang="en" dirty="0"/>
-              <a:t>, showing how their combinatory operations can be used to incorporate </a:t>
+              <a:t>, showing how their combinatory operations can be used to </a:t>
             </a:r>
             <a:r>
-              <a:rPr lang="en" b="1" dirty="0"/>
+              <a:rPr lang="en" dirty="0">
+                <a:solidFill>
+                  <a:srgbClr val="7030A0"/>
+                </a:solidFill>
+              </a:rPr>
+              <a:t>incorporate</a:t>
+            </a:r>
+            <a:r>
+              <a:rPr lang="en" dirty="0"/>
+              <a:t> </a:t>
+            </a:r>
+            <a:r>
+              <a:rPr lang="en" dirty="0">
+                <a:solidFill>
+                  <a:srgbClr val="7030A0"/>
+                </a:solidFill>
+              </a:rPr>
               <a:t>compositionality into distributional semantics</a:t>
             </a:r>
           </a:p>
@@ -31219,7 +31374,19 @@
             </a:pPr>
             <a:r>
               <a:rPr lang="en" dirty="0"/>
-              <a:t>Our approach is directly compatible with existing tensor-based approaches to MG syntax (beim Graben &amp; Gerth, 2012)</a:t>
+              <a:t>Our approach is </a:t>
+            </a:r>
+            <a:r>
+              <a:rPr lang="en" dirty="0">
+                <a:solidFill>
+                  <a:srgbClr val="7030A0"/>
+                </a:solidFill>
+              </a:rPr>
+              <a:t>directly compatible with existing tensor-based approaches </a:t>
+            </a:r>
+            <a:r>
+              <a:rPr lang="en" dirty="0"/>
+              <a:t>to MG syntax (beim Graben &amp; Gerth, 2012)</a:t>
             </a:r>
           </a:p>
           <a:p>
@@ -31246,7 +31413,15 @@
             </a:pPr>
             <a:r>
               <a:rPr lang="en" dirty="0"/>
-              <a:t>See how the tensor embeddings can be learned from data</a:t>
+              <a:t>See how the vector embeddings can be </a:t>
+            </a:r>
+            <a:r>
+              <a:rPr lang="en" dirty="0">
+                <a:solidFill>
+                  <a:srgbClr val="7030A0"/>
+                </a:solidFill>
+              </a:rPr>
+              <a:t>learned from data</a:t>
             </a:r>
           </a:p>
           <a:p>
@@ -31256,7 +31431,31 @@
             </a:pPr>
             <a:r>
               <a:rPr lang="en" dirty="0"/>
-              <a:t>Versions of Move which are not semantically inert and incorporate semantic ideas such as variable binding, etc.</a:t>
+              <a:t>Versions of </a:t>
+            </a:r>
+            <a:r>
+              <a:rPr lang="en" dirty="0">
+                <a:solidFill>
+                  <a:srgbClr val="7030A0"/>
+                </a:solidFill>
+              </a:rPr>
+              <a:t>Move</a:t>
+            </a:r>
+            <a:r>
+              <a:rPr lang="en" dirty="0"/>
+              <a:t> which are </a:t>
+            </a:r>
+            <a:r>
+              <a:rPr lang="en" dirty="0">
+                <a:solidFill>
+                  <a:srgbClr val="7030A0"/>
+                </a:solidFill>
+              </a:rPr>
+              <a:t>not semantically inert </a:t>
+            </a:r>
+            <a:r>
+              <a:rPr lang="en" dirty="0"/>
+              <a:t>and incorporate semantic ideas such as variable binding, etc.</a:t>
             </a:r>
           </a:p>
           <a:p>
@@ -31797,7 +31996,11 @@
               <a:t>often makes use of </a:t>
             </a:r>
             <a:r>
-              <a:rPr lang="en-US" b="1" i="1" dirty="0"/>
+              <a:rPr lang="en-US" i="1" dirty="0">
+                <a:solidFill>
+                  <a:srgbClr val="7030A0"/>
+                </a:solidFill>
+              </a:rPr>
               <a:t>distributional</a:t>
             </a:r>
             <a:r>
@@ -31806,7 +32009,15 @@
             </a:r>
             <a:r>
               <a:rPr lang="en-US" dirty="0"/>
-              <a:t>semantics, describing the meanings of expressions through co-occurrence in corpora</a:t>
+              <a:t>semantics, describing the meanings of expressions through </a:t>
+            </a:r>
+            <a:r>
+              <a:rPr lang="en-US" dirty="0">
+                <a:solidFill>
+                  <a:srgbClr val="7030A0"/>
+                </a:solidFill>
+              </a:rPr>
+              <a:t>co-occurrence in corpora</a:t>
             </a:r>
           </a:p>
           <a:p>
@@ -31822,7 +32033,19 @@
             </a:pPr>
             <a:r>
               <a:rPr lang="en-US" dirty="0"/>
-              <a:t>Embedding the meanings of expressions into vector spaces is a popular way of implementing distributional models</a:t>
+              <a:t>Embedding the meanings of expressions into </a:t>
+            </a:r>
+            <a:r>
+              <a:rPr lang="en-US" dirty="0">
+                <a:solidFill>
+                  <a:srgbClr val="7030A0"/>
+                </a:solidFill>
+              </a:rPr>
+              <a:t>vector spaces </a:t>
+            </a:r>
+            <a:r>
+              <a:rPr lang="en-US" dirty="0"/>
+              <a:t>is a popular way of implementing distributional models</a:t>
             </a:r>
             <a:endParaRPr dirty="0"/>
           </a:p>
@@ -31843,11 +32066,31 @@
             </a:r>
             <a:r>
               <a:rPr lang="en-US" i="1" dirty="0"/>
-              <a:t> compositionally</a:t>
+              <a:t> </a:t>
+            </a:r>
+            <a:r>
+              <a:rPr lang="en-US" i="1" dirty="0">
+                <a:solidFill>
+                  <a:srgbClr val="7030A0"/>
+                </a:solidFill>
+              </a:rPr>
+              <a:t>compositionally</a:t>
             </a:r>
             <a:r>
               <a:rPr lang="en-US" dirty="0"/>
-              <a:t>, building up the meaning of expressions from subparts</a:t>
+              <a:t>, </a:t>
+            </a:r>
+            <a:r>
+              <a:rPr lang="en-US" dirty="0">
+                <a:solidFill>
+                  <a:srgbClr val="7030A0"/>
+                </a:solidFill>
+              </a:rPr>
+              <a:t>building up the meaning </a:t>
+            </a:r>
+            <a:r>
+              <a:rPr lang="en-US" dirty="0"/>
+              <a:t>of expressions from subparts</a:t>
             </a:r>
           </a:p>
           <a:p>
@@ -31863,7 +32106,19 @@
             </a:pPr>
             <a:r>
               <a:rPr lang="en-US" dirty="0"/>
-              <a:t>An approach that uses vector space operations to combine the meanings of smaller expressions into meanings for larger expressions can bridge these two approaches </a:t>
+              <a:t>An approach that uses </a:t>
+            </a:r>
+            <a:r>
+              <a:rPr lang="en-US" dirty="0">
+                <a:solidFill>
+                  <a:srgbClr val="7030A0"/>
+                </a:solidFill>
+              </a:rPr>
+              <a:t>vector space operations to combine the meanings</a:t>
+            </a:r>
+            <a:r>
+              <a:rPr lang="en-US" dirty="0"/>
+              <a:t> of smaller expressions into meanings for larger expressions can bridge these two approaches </a:t>
             </a:r>
           </a:p>
           <a:p>
@@ -32423,7 +32678,7 @@
         </p:nvSpPr>
         <p:spPr>
           <a:xfrm>
-            <a:off x="1740984" y="1563210"/>
+            <a:off x="1999216" y="1563210"/>
             <a:ext cx="1091967" cy="461665"/>
           </a:xfrm>
           <a:prstGeom prst="rect">
@@ -32446,6 +32701,74 @@
               </a:rPr>
               <a:t>Paper:</a:t>
             </a:r>
+          </a:p>
+        </p:txBody>
+      </p:sp>
+      <p:pic>
+        <p:nvPicPr>
+          <p:cNvPr id="3" name="Picture 2">
+            <a:extLst>
+              <a:ext uri="{FF2B5EF4-FFF2-40B4-BE49-F238E27FC236}">
+                <a16:creationId xmlns:a16="http://schemas.microsoft.com/office/drawing/2014/main" id="{8F0DCF84-F787-FC06-6D04-8F3E70891761}"/>
+              </a:ext>
+            </a:extLst>
+          </p:cNvPr>
+          <p:cNvPicPr>
+            <a:picLocks noChangeAspect="1"/>
+          </p:cNvPicPr>
+          <p:nvPr/>
+        </p:nvPicPr>
+        <p:blipFill>
+          <a:blip r:embed="rId5"/>
+          <a:stretch>
+            <a:fillRect/>
+          </a:stretch>
+        </p:blipFill>
+        <p:spPr>
+          <a:xfrm>
+            <a:off x="1477475" y="1960108"/>
+            <a:ext cx="2135450" cy="2135450"/>
+          </a:xfrm>
+          <a:prstGeom prst="rect">
+            <a:avLst/>
+          </a:prstGeom>
+        </p:spPr>
+      </p:pic>
+      <p:sp>
+        <p:nvSpPr>
+          <p:cNvPr id="9" name="TextBox 8">
+            <a:extLst>
+              <a:ext uri="{FF2B5EF4-FFF2-40B4-BE49-F238E27FC236}">
+                <a16:creationId xmlns:a16="http://schemas.microsoft.com/office/drawing/2014/main" id="{8C16ACA7-DC53-1034-66E8-A93B99EF1CD8}"/>
+              </a:ext>
+            </a:extLst>
+          </p:cNvPr>
+          <p:cNvSpPr txBox="1"/>
+          <p:nvPr/>
+        </p:nvSpPr>
+        <p:spPr>
+          <a:xfrm>
+            <a:off x="1090474" y="4095556"/>
+            <a:ext cx="2909449" cy="215444"/>
+          </a:xfrm>
+          <a:prstGeom prst="rect">
+            <a:avLst/>
+          </a:prstGeom>
+          <a:noFill/>
+        </p:spPr>
+        <p:txBody>
+          <a:bodyPr wrap="square">
+            <a:spAutoFit/>
+          </a:bodyPr>
+          <a:lstStyle/>
+          <a:p>
+            <a:r>
+              <a:rPr lang="en-US" sz="800" dirty="0">
+                <a:hlinkClick r:id="rId6"/>
+              </a:rPr>
+              <a:t>https://openpublishing.library.umass.edu/scil/article/id/4032/</a:t>
+            </a:r>
+            <a:endParaRPr lang="en-US" sz="800" dirty="0"/>
           </a:p>
         </p:txBody>
       </p:sp>
@@ -32680,6 +33003,6401 @@
 </p:sld>
 </file>
 
+<file path=ppt/slides/slide32.xml><?xml version="1.0" encoding="utf-8"?>
+<p:sld xmlns:a="http://schemas.openxmlformats.org/drawingml/2006/main" xmlns:r="http://schemas.openxmlformats.org/officeDocument/2006/relationships" xmlns:p="http://schemas.openxmlformats.org/presentationml/2006/main">
+  <p:cSld>
+    <p:spTree>
+      <p:nvGrpSpPr>
+        <p:cNvPr id="1" name=""/>
+        <p:cNvGrpSpPr/>
+        <p:nvPr/>
+      </p:nvGrpSpPr>
+      <p:grpSpPr>
+        <a:xfrm>
+          <a:off x="0" y="0"/>
+          <a:ext cx="0" cy="0"/>
+          <a:chOff x="0" y="0"/>
+          <a:chExt cx="0" cy="0"/>
+        </a:xfrm>
+      </p:grpSpPr>
+      <mc:AlternateContent xmlns:mc="http://schemas.openxmlformats.org/markup-compatibility/2006" xmlns:a14="http://schemas.microsoft.com/office/drawing/2010/main">
+        <mc:Choice Requires="a14">
+          <p:sp>
+            <p:nvSpPr>
+              <p:cNvPr id="2" name="Title 1">
+                <a:extLst>
+                  <a:ext uri="{FF2B5EF4-FFF2-40B4-BE49-F238E27FC236}">
+                    <a16:creationId xmlns:a16="http://schemas.microsoft.com/office/drawing/2014/main" id="{D0AF7001-D1FA-3FD5-A603-AF65CA8F8B17}"/>
+                  </a:ext>
+                </a:extLst>
+              </p:cNvPr>
+              <p:cNvSpPr>
+                <a:spLocks noGrp="1"/>
+              </p:cNvSpPr>
+              <p:nvPr>
+                <p:ph type="title"/>
+              </p:nvPr>
+            </p:nvSpPr>
+            <p:spPr/>
+            <p:txBody>
+              <a:bodyPr>
+                <a:normAutofit fontScale="90000"/>
+              </a:bodyPr>
+              <a:lstStyle/>
+              <a:p>
+                <a:r>
+                  <a:rPr lang="en-US" dirty="0"/>
+                  <a:t>Construction of </a:t>
+                </a:r>
+                <a14:m>
+                  <m:oMath xmlns:m="http://schemas.openxmlformats.org/officeDocument/2006/math">
+                    <m:r>
+                      <m:rPr>
+                        <m:sty m:val="p"/>
+                      </m:rPr>
+                      <a:rPr lang="en-US">
+                        <a:latin typeface="Cambria Math" panose="02040503050406030204" pitchFamily="18" charset="0"/>
+                      </a:rPr>
+                      <m:t>Φ</m:t>
+                    </m:r>
+                  </m:oMath>
+                </a14:m>
+                <a:endParaRPr lang="en-US" dirty="0"/>
+              </a:p>
+            </p:txBody>
+          </p:sp>
+        </mc:Choice>
+        <mc:Fallback xmlns="">
+          <p:sp>
+            <p:nvSpPr>
+              <p:cNvPr id="2" name="Title 1">
+                <a:extLst>
+                  <a:ext uri="{FF2B5EF4-FFF2-40B4-BE49-F238E27FC236}">
+                    <a16:creationId xmlns:a16="http://schemas.microsoft.com/office/drawing/2014/main" id="{D0AF7001-D1FA-3FD5-A603-AF65CA8F8B17}"/>
+                  </a:ext>
+                </a:extLst>
+              </p:cNvPr>
+              <p:cNvSpPr>
+                <a:spLocks noGrp="1" noRot="1" noChangeAspect="1" noMove="1" noResize="1" noEditPoints="1" noAdjustHandles="1" noChangeArrowheads="1" noChangeShapeType="1" noTextEdit="1"/>
+              </p:cNvSpPr>
+              <p:nvPr>
+                <p:ph type="title"/>
+              </p:nvPr>
+            </p:nvSpPr>
+            <p:spPr>
+              <a:blipFill>
+                <a:blip r:embed="rId2"/>
+                <a:stretch>
+                  <a:fillRect l="-1144" b="-15957"/>
+                </a:stretch>
+              </a:blipFill>
+            </p:spPr>
+            <p:txBody>
+              <a:bodyPr/>
+              <a:lstStyle/>
+              <a:p>
+                <a:r>
+                  <a:rPr lang="en-US">
+                    <a:noFill/>
+                  </a:rPr>
+                  <a:t> </a:t>
+                </a:r>
+              </a:p>
+            </p:txBody>
+          </p:sp>
+        </mc:Fallback>
+      </mc:AlternateContent>
+      <mc:AlternateContent xmlns:mc="http://schemas.openxmlformats.org/markup-compatibility/2006" xmlns:a14="http://schemas.microsoft.com/office/drawing/2010/main">
+        <mc:Choice Requires="a14">
+          <p:sp>
+            <p:nvSpPr>
+              <p:cNvPr id="3" name="Text Placeholder 2">
+                <a:extLst>
+                  <a:ext uri="{FF2B5EF4-FFF2-40B4-BE49-F238E27FC236}">
+                    <a16:creationId xmlns:a16="http://schemas.microsoft.com/office/drawing/2014/main" id="{26691787-030C-C106-5DA3-6E2A447AEB0D}"/>
+                  </a:ext>
+                </a:extLst>
+              </p:cNvPr>
+              <p:cNvSpPr>
+                <a:spLocks noGrp="1"/>
+              </p:cNvSpPr>
+              <p:nvPr>
+                <p:ph type="body" idx="1"/>
+              </p:nvPr>
+            </p:nvSpPr>
+            <p:spPr>
+              <a:xfrm>
+                <a:off x="3627524" y="1017140"/>
+                <a:ext cx="5167773" cy="3639150"/>
+              </a:xfrm>
+            </p:spPr>
+            <p:txBody>
+              <a:bodyPr>
+                <a:normAutofit/>
+              </a:bodyPr>
+              <a:lstStyle/>
+              <a:p>
+                <a:pPr marL="342900">
+                  <a:lnSpc>
+                    <a:spcPct val="100000"/>
+                  </a:lnSpc>
+                  <a:buClr>
+                    <a:schemeClr val="bg2"/>
+                  </a:buClr>
+                  <a:buFont typeface="Arial" panose="020B0604020202020204" pitchFamily="34" charset="0"/>
+                  <a:buChar char="•"/>
+                </a:pPr>
+                <a14:m>
+                  <m:oMath xmlns:m="http://schemas.openxmlformats.org/officeDocument/2006/math">
+                    <m:r>
+                      <a:rPr lang="en-US" sz="2000" i="1" dirty="0">
+                        <a:solidFill>
+                          <a:schemeClr val="bg2"/>
+                        </a:solidFill>
+                        <a:latin typeface="Cambria Math" panose="02040503050406030204" pitchFamily="18" charset="0"/>
+                        <a:cs typeface="Times New Roman" panose="02020603050405020304" pitchFamily="18" charset="0"/>
+                      </a:rPr>
+                      <m:t>𝗦</m:t>
+                    </m:r>
+                    <m:r>
+                      <a:rPr lang="en-US" sz="2000" i="1" dirty="0">
+                        <a:solidFill>
+                          <a:schemeClr val="bg2"/>
+                        </a:solidFill>
+                        <a:latin typeface="Cambria Math" panose="02040503050406030204" pitchFamily="18" charset="0"/>
+                        <a:cs typeface="Times New Roman" panose="02020603050405020304" pitchFamily="18" charset="0"/>
+                      </a:rPr>
+                      <m:t> ≔</m:t>
+                    </m:r>
+                    <m:r>
+                      <a:rPr lang="en" sz="2000" i="1" dirty="0">
+                        <a:solidFill>
+                          <a:schemeClr val="bg2"/>
+                        </a:solidFill>
+                        <a:latin typeface="Cambria Math" panose="02040503050406030204" pitchFamily="18" charset="0"/>
+                        <a:ea typeface="Times New Roman"/>
+                        <a:cs typeface="Times New Roman" panose="02020603050405020304" pitchFamily="18" charset="0"/>
+                        <a:sym typeface="Times New Roman"/>
+                      </a:rPr>
+                      <m:t>𝗗</m:t>
+                    </m:r>
+                    <m:r>
+                      <a:rPr lang="en-US" sz="2000" i="1" dirty="0">
+                        <a:solidFill>
+                          <a:schemeClr val="bg2"/>
+                        </a:solidFill>
+                        <a:latin typeface="Cambria Math" panose="02040503050406030204" pitchFamily="18" charset="0"/>
+                        <a:ea typeface="Cambria Math" panose="02040503050406030204" pitchFamily="18" charset="0"/>
+                        <a:cs typeface="Times New Roman"/>
+                        <a:sym typeface="Times New Roman"/>
+                      </a:rPr>
+                      <m:t>⊕</m:t>
+                    </m:r>
+                    <m:r>
+                      <a:rPr lang="en" sz="2000" i="1" dirty="0">
+                        <a:solidFill>
+                          <a:schemeClr val="bg2"/>
+                        </a:solidFill>
+                        <a:latin typeface="Cambria Math" panose="02040503050406030204" pitchFamily="18" charset="0"/>
+                        <a:ea typeface="Times New Roman"/>
+                        <a:cs typeface="Times New Roman" panose="02020603050405020304" pitchFamily="18" charset="0"/>
+                        <a:sym typeface="Times New Roman"/>
+                      </a:rPr>
+                      <m:t>𝗩</m:t>
+                    </m:r>
+                    <m:r>
+                      <a:rPr lang="en-US" sz="2000" i="1" dirty="0">
+                        <a:solidFill>
+                          <a:schemeClr val="bg2"/>
+                        </a:solidFill>
+                        <a:latin typeface="Cambria Math" panose="02040503050406030204" pitchFamily="18" charset="0"/>
+                        <a:ea typeface="Cambria Math" panose="02040503050406030204" pitchFamily="18" charset="0"/>
+                        <a:cs typeface="Times New Roman"/>
+                        <a:sym typeface="Times New Roman"/>
+                      </a:rPr>
+                      <m:t>⊕</m:t>
+                    </m:r>
+                    <m:r>
+                      <a:rPr lang="en" sz="2000" i="1" dirty="0">
+                        <a:solidFill>
+                          <a:schemeClr val="bg2"/>
+                        </a:solidFill>
+                        <a:latin typeface="Cambria Math" panose="02040503050406030204" pitchFamily="18" charset="0"/>
+                        <a:ea typeface="Times New Roman"/>
+                        <a:cs typeface="Times New Roman" panose="02020603050405020304" pitchFamily="18" charset="0"/>
+                        <a:sym typeface="Times New Roman"/>
+                      </a:rPr>
+                      <m:t>𝗨</m:t>
+                    </m:r>
+                    <m:r>
+                      <a:rPr lang="en-US" sz="2000" i="1" dirty="0">
+                        <a:solidFill>
+                          <a:schemeClr val="bg2"/>
+                        </a:solidFill>
+                        <a:latin typeface="Cambria Math" panose="02040503050406030204" pitchFamily="18" charset="0"/>
+                        <a:ea typeface="Times New Roman"/>
+                        <a:cs typeface="Times New Roman" panose="02020603050405020304" pitchFamily="18" charset="0"/>
+                        <a:sym typeface="Times New Roman"/>
+                      </a:rPr>
+                      <m:t>⊕</m:t>
+                    </m:r>
+                    <m:r>
+                      <a:rPr lang="en" sz="2000" i="1" dirty="0">
+                        <a:solidFill>
+                          <a:schemeClr val="bg2"/>
+                        </a:solidFill>
+                        <a:latin typeface="Cambria Math" panose="02040503050406030204" pitchFamily="18" charset="0"/>
+                        <a:ea typeface="Times New Roman"/>
+                        <a:cs typeface="Times New Roman" panose="02020603050405020304" pitchFamily="18" charset="0"/>
+                        <a:sym typeface="Times New Roman"/>
+                      </a:rPr>
+                      <m:t>𝗧</m:t>
+                    </m:r>
+                    <m:r>
+                      <a:rPr lang="en-US" sz="2000" i="1" dirty="0">
+                        <a:solidFill>
+                          <a:schemeClr val="bg2"/>
+                        </a:solidFill>
+                        <a:latin typeface="Cambria Math" panose="02040503050406030204" pitchFamily="18" charset="0"/>
+                        <a:ea typeface="Cambria Math" panose="02040503050406030204" pitchFamily="18" charset="0"/>
+                        <a:cs typeface="Times New Roman" panose="02020603050405020304" pitchFamily="18" charset="0"/>
+                        <a:sym typeface="Times New Roman"/>
+                      </a:rPr>
+                      <m:t>⊕</m:t>
+                    </m:r>
+                    <m:r>
+                      <a:rPr lang="en" sz="2000" i="1" dirty="0">
+                        <a:solidFill>
+                          <a:schemeClr val="bg2"/>
+                        </a:solidFill>
+                        <a:latin typeface="Cambria Math" panose="02040503050406030204" pitchFamily="18" charset="0"/>
+                        <a:ea typeface="Times New Roman"/>
+                        <a:cs typeface="Times New Roman" panose="02020603050405020304" pitchFamily="18" charset="0"/>
+                        <a:sym typeface="Times New Roman"/>
+                      </a:rPr>
+                      <m:t>𝗖</m:t>
+                    </m:r>
+                  </m:oMath>
+                </a14:m>
+                <a:endParaRPr lang="en-US" sz="2000" dirty="0">
+                  <a:solidFill>
+                    <a:schemeClr val="bg2"/>
+                  </a:solidFill>
+                  <a:latin typeface="Times New Roman" panose="02020603050405020304" pitchFamily="18" charset="0"/>
+                  <a:ea typeface="Times New Roman"/>
+                  <a:cs typeface="Times New Roman" panose="02020603050405020304" pitchFamily="18" charset="0"/>
+                  <a:sym typeface="Times New Roman"/>
+                </a:endParaRPr>
+              </a:p>
+              <a:p>
+                <a:pPr marL="342900">
+                  <a:lnSpc>
+                    <a:spcPct val="100000"/>
+                  </a:lnSpc>
+                  <a:buClr>
+                    <a:schemeClr val="bg2"/>
+                  </a:buClr>
+                  <a:buFont typeface="Arial" panose="020B0604020202020204" pitchFamily="34" charset="0"/>
+                  <a:buChar char="•"/>
+                </a:pPr>
+                <a14:m>
+                  <m:oMath xmlns:m="http://schemas.openxmlformats.org/officeDocument/2006/math">
+                    <m:r>
+                      <a:rPr lang="en-US" sz="2000" i="1">
+                        <a:solidFill>
+                          <a:schemeClr val="bg2"/>
+                        </a:solidFill>
+                        <a:latin typeface="Cambria Math" panose="02040503050406030204" pitchFamily="18" charset="0"/>
+                        <a:ea typeface="Times New Roman"/>
+                        <a:cs typeface="Times New Roman" panose="02020603050405020304" pitchFamily="18" charset="0"/>
+                        <a:sym typeface="Times New Roman"/>
+                      </a:rPr>
+                      <m:t>𝗟</m:t>
+                    </m:r>
+                    <m:r>
+                      <a:rPr lang="en-US" sz="2000" i="1">
+                        <a:solidFill>
+                          <a:schemeClr val="bg2"/>
+                        </a:solidFill>
+                        <a:latin typeface="Cambria Math" panose="02040503050406030204" pitchFamily="18" charset="0"/>
+                        <a:ea typeface="Times New Roman"/>
+                        <a:cs typeface="Times New Roman" panose="02020603050405020304" pitchFamily="18" charset="0"/>
+                        <a:sym typeface="Times New Roman"/>
+                      </a:rPr>
+                      <m:t>≔</m:t>
+                    </m:r>
+                    <m:nary>
+                      <m:naryPr>
+                        <m:chr m:val="⨁"/>
+                        <m:supHide m:val="on"/>
+                        <m:ctrlPr>
+                          <a:rPr lang="en-US" sz="2000" i="1">
+                            <a:solidFill>
+                              <a:schemeClr val="bg2"/>
+                            </a:solidFill>
+                            <a:latin typeface="Cambria Math" panose="02040503050406030204" pitchFamily="18" charset="0"/>
+                            <a:ea typeface="Times New Roman"/>
+                            <a:cs typeface="Times New Roman" panose="02020603050405020304" pitchFamily="18" charset="0"/>
+                            <a:sym typeface="Times New Roman"/>
+                          </a:rPr>
+                        </m:ctrlPr>
+                      </m:naryPr>
+                      <m:sub>
+                        <m:r>
+                          <a:rPr lang="en-US" sz="2000" i="1">
+                            <a:solidFill>
+                              <a:schemeClr val="bg2"/>
+                            </a:solidFill>
+                            <a:latin typeface="Cambria Math" panose="02040503050406030204" pitchFamily="18" charset="0"/>
+                            <a:ea typeface="Times New Roman"/>
+                            <a:cs typeface="Times New Roman" panose="02020603050405020304" pitchFamily="18" charset="0"/>
+                            <a:sym typeface="Times New Roman"/>
+                          </a:rPr>
+                          <m:t>𝑘</m:t>
+                        </m:r>
+                        <m:r>
+                          <a:rPr lang="en-US" sz="2000" i="1">
+                            <a:solidFill>
+                              <a:schemeClr val="bg2"/>
+                            </a:solidFill>
+                            <a:latin typeface="Cambria Math" panose="02040503050406030204" pitchFamily="18" charset="0"/>
+                            <a:ea typeface="Times New Roman"/>
+                            <a:cs typeface="Times New Roman" panose="02020603050405020304" pitchFamily="18" charset="0"/>
+                            <a:sym typeface="Times New Roman"/>
+                          </a:rPr>
+                          <m:t>≥1</m:t>
+                        </m:r>
+                      </m:sub>
+                      <m:sup/>
+                      <m:e>
+                        <m:sSup>
+                          <m:sSupPr>
+                            <m:ctrlPr>
+                              <a:rPr lang="en-US" sz="2000" i="1">
+                                <a:solidFill>
+                                  <a:schemeClr val="bg2"/>
+                                </a:solidFill>
+                                <a:latin typeface="Cambria Math" panose="02040503050406030204" pitchFamily="18" charset="0"/>
+                                <a:ea typeface="Times New Roman"/>
+                                <a:cs typeface="Times New Roman" panose="02020603050405020304" pitchFamily="18" charset="0"/>
+                                <a:sym typeface="Times New Roman"/>
+                              </a:rPr>
+                            </m:ctrlPr>
+                          </m:sSupPr>
+                          <m:e>
+                            <m:r>
+                              <a:rPr lang="en-US" sz="2000" i="1">
+                                <a:solidFill>
+                                  <a:schemeClr val="bg2"/>
+                                </a:solidFill>
+                                <a:latin typeface="Cambria Math" panose="02040503050406030204" pitchFamily="18" charset="0"/>
+                                <a:ea typeface="Times New Roman"/>
+                                <a:cs typeface="Times New Roman" panose="02020603050405020304" pitchFamily="18" charset="0"/>
+                                <a:sym typeface="Times New Roman"/>
+                              </a:rPr>
+                              <m:t>𝗦</m:t>
+                            </m:r>
+                          </m:e>
+                          <m:sup>
+                            <m:r>
+                              <a:rPr lang="en-US" sz="2000" i="1">
+                                <a:solidFill>
+                                  <a:schemeClr val="bg2"/>
+                                </a:solidFill>
+                                <a:latin typeface="Cambria Math" panose="02040503050406030204" pitchFamily="18" charset="0"/>
+                                <a:ea typeface="Times New Roman"/>
+                                <a:cs typeface="Times New Roman" panose="02020603050405020304" pitchFamily="18" charset="0"/>
+                                <a:sym typeface="Times New Roman"/>
+                              </a:rPr>
+                              <m:t>⊗</m:t>
+                            </m:r>
+                            <m:r>
+                              <a:rPr lang="en-US" sz="2000" i="1" smtClean="0">
+                                <a:solidFill>
+                                  <a:schemeClr val="bg2"/>
+                                </a:solidFill>
+                                <a:latin typeface="Cambria Math" panose="02040503050406030204" pitchFamily="18" charset="0"/>
+                                <a:ea typeface="Times New Roman"/>
+                                <a:cs typeface="Times New Roman" panose="02020603050405020304" pitchFamily="18" charset="0"/>
+                                <a:sym typeface="Times New Roman"/>
+                              </a:rPr>
+                              <m:t>𝘬</m:t>
+                            </m:r>
+                          </m:sup>
+                        </m:sSup>
+                      </m:e>
+                    </m:nary>
+                  </m:oMath>
+                </a14:m>
+                <a:r>
+                  <a:rPr lang="en-US" sz="2000" dirty="0">
+                    <a:solidFill>
+                      <a:schemeClr val="bg2"/>
+                    </a:solidFill>
+                    <a:latin typeface="Times New Roman" panose="02020603050405020304" pitchFamily="18" charset="0"/>
+                    <a:ea typeface="Times New Roman"/>
+                    <a:cs typeface="Times New Roman" panose="02020603050405020304" pitchFamily="18" charset="0"/>
+                    <a:sym typeface="Times New Roman"/>
+                  </a:rPr>
+                  <a:t> </a:t>
+                </a:r>
+              </a:p>
+              <a:p>
+                <a:pPr marL="800100" lvl="7" indent="-342900">
+                  <a:lnSpc>
+                    <a:spcPct val="100000"/>
+                  </a:lnSpc>
+                  <a:buClr>
+                    <a:schemeClr val="bg2"/>
+                  </a:buClr>
+                  <a:buFont typeface="Arial" panose="020B0604020202020204" pitchFamily="34" charset="0"/>
+                  <a:buChar char="•"/>
+                </a:pPr>
+                <a14:m>
+                  <m:oMath xmlns:m="http://schemas.openxmlformats.org/officeDocument/2006/math">
+                    <m:sSup>
+                      <m:sSupPr>
+                        <m:ctrlPr>
+                          <a:rPr lang="en-US" sz="1600" i="1" dirty="0">
+                            <a:solidFill>
+                              <a:schemeClr val="bg2"/>
+                            </a:solidFill>
+                            <a:latin typeface="Cambria Math" panose="02040503050406030204" pitchFamily="18" charset="0"/>
+                            <a:ea typeface="Times New Roman"/>
+                            <a:cs typeface="Times New Roman" panose="02020603050405020304" pitchFamily="18" charset="0"/>
+                            <a:sym typeface="Times New Roman"/>
+                          </a:rPr>
+                        </m:ctrlPr>
+                      </m:sSupPr>
+                      <m:e>
+                        <m:r>
+                          <a:rPr lang="en-US" sz="1600" i="1" dirty="0">
+                            <a:solidFill>
+                              <a:schemeClr val="bg2"/>
+                            </a:solidFill>
+                            <a:latin typeface="Cambria Math" panose="02040503050406030204" pitchFamily="18" charset="0"/>
+                            <a:ea typeface="Times New Roman"/>
+                            <a:cs typeface="Times New Roman" panose="02020603050405020304" pitchFamily="18" charset="0"/>
+                            <a:sym typeface="Times New Roman"/>
+                          </a:rPr>
+                          <m:t>𝗦</m:t>
+                        </m:r>
+                      </m:e>
+                      <m:sup>
+                        <m:r>
+                          <a:rPr lang="en-US" sz="1600" i="1" dirty="0">
+                            <a:solidFill>
+                              <a:schemeClr val="bg2"/>
+                            </a:solidFill>
+                            <a:latin typeface="Cambria Math" panose="02040503050406030204" pitchFamily="18" charset="0"/>
+                            <a:ea typeface="Times New Roman"/>
+                            <a:cs typeface="Times New Roman" panose="02020603050405020304" pitchFamily="18" charset="0"/>
+                            <a:sym typeface="Times New Roman"/>
+                          </a:rPr>
+                          <m:t>⊗</m:t>
+                        </m:r>
+                        <m:r>
+                          <a:rPr lang="en-US" sz="1600" i="1" dirty="0">
+                            <a:solidFill>
+                              <a:schemeClr val="bg2"/>
+                            </a:solidFill>
+                            <a:latin typeface="Cambria Math" panose="02040503050406030204" pitchFamily="18" charset="0"/>
+                            <a:ea typeface="Times New Roman"/>
+                            <a:cs typeface="Times New Roman" panose="02020603050405020304" pitchFamily="18" charset="0"/>
+                            <a:sym typeface="Times New Roman"/>
+                          </a:rPr>
+                          <m:t>𝘬</m:t>
+                        </m:r>
+                      </m:sup>
+                    </m:sSup>
+                  </m:oMath>
+                </a14:m>
+                <a:r>
+                  <a:rPr lang="en-US" sz="1600" dirty="0">
+                    <a:solidFill>
+                      <a:schemeClr val="bg2"/>
+                    </a:solidFill>
+                    <a:latin typeface="Times New Roman" panose="02020603050405020304" pitchFamily="18" charset="0"/>
+                    <a:ea typeface="Times New Roman"/>
+                    <a:cs typeface="Times New Roman" panose="02020603050405020304" pitchFamily="18" charset="0"/>
+                    <a:sym typeface="Times New Roman"/>
+                  </a:rPr>
+                  <a:t> means </a:t>
+                </a:r>
+                <a14:m>
+                  <m:oMath xmlns:m="http://schemas.openxmlformats.org/officeDocument/2006/math">
+                    <m:limLow>
+                      <m:limLowPr>
+                        <m:ctrlPr>
+                          <a:rPr lang="en-US" sz="1600" i="1">
+                            <a:solidFill>
+                              <a:schemeClr val="bg2"/>
+                            </a:solidFill>
+                            <a:latin typeface="Cambria Math" panose="02040503050406030204" pitchFamily="18" charset="0"/>
+                            <a:cs typeface="Times New Roman" panose="02020603050405020304" pitchFamily="18" charset="0"/>
+                            <a:sym typeface="Times New Roman"/>
+                          </a:rPr>
+                        </m:ctrlPr>
+                      </m:limLowPr>
+                      <m:e>
+                        <m:groupChr>
+                          <m:groupChrPr>
+                            <m:chr m:val="⏟"/>
+                            <m:ctrlPr>
+                              <a:rPr lang="en-US" sz="1600" i="1">
+                                <a:solidFill>
+                                  <a:schemeClr val="bg2"/>
+                                </a:solidFill>
+                                <a:latin typeface="Cambria Math" panose="02040503050406030204" pitchFamily="18" charset="0"/>
+                                <a:cs typeface="Times New Roman" panose="02020603050405020304" pitchFamily="18" charset="0"/>
+                                <a:sym typeface="Times New Roman"/>
+                              </a:rPr>
+                            </m:ctrlPr>
+                          </m:groupChrPr>
+                          <m:e>
+                            <m:r>
+                              <a:rPr lang="en-US" sz="1600" i="1">
+                                <a:solidFill>
+                                  <a:schemeClr val="bg2"/>
+                                </a:solidFill>
+                                <a:latin typeface="Cambria Math" panose="02040503050406030204" pitchFamily="18" charset="0"/>
+                                <a:cs typeface="Times New Roman" panose="02020603050405020304" pitchFamily="18" charset="0"/>
+                                <a:sym typeface="Times New Roman"/>
+                              </a:rPr>
+                              <m:t>𝗦</m:t>
+                            </m:r>
+                            <m:r>
+                              <a:rPr lang="en-US" sz="1600" i="1">
+                                <a:solidFill>
+                                  <a:schemeClr val="bg2"/>
+                                </a:solidFill>
+                                <a:latin typeface="Cambria Math" panose="02040503050406030204" pitchFamily="18" charset="0"/>
+                                <a:cs typeface="Times New Roman" panose="02020603050405020304" pitchFamily="18" charset="0"/>
+                                <a:sym typeface="Times New Roman"/>
+                              </a:rPr>
+                              <m:t>⊗</m:t>
+                            </m:r>
+                            <m:r>
+                              <a:rPr lang="en-US" sz="1600" i="1">
+                                <a:solidFill>
+                                  <a:schemeClr val="bg2"/>
+                                </a:solidFill>
+                                <a:latin typeface="Cambria Math" panose="02040503050406030204" pitchFamily="18" charset="0"/>
+                                <a:cs typeface="Times New Roman" panose="02020603050405020304" pitchFamily="18" charset="0"/>
+                                <a:sym typeface="Times New Roman"/>
+                              </a:rPr>
+                              <m:t>𝗦</m:t>
+                            </m:r>
+                            <m:r>
+                              <a:rPr lang="en-US" sz="1600" i="1">
+                                <a:solidFill>
+                                  <a:schemeClr val="bg2"/>
+                                </a:solidFill>
+                                <a:latin typeface="Cambria Math" panose="02040503050406030204" pitchFamily="18" charset="0"/>
+                                <a:cs typeface="Times New Roman" panose="02020603050405020304" pitchFamily="18" charset="0"/>
+                                <a:sym typeface="Times New Roman"/>
+                              </a:rPr>
+                              <m:t>⊗…⊗</m:t>
+                            </m:r>
+                            <m:r>
+                              <a:rPr lang="en-US" sz="1600" i="1">
+                                <a:solidFill>
+                                  <a:schemeClr val="bg2"/>
+                                </a:solidFill>
+                                <a:latin typeface="Cambria Math" panose="02040503050406030204" pitchFamily="18" charset="0"/>
+                                <a:cs typeface="Times New Roman" panose="02020603050405020304" pitchFamily="18" charset="0"/>
+                                <a:sym typeface="Times New Roman"/>
+                              </a:rPr>
+                              <m:t>𝗦</m:t>
+                            </m:r>
+                          </m:e>
+                        </m:groupChr>
+                      </m:e>
+                      <m:lim>
+                        <m:r>
+                          <a:rPr lang="en-US" sz="1600" i="1">
+                            <a:solidFill>
+                              <a:schemeClr val="bg2"/>
+                            </a:solidFill>
+                            <a:latin typeface="Cambria Math" panose="02040503050406030204" pitchFamily="18" charset="0"/>
+                            <a:cs typeface="Times New Roman" panose="02020603050405020304" pitchFamily="18" charset="0"/>
+                            <a:sym typeface="Times New Roman"/>
+                          </a:rPr>
+                          <m:t>𝑘</m:t>
+                        </m:r>
+                        <m:r>
+                          <a:rPr lang="en-US" sz="1600" b="0" i="1" smtClean="0">
+                            <a:solidFill>
+                              <a:schemeClr val="bg2"/>
+                            </a:solidFill>
+                            <a:latin typeface="Cambria Math" panose="02040503050406030204" pitchFamily="18" charset="0"/>
+                            <a:cs typeface="Times New Roman" panose="02020603050405020304" pitchFamily="18" charset="0"/>
+                            <a:sym typeface="Times New Roman"/>
+                          </a:rPr>
+                          <m:t> </m:t>
+                        </m:r>
+                        <m:r>
+                          <m:rPr>
+                            <m:sty m:val="p"/>
+                          </m:rPr>
+                          <a:rPr lang="en-US" sz="1600" b="0" i="1" smtClean="0">
+                            <a:solidFill>
+                              <a:schemeClr val="bg2"/>
+                            </a:solidFill>
+                            <a:latin typeface="Cambria Math" panose="02040503050406030204" pitchFamily="18" charset="0"/>
+                            <a:cs typeface="Times New Roman" panose="02020603050405020304" pitchFamily="18" charset="0"/>
+                            <a:sym typeface="Times New Roman"/>
+                          </a:rPr>
+                          <m:t>times</m:t>
+                        </m:r>
+                      </m:lim>
+                    </m:limLow>
+                  </m:oMath>
+                </a14:m>
+                <a:endParaRPr lang="en-US" sz="2000" dirty="0">
+                  <a:solidFill>
+                    <a:schemeClr val="bg2"/>
+                  </a:solidFill>
+                  <a:latin typeface="Times New Roman" panose="02020603050405020304" pitchFamily="18" charset="0"/>
+                  <a:ea typeface="Times New Roman"/>
+                  <a:cs typeface="Times New Roman" panose="02020603050405020304" pitchFamily="18" charset="0"/>
+                  <a:sym typeface="Times New Roman"/>
+                </a:endParaRPr>
+              </a:p>
+              <a:p>
+                <a:pPr marL="342900">
+                  <a:lnSpc>
+                    <a:spcPct val="100000"/>
+                  </a:lnSpc>
+                  <a:buClr>
+                    <a:schemeClr val="bg2"/>
+                  </a:buClr>
+                  <a:buFont typeface="Arial" panose="020B0604020202020204" pitchFamily="34" charset="0"/>
+                  <a:buChar char="•"/>
+                </a:pPr>
+                <a14:m>
+                  <m:oMath xmlns:m="http://schemas.openxmlformats.org/officeDocument/2006/math">
+                    <m:r>
+                      <a:rPr lang="en-US" sz="2000" i="1">
+                        <a:solidFill>
+                          <a:schemeClr val="bg2"/>
+                        </a:solidFill>
+                        <a:latin typeface="Cambria Math" panose="02040503050406030204" pitchFamily="18" charset="0"/>
+                        <a:ea typeface="Times New Roman"/>
+                        <a:cs typeface="Times New Roman" panose="02020603050405020304" pitchFamily="18" charset="0"/>
+                        <a:sym typeface="Times New Roman"/>
+                      </a:rPr>
+                      <m:t>𝐿𝑒𝑥</m:t>
+                    </m:r>
+                  </m:oMath>
+                </a14:m>
+                <a:r>
+                  <a:rPr lang="en-US" sz="2000" dirty="0">
+                    <a:solidFill>
+                      <a:schemeClr val="bg2"/>
+                    </a:solidFill>
+                    <a:latin typeface="Times New Roman" panose="02020603050405020304" pitchFamily="18" charset="0"/>
+                    <a:ea typeface="Times New Roman"/>
+                    <a:cs typeface="Times New Roman" panose="02020603050405020304" pitchFamily="18" charset="0"/>
+                    <a:sym typeface="Times New Roman"/>
+                  </a:rPr>
+                  <a:t> is the lexicon over the MG</a:t>
+                </a:r>
+              </a:p>
+              <a:p>
+                <a:pPr marL="342900">
+                  <a:lnSpc>
+                    <a:spcPct val="100000"/>
+                  </a:lnSpc>
+                  <a:buClr>
+                    <a:schemeClr val="bg2"/>
+                  </a:buClr>
+                  <a:buFont typeface="Arial" panose="020B0604020202020204" pitchFamily="34" charset="0"/>
+                  <a:buChar char="•"/>
+                </a:pPr>
+                <a14:m>
+                  <m:oMath xmlns:m="http://schemas.openxmlformats.org/officeDocument/2006/math">
+                    <m:sSub>
+                      <m:sSubPr>
+                        <m:ctrlPr>
+                          <a:rPr lang="en-US" sz="2000" i="1">
+                            <a:solidFill>
+                              <a:schemeClr val="bg2"/>
+                            </a:solidFill>
+                            <a:latin typeface="Cambria Math" panose="02040503050406030204" pitchFamily="18" charset="0"/>
+                            <a:ea typeface="Times New Roman"/>
+                            <a:cs typeface="Times New Roman" panose="02020603050405020304" pitchFamily="18" charset="0"/>
+                            <a:sym typeface="Times New Roman"/>
+                          </a:rPr>
+                        </m:ctrlPr>
+                      </m:sSubPr>
+                      <m:e>
+                        <m:r>
+                          <a:rPr lang="en-US" sz="2000" i="1">
+                            <a:solidFill>
+                              <a:schemeClr val="bg2"/>
+                            </a:solidFill>
+                            <a:latin typeface="Cambria Math" panose="02040503050406030204" pitchFamily="18" charset="0"/>
+                            <a:ea typeface="Times New Roman"/>
+                            <a:cs typeface="Times New Roman" panose="02020603050405020304" pitchFamily="18" charset="0"/>
+                            <a:sym typeface="Times New Roman"/>
+                          </a:rPr>
+                          <m:t>𝑇</m:t>
+                        </m:r>
+                      </m:e>
+                      <m:sub>
+                        <m:r>
+                          <a:rPr lang="en-US" sz="2000" i="1">
+                            <a:solidFill>
+                              <a:schemeClr val="bg2"/>
+                            </a:solidFill>
+                            <a:latin typeface="Cambria Math" panose="02040503050406030204" pitchFamily="18" charset="0"/>
+                            <a:ea typeface="Times New Roman"/>
+                            <a:cs typeface="Times New Roman" panose="02020603050405020304" pitchFamily="18" charset="0"/>
+                            <a:sym typeface="Times New Roman"/>
+                          </a:rPr>
+                          <m:t>𝐴</m:t>
+                        </m:r>
+                      </m:sub>
+                    </m:sSub>
+                  </m:oMath>
+                </a14:m>
+                <a:r>
+                  <a:rPr lang="en-US" sz="2000" dirty="0">
+                    <a:solidFill>
+                      <a:schemeClr val="bg2"/>
+                    </a:solidFill>
+                    <a:latin typeface="Times New Roman" panose="02020603050405020304" pitchFamily="18" charset="0"/>
+                    <a:ea typeface="Times New Roman"/>
+                    <a:cs typeface="Times New Roman" panose="02020603050405020304" pitchFamily="18" charset="0"/>
+                    <a:sym typeface="Times New Roman"/>
+                  </a:rPr>
+                  <a:t> is the set of trees over the MG</a:t>
+                </a:r>
+              </a:p>
+              <a:p>
+                <a:pPr marL="342900">
+                  <a:lnSpc>
+                    <a:spcPct val="100000"/>
+                  </a:lnSpc>
+                  <a:buClr>
+                    <a:schemeClr val="bg2"/>
+                  </a:buClr>
+                  <a:buFont typeface="Arial" panose="020B0604020202020204" pitchFamily="34" charset="0"/>
+                  <a:buChar char="•"/>
+                </a:pPr>
+                <a14:m>
+                  <m:oMath xmlns:m="http://schemas.openxmlformats.org/officeDocument/2006/math">
+                    <m:r>
+                      <a:rPr lang="en-US" sz="2000" i="1">
+                        <a:solidFill>
+                          <a:schemeClr val="bg2"/>
+                        </a:solidFill>
+                        <a:latin typeface="Cambria Math" panose="02040503050406030204" pitchFamily="18" charset="0"/>
+                        <a:ea typeface="Times New Roman"/>
+                        <a:cs typeface="Times New Roman" panose="02020603050405020304" pitchFamily="18" charset="0"/>
+                        <a:sym typeface="Times New Roman"/>
+                      </a:rPr>
+                      <m:t>𝜑</m:t>
+                    </m:r>
+                    <m:r>
+                      <a:rPr lang="en-US" sz="2000" i="1">
+                        <a:solidFill>
+                          <a:schemeClr val="bg2"/>
+                        </a:solidFill>
+                        <a:latin typeface="Cambria Math" panose="02040503050406030204" pitchFamily="18" charset="0"/>
+                        <a:ea typeface="Times New Roman"/>
+                        <a:cs typeface="Times New Roman" panose="02020603050405020304" pitchFamily="18" charset="0"/>
+                        <a:sym typeface="Times New Roman"/>
+                      </a:rPr>
+                      <m:t>:</m:t>
+                    </m:r>
+                    <m:r>
+                      <a:rPr lang="en-US" sz="2000" i="1">
+                        <a:solidFill>
+                          <a:schemeClr val="bg2"/>
+                        </a:solidFill>
+                        <a:latin typeface="Cambria Math" panose="02040503050406030204" pitchFamily="18" charset="0"/>
+                        <a:ea typeface="Times New Roman"/>
+                        <a:cs typeface="Times New Roman" panose="02020603050405020304" pitchFamily="18" charset="0"/>
+                        <a:sym typeface="Times New Roman"/>
+                      </a:rPr>
+                      <m:t>𝐿𝑒𝑥</m:t>
+                    </m:r>
+                    <m:r>
+                      <a:rPr lang="en-US" sz="2000" i="1">
+                        <a:solidFill>
+                          <a:schemeClr val="bg2"/>
+                        </a:solidFill>
+                        <a:latin typeface="Cambria Math" panose="02040503050406030204" pitchFamily="18" charset="0"/>
+                        <a:ea typeface="Times New Roman"/>
+                        <a:cs typeface="Times New Roman" panose="02020603050405020304" pitchFamily="18" charset="0"/>
+                        <a:sym typeface="Times New Roman"/>
+                      </a:rPr>
+                      <m:t>→</m:t>
+                    </m:r>
+                    <m:r>
+                      <a:rPr lang="en-US" sz="2000" i="1">
+                        <a:solidFill>
+                          <a:schemeClr val="bg2"/>
+                        </a:solidFill>
+                        <a:latin typeface="Cambria Math" panose="02040503050406030204" pitchFamily="18" charset="0"/>
+                        <a:ea typeface="Times New Roman"/>
+                        <a:cs typeface="Times New Roman" panose="02020603050405020304" pitchFamily="18" charset="0"/>
+                        <a:sym typeface="Times New Roman"/>
+                      </a:rPr>
+                      <m:t>𝗟</m:t>
+                    </m:r>
+                  </m:oMath>
+                </a14:m>
+                <a:r>
+                  <a:rPr lang="en-US" sz="2000" dirty="0">
+                    <a:solidFill>
+                      <a:schemeClr val="bg2"/>
+                    </a:solidFill>
+                    <a:latin typeface="Times New Roman" panose="02020603050405020304" pitchFamily="18" charset="0"/>
+                    <a:ea typeface="Times New Roman"/>
+                    <a:cs typeface="Times New Roman" panose="02020603050405020304" pitchFamily="18" charset="0"/>
+                    <a:sym typeface="Times New Roman"/>
+                  </a:rPr>
+                  <a:t> maps each lexical item to the space corresponding to its feature string</a:t>
+                </a:r>
+              </a:p>
+              <a:p>
+                <a:pPr marL="342900" lvl="2" indent="-342900">
+                  <a:lnSpc>
+                    <a:spcPct val="100000"/>
+                  </a:lnSpc>
+                  <a:buClr>
+                    <a:schemeClr val="bg2"/>
+                  </a:buClr>
+                  <a:buFont typeface="Arial" panose="020B0604020202020204" pitchFamily="34" charset="0"/>
+                  <a:buChar char="•"/>
+                </a:pPr>
+                <a14:m>
+                  <m:oMath xmlns:m="http://schemas.openxmlformats.org/officeDocument/2006/math">
+                    <m:r>
+                      <m:rPr>
+                        <m:sty m:val="p"/>
+                      </m:rPr>
+                      <a:rPr lang="en-US" sz="2000">
+                        <a:solidFill>
+                          <a:schemeClr val="bg2"/>
+                        </a:solidFill>
+                        <a:latin typeface="Cambria Math" panose="02040503050406030204" pitchFamily="18" charset="0"/>
+                        <a:ea typeface="Times New Roman"/>
+                        <a:cs typeface="Times New Roman" panose="02020603050405020304" pitchFamily="18" charset="0"/>
+                        <a:sym typeface="Times New Roman"/>
+                      </a:rPr>
+                      <m:t>Φ</m:t>
+                    </m:r>
+                    <m:r>
+                      <a:rPr lang="en-US" sz="2000" i="1">
+                        <a:solidFill>
+                          <a:schemeClr val="bg2"/>
+                        </a:solidFill>
+                        <a:latin typeface="Cambria Math" panose="02040503050406030204" pitchFamily="18" charset="0"/>
+                        <a:ea typeface="Times New Roman"/>
+                        <a:cs typeface="Times New Roman" panose="02020603050405020304" pitchFamily="18" charset="0"/>
+                        <a:sym typeface="Times New Roman"/>
+                      </a:rPr>
+                      <m:t>:</m:t>
+                    </m:r>
+                    <m:sSub>
+                      <m:sSubPr>
+                        <m:ctrlPr>
+                          <a:rPr lang="en-US" sz="2000" i="1">
+                            <a:solidFill>
+                              <a:schemeClr val="bg2"/>
+                            </a:solidFill>
+                            <a:latin typeface="Cambria Math" panose="02040503050406030204" pitchFamily="18" charset="0"/>
+                            <a:ea typeface="Times New Roman"/>
+                            <a:cs typeface="Times New Roman" panose="02020603050405020304" pitchFamily="18" charset="0"/>
+                            <a:sym typeface="Times New Roman"/>
+                          </a:rPr>
+                        </m:ctrlPr>
+                      </m:sSubPr>
+                      <m:e>
+                        <m:r>
+                          <a:rPr lang="en-US" sz="2000" i="1">
+                            <a:solidFill>
+                              <a:schemeClr val="bg2"/>
+                            </a:solidFill>
+                            <a:latin typeface="Cambria Math" panose="02040503050406030204" pitchFamily="18" charset="0"/>
+                            <a:ea typeface="Times New Roman"/>
+                            <a:cs typeface="Times New Roman" panose="02020603050405020304" pitchFamily="18" charset="0"/>
+                            <a:sym typeface="Times New Roman"/>
+                          </a:rPr>
+                          <m:t>𝑇</m:t>
+                        </m:r>
+                      </m:e>
+                      <m:sub>
+                        <m:r>
+                          <a:rPr lang="en-US" sz="2000" i="1">
+                            <a:solidFill>
+                              <a:schemeClr val="bg2"/>
+                            </a:solidFill>
+                            <a:latin typeface="Cambria Math" panose="02040503050406030204" pitchFamily="18" charset="0"/>
+                            <a:ea typeface="Times New Roman"/>
+                            <a:cs typeface="Times New Roman" panose="02020603050405020304" pitchFamily="18" charset="0"/>
+                            <a:sym typeface="Times New Roman"/>
+                          </a:rPr>
+                          <m:t>𝐴</m:t>
+                        </m:r>
+                      </m:sub>
+                    </m:sSub>
+                    <m:r>
+                      <a:rPr lang="en-US" sz="2000" i="1">
+                        <a:solidFill>
+                          <a:schemeClr val="bg2"/>
+                        </a:solidFill>
+                        <a:latin typeface="Cambria Math" panose="02040503050406030204" pitchFamily="18" charset="0"/>
+                        <a:ea typeface="Times New Roman"/>
+                        <a:cs typeface="Times New Roman" panose="02020603050405020304" pitchFamily="18" charset="0"/>
+                        <a:sym typeface="Times New Roman"/>
+                      </a:rPr>
+                      <m:t>→</m:t>
+                    </m:r>
+                    <m:r>
+                      <a:rPr lang="en-US" sz="2000" i="1">
+                        <a:solidFill>
+                          <a:schemeClr val="bg2"/>
+                        </a:solidFill>
+                        <a:latin typeface="Cambria Math" panose="02040503050406030204" pitchFamily="18" charset="0"/>
+                        <a:ea typeface="Times New Roman"/>
+                        <a:cs typeface="Times New Roman" panose="02020603050405020304" pitchFamily="18" charset="0"/>
+                        <a:sym typeface="Times New Roman"/>
+                      </a:rPr>
+                      <m:t>𝗟</m:t>
+                    </m:r>
+                  </m:oMath>
+                </a14:m>
+                <a:r>
+                  <a:rPr lang="en-US" sz="2000" dirty="0">
+                    <a:solidFill>
+                      <a:schemeClr val="bg2"/>
+                    </a:solidFill>
+                    <a:latin typeface="Times New Roman" panose="02020603050405020304" pitchFamily="18" charset="0"/>
+                    <a:ea typeface="Times New Roman"/>
+                    <a:cs typeface="Times New Roman" panose="02020603050405020304" pitchFamily="18" charset="0"/>
+                    <a:sym typeface="Times New Roman"/>
+                  </a:rPr>
+                  <a:t> extends </a:t>
+                </a:r>
+                <a14:m>
+                  <m:oMath xmlns:m="http://schemas.openxmlformats.org/officeDocument/2006/math">
+                    <m:r>
+                      <a:rPr lang="en-US" sz="2000" i="1">
+                        <a:solidFill>
+                          <a:schemeClr val="bg2"/>
+                        </a:solidFill>
+                        <a:latin typeface="Cambria Math" panose="02040503050406030204" pitchFamily="18" charset="0"/>
+                        <a:ea typeface="Times New Roman"/>
+                        <a:cs typeface="Times New Roman" panose="02020603050405020304" pitchFamily="18" charset="0"/>
+                        <a:sym typeface="Times New Roman"/>
+                      </a:rPr>
+                      <m:t>𝜑</m:t>
+                    </m:r>
+                  </m:oMath>
+                </a14:m>
+                <a:r>
+                  <a:rPr lang="en-US" sz="2000" dirty="0">
+                    <a:solidFill>
+                      <a:schemeClr val="bg2"/>
+                    </a:solidFill>
+                    <a:latin typeface="Times New Roman" panose="02020603050405020304" pitchFamily="18" charset="0"/>
+                    <a:ea typeface="Times New Roman"/>
+                    <a:cs typeface="Times New Roman" panose="02020603050405020304" pitchFamily="18" charset="0"/>
+                    <a:sym typeface="Times New Roman"/>
+                  </a:rPr>
+                  <a:t> by </a:t>
+                </a:r>
+              </a:p>
+              <a:p>
+                <a:pPr marL="800100" lvl="3" indent="-342900">
+                  <a:lnSpc>
+                    <a:spcPct val="100000"/>
+                  </a:lnSpc>
+                  <a:buClr>
+                    <a:schemeClr val="bg2"/>
+                  </a:buClr>
+                  <a:buFont typeface="Arial" panose="020B0604020202020204" pitchFamily="34" charset="0"/>
+                  <a:buChar char="•"/>
+                </a:pPr>
+                <a14:m>
+                  <m:oMath xmlns:m="http://schemas.openxmlformats.org/officeDocument/2006/math">
+                    <m:r>
+                      <m:rPr>
+                        <m:sty m:val="p"/>
+                      </m:rPr>
+                      <a:rPr lang="en-US" sz="1600" smtClean="0">
+                        <a:solidFill>
+                          <a:schemeClr val="bg2"/>
+                        </a:solidFill>
+                        <a:latin typeface="Cambria Math" panose="02040503050406030204" pitchFamily="18" charset="0"/>
+                        <a:ea typeface="Times New Roman"/>
+                        <a:cs typeface="Times New Roman" panose="02020603050405020304" pitchFamily="18" charset="0"/>
+                        <a:sym typeface="Times New Roman"/>
+                      </a:rPr>
+                      <m:t>Φ</m:t>
+                    </m:r>
+                    <m:d>
+                      <m:dPr>
+                        <m:ctrlPr>
+                          <a:rPr lang="en-US" sz="1600" b="0" i="1" smtClean="0">
+                            <a:solidFill>
+                              <a:schemeClr val="bg2"/>
+                            </a:solidFill>
+                            <a:latin typeface="Cambria Math" panose="02040503050406030204" pitchFamily="18" charset="0"/>
+                            <a:ea typeface="Times New Roman"/>
+                            <a:cs typeface="Times New Roman" panose="02020603050405020304" pitchFamily="18" charset="0"/>
+                            <a:sym typeface="Times New Roman"/>
+                          </a:rPr>
+                        </m:ctrlPr>
+                      </m:dPr>
+                      <m:e>
+                        <m:r>
+                          <a:rPr lang="en-US" sz="1600" b="0" i="0" smtClean="0">
+                            <a:solidFill>
+                              <a:schemeClr val="bg2"/>
+                            </a:solidFill>
+                            <a:latin typeface="Cambria Math" panose="02040503050406030204" pitchFamily="18" charset="0"/>
+                            <a:ea typeface="Times New Roman"/>
+                            <a:cs typeface="Times New Roman" panose="02020603050405020304" pitchFamily="18" charset="0"/>
+                            <a:sym typeface="Times New Roman"/>
+                          </a:rPr>
+                          <m:t>𝑡</m:t>
+                        </m:r>
+                      </m:e>
+                    </m:d>
+                    <m:r>
+                      <a:rPr lang="en-US" sz="1600" b="0" i="0" smtClean="0">
+                        <a:solidFill>
+                          <a:schemeClr val="bg2"/>
+                        </a:solidFill>
+                        <a:latin typeface="Cambria Math" panose="02040503050406030204" pitchFamily="18" charset="0"/>
+                        <a:ea typeface="Times New Roman"/>
+                        <a:cs typeface="Times New Roman" panose="02020603050405020304" pitchFamily="18" charset="0"/>
+                        <a:sym typeface="Times New Roman"/>
+                      </a:rPr>
+                      <m:t>=</m:t>
+                    </m:r>
+                    <m:r>
+                      <a:rPr lang="en-US" sz="1600" b="0" i="0" smtClean="0">
+                        <a:solidFill>
+                          <a:schemeClr val="bg2"/>
+                        </a:solidFill>
+                        <a:latin typeface="Cambria Math" panose="02040503050406030204" pitchFamily="18" charset="0"/>
+                        <a:ea typeface="Times New Roman"/>
+                        <a:cs typeface="Times New Roman" panose="02020603050405020304" pitchFamily="18" charset="0"/>
+                        <a:sym typeface="Times New Roman"/>
+                      </a:rPr>
+                      <m:t>𝜑</m:t>
+                    </m:r>
+                    <m:d>
+                      <m:dPr>
+                        <m:ctrlPr>
+                          <a:rPr lang="en-US" sz="1600" b="0" i="1" smtClean="0">
+                            <a:solidFill>
+                              <a:schemeClr val="bg2"/>
+                            </a:solidFill>
+                            <a:latin typeface="Cambria Math" panose="02040503050406030204" pitchFamily="18" charset="0"/>
+                            <a:ea typeface="Times New Roman"/>
+                            <a:cs typeface="Times New Roman" panose="02020603050405020304" pitchFamily="18" charset="0"/>
+                            <a:sym typeface="Times New Roman"/>
+                          </a:rPr>
+                        </m:ctrlPr>
+                      </m:dPr>
+                      <m:e>
+                        <m:r>
+                          <a:rPr lang="en-US" sz="1600" b="0" i="0" smtClean="0">
+                            <a:solidFill>
+                              <a:schemeClr val="bg2"/>
+                            </a:solidFill>
+                            <a:latin typeface="Cambria Math" panose="02040503050406030204" pitchFamily="18" charset="0"/>
+                            <a:ea typeface="Times New Roman"/>
+                            <a:cs typeface="Times New Roman" panose="02020603050405020304" pitchFamily="18" charset="0"/>
+                            <a:sym typeface="Times New Roman"/>
+                          </a:rPr>
+                          <m:t>𝑡</m:t>
+                        </m:r>
+                      </m:e>
+                    </m:d>
+                  </m:oMath>
+                </a14:m>
+                <a:r>
+                  <a:rPr lang="en-US" sz="1600" dirty="0">
+                    <a:solidFill>
+                      <a:schemeClr val="bg2"/>
+                    </a:solidFill>
+                    <a:latin typeface="Times New Roman" panose="02020603050405020304" pitchFamily="18" charset="0"/>
+                    <a:ea typeface="Times New Roman"/>
+                    <a:cs typeface="Times New Roman" panose="02020603050405020304" pitchFamily="18" charset="0"/>
+                    <a:sym typeface="Times New Roman"/>
+                  </a:rPr>
+                  <a:t>, if </a:t>
+                </a:r>
+                <a14:m>
+                  <m:oMath xmlns:m="http://schemas.openxmlformats.org/officeDocument/2006/math">
+                    <m:r>
+                      <a:rPr lang="en-US" sz="1600" b="0" i="1" smtClean="0">
+                        <a:solidFill>
+                          <a:schemeClr val="bg2"/>
+                        </a:solidFill>
+                        <a:latin typeface="Cambria Math" panose="02040503050406030204" pitchFamily="18" charset="0"/>
+                        <a:ea typeface="Times New Roman"/>
+                        <a:cs typeface="Times New Roman" panose="02020603050405020304" pitchFamily="18" charset="0"/>
+                        <a:sym typeface="Times New Roman"/>
+                      </a:rPr>
+                      <m:t>𝑡</m:t>
+                    </m:r>
+                    <m:r>
+                      <a:rPr lang="en-US" sz="1600" b="0" i="1" smtClean="0">
+                        <a:solidFill>
+                          <a:schemeClr val="bg2"/>
+                        </a:solidFill>
+                        <a:latin typeface="Cambria Math" panose="02040503050406030204" pitchFamily="18" charset="0"/>
+                        <a:ea typeface="Times New Roman"/>
+                        <a:cs typeface="Times New Roman" panose="02020603050405020304" pitchFamily="18" charset="0"/>
+                        <a:sym typeface="Times New Roman"/>
+                      </a:rPr>
+                      <m:t> ∈</m:t>
+                    </m:r>
+                    <m:r>
+                      <a:rPr lang="en-US" sz="1600" b="0" i="1" smtClean="0">
+                        <a:solidFill>
+                          <a:schemeClr val="bg2"/>
+                        </a:solidFill>
+                        <a:latin typeface="Cambria Math" panose="02040503050406030204" pitchFamily="18" charset="0"/>
+                        <a:ea typeface="Times New Roman"/>
+                        <a:cs typeface="Times New Roman" panose="02020603050405020304" pitchFamily="18" charset="0"/>
+                        <a:sym typeface="Times New Roman"/>
+                      </a:rPr>
+                      <m:t>𝐿𝑒𝑥</m:t>
+                    </m:r>
+                  </m:oMath>
+                </a14:m>
+                <a:endParaRPr lang="en-US" sz="1600" dirty="0">
+                  <a:solidFill>
+                    <a:schemeClr val="bg2"/>
+                  </a:solidFill>
+                  <a:latin typeface="Times New Roman" panose="02020603050405020304" pitchFamily="18" charset="0"/>
+                  <a:ea typeface="Times New Roman"/>
+                  <a:cs typeface="Times New Roman" panose="02020603050405020304" pitchFamily="18" charset="0"/>
+                  <a:sym typeface="Times New Roman"/>
+                </a:endParaRPr>
+              </a:p>
+              <a:p>
+                <a:pPr marL="800100" lvl="3" indent="-342900">
+                  <a:lnSpc>
+                    <a:spcPct val="100000"/>
+                  </a:lnSpc>
+                  <a:buClr>
+                    <a:schemeClr val="bg2"/>
+                  </a:buClr>
+                  <a:buFont typeface="Arial" panose="020B0604020202020204" pitchFamily="34" charset="0"/>
+                  <a:buChar char="•"/>
+                </a:pPr>
+                <a14:m>
+                  <m:oMath xmlns:m="http://schemas.openxmlformats.org/officeDocument/2006/math">
+                    <m:r>
+                      <m:rPr>
+                        <m:sty m:val="p"/>
+                      </m:rPr>
+                      <a:rPr lang="en-US" sz="1600" b="0" i="0" smtClean="0">
+                        <a:solidFill>
+                          <a:schemeClr val="bg2"/>
+                        </a:solidFill>
+                        <a:latin typeface="Cambria Math" panose="02040503050406030204" pitchFamily="18" charset="0"/>
+                        <a:ea typeface="Times New Roman"/>
+                        <a:cs typeface="Times New Roman" panose="02020603050405020304" pitchFamily="18" charset="0"/>
+                        <a:sym typeface="Times New Roman"/>
+                      </a:rPr>
+                      <m:t>Φ</m:t>
+                    </m:r>
+                    <m:d>
+                      <m:dPr>
+                        <m:ctrlPr>
+                          <a:rPr lang="en-US" sz="1600" b="0" i="1" smtClean="0">
+                            <a:solidFill>
+                              <a:schemeClr val="bg2"/>
+                            </a:solidFill>
+                            <a:latin typeface="Cambria Math" panose="02040503050406030204" pitchFamily="18" charset="0"/>
+                            <a:ea typeface="Times New Roman"/>
+                            <a:cs typeface="Times New Roman" panose="02020603050405020304" pitchFamily="18" charset="0"/>
+                            <a:sym typeface="Times New Roman"/>
+                          </a:rPr>
+                        </m:ctrlPr>
+                      </m:dPr>
+                      <m:e>
+                        <m:r>
+                          <a:rPr lang="en-US" sz="1600" b="0" i="1" smtClean="0">
+                            <a:solidFill>
+                              <a:schemeClr val="bg2"/>
+                            </a:solidFill>
+                            <a:latin typeface="Cambria Math" panose="02040503050406030204" pitchFamily="18" charset="0"/>
+                            <a:ea typeface="Times New Roman"/>
+                            <a:cs typeface="Times New Roman" panose="02020603050405020304" pitchFamily="18" charset="0"/>
+                            <a:sym typeface="Times New Roman"/>
+                          </a:rPr>
+                          <m:t>𝑚𝑒𝑟𝑔𝑒</m:t>
+                        </m:r>
+                        <m:d>
+                          <m:dPr>
+                            <m:ctrlPr>
+                              <a:rPr lang="en-US" sz="1600" b="0" i="1" smtClean="0">
+                                <a:solidFill>
+                                  <a:schemeClr val="bg2"/>
+                                </a:solidFill>
+                                <a:latin typeface="Cambria Math" panose="02040503050406030204" pitchFamily="18" charset="0"/>
+                                <a:ea typeface="Times New Roman"/>
+                                <a:cs typeface="Times New Roman" panose="02020603050405020304" pitchFamily="18" charset="0"/>
+                                <a:sym typeface="Times New Roman"/>
+                              </a:rPr>
+                            </m:ctrlPr>
+                          </m:dPr>
+                          <m:e>
+                            <m:sSub>
+                              <m:sSubPr>
+                                <m:ctrlPr>
+                                  <a:rPr lang="en-US" sz="1600" b="0" i="1" smtClean="0">
+                                    <a:solidFill>
+                                      <a:schemeClr val="bg2"/>
+                                    </a:solidFill>
+                                    <a:latin typeface="Cambria Math" panose="02040503050406030204" pitchFamily="18" charset="0"/>
+                                    <a:ea typeface="Times New Roman"/>
+                                    <a:cs typeface="Times New Roman" panose="02020603050405020304" pitchFamily="18" charset="0"/>
+                                    <a:sym typeface="Times New Roman"/>
+                                  </a:rPr>
+                                </m:ctrlPr>
+                              </m:sSubPr>
+                              <m:e>
+                                <m:r>
+                                  <a:rPr lang="en-US" sz="1600" b="0" i="1" smtClean="0">
+                                    <a:solidFill>
+                                      <a:schemeClr val="bg2"/>
+                                    </a:solidFill>
+                                    <a:latin typeface="Cambria Math" panose="02040503050406030204" pitchFamily="18" charset="0"/>
+                                    <a:ea typeface="Times New Roman"/>
+                                    <a:cs typeface="Times New Roman" panose="02020603050405020304" pitchFamily="18" charset="0"/>
+                                    <a:sym typeface="Times New Roman"/>
+                                  </a:rPr>
+                                  <m:t>𝑡</m:t>
+                                </m:r>
+                              </m:e>
+                              <m:sub>
+                                <m:r>
+                                  <a:rPr lang="en-US" sz="1600" b="0" i="1" smtClean="0">
+                                    <a:solidFill>
+                                      <a:schemeClr val="bg2"/>
+                                    </a:solidFill>
+                                    <a:latin typeface="Cambria Math" panose="02040503050406030204" pitchFamily="18" charset="0"/>
+                                    <a:ea typeface="Times New Roman"/>
+                                    <a:cs typeface="Times New Roman" panose="02020603050405020304" pitchFamily="18" charset="0"/>
+                                    <a:sym typeface="Times New Roman"/>
+                                  </a:rPr>
+                                  <m:t>1</m:t>
+                                </m:r>
+                              </m:sub>
+                            </m:sSub>
+                            <m:r>
+                              <a:rPr lang="en-US" sz="1600" b="0" i="1" smtClean="0">
+                                <a:solidFill>
+                                  <a:schemeClr val="bg2"/>
+                                </a:solidFill>
+                                <a:latin typeface="Cambria Math" panose="02040503050406030204" pitchFamily="18" charset="0"/>
+                                <a:ea typeface="Times New Roman"/>
+                                <a:cs typeface="Times New Roman" panose="02020603050405020304" pitchFamily="18" charset="0"/>
+                                <a:sym typeface="Times New Roman"/>
+                              </a:rPr>
+                              <m:t>,</m:t>
+                            </m:r>
+                            <m:sSub>
+                              <m:sSubPr>
+                                <m:ctrlPr>
+                                  <a:rPr lang="en-US" sz="1600" b="0" i="1" smtClean="0">
+                                    <a:solidFill>
+                                      <a:schemeClr val="bg2"/>
+                                    </a:solidFill>
+                                    <a:latin typeface="Cambria Math" panose="02040503050406030204" pitchFamily="18" charset="0"/>
+                                    <a:ea typeface="Times New Roman"/>
+                                    <a:cs typeface="Times New Roman" panose="02020603050405020304" pitchFamily="18" charset="0"/>
+                                    <a:sym typeface="Times New Roman"/>
+                                  </a:rPr>
+                                </m:ctrlPr>
+                              </m:sSubPr>
+                              <m:e>
+                                <m:r>
+                                  <a:rPr lang="en-US" sz="1600" b="0" i="1" smtClean="0">
+                                    <a:solidFill>
+                                      <a:schemeClr val="bg2"/>
+                                    </a:solidFill>
+                                    <a:latin typeface="Cambria Math" panose="02040503050406030204" pitchFamily="18" charset="0"/>
+                                    <a:ea typeface="Times New Roman"/>
+                                    <a:cs typeface="Times New Roman" panose="02020603050405020304" pitchFamily="18" charset="0"/>
+                                    <a:sym typeface="Times New Roman"/>
+                                  </a:rPr>
+                                  <m:t>𝑡</m:t>
+                                </m:r>
+                              </m:e>
+                              <m:sub>
+                                <m:r>
+                                  <a:rPr lang="en-US" sz="1600" b="0" i="1" smtClean="0">
+                                    <a:solidFill>
+                                      <a:schemeClr val="bg2"/>
+                                    </a:solidFill>
+                                    <a:latin typeface="Cambria Math" panose="02040503050406030204" pitchFamily="18" charset="0"/>
+                                    <a:ea typeface="Times New Roman"/>
+                                    <a:cs typeface="Times New Roman" panose="02020603050405020304" pitchFamily="18" charset="0"/>
+                                    <a:sym typeface="Times New Roman"/>
+                                  </a:rPr>
+                                  <m:t>2</m:t>
+                                </m:r>
+                              </m:sub>
+                            </m:sSub>
+                          </m:e>
+                        </m:d>
+                      </m:e>
+                    </m:d>
+                    <m:r>
+                      <a:rPr lang="en-US" sz="1600" b="0" i="1" smtClean="0">
+                        <a:solidFill>
+                          <a:schemeClr val="bg2"/>
+                        </a:solidFill>
+                        <a:latin typeface="Cambria Math" panose="02040503050406030204" pitchFamily="18" charset="0"/>
+                        <a:ea typeface="Times New Roman"/>
+                        <a:cs typeface="Times New Roman" panose="02020603050405020304" pitchFamily="18" charset="0"/>
+                        <a:sym typeface="Times New Roman"/>
+                      </a:rPr>
+                      <m:t>=</m:t>
+                    </m:r>
+                    <m:r>
+                      <m:rPr>
+                        <m:sty m:val="p"/>
+                      </m:rPr>
+                      <a:rPr lang="en-US" sz="1600" b="0" i="0" smtClean="0">
+                        <a:solidFill>
+                          <a:schemeClr val="bg2"/>
+                        </a:solidFill>
+                        <a:latin typeface="Cambria Math" panose="02040503050406030204" pitchFamily="18" charset="0"/>
+                        <a:ea typeface="Times New Roman"/>
+                        <a:cs typeface="Times New Roman" panose="02020603050405020304" pitchFamily="18" charset="0"/>
+                        <a:sym typeface="Times New Roman"/>
+                      </a:rPr>
+                      <m:t>Φ</m:t>
+                    </m:r>
+                    <m:d>
+                      <m:dPr>
+                        <m:ctrlPr>
+                          <a:rPr lang="en-US" sz="1600" b="0" i="1" smtClean="0">
+                            <a:solidFill>
+                              <a:schemeClr val="bg2"/>
+                            </a:solidFill>
+                            <a:latin typeface="Cambria Math" panose="02040503050406030204" pitchFamily="18" charset="0"/>
+                            <a:ea typeface="Times New Roman"/>
+                            <a:cs typeface="Times New Roman" panose="02020603050405020304" pitchFamily="18" charset="0"/>
+                            <a:sym typeface="Times New Roman"/>
+                          </a:rPr>
+                        </m:ctrlPr>
+                      </m:dPr>
+                      <m:e>
+                        <m:sSub>
+                          <m:sSubPr>
+                            <m:ctrlPr>
+                              <a:rPr lang="en-US" sz="1600" b="0" i="1" smtClean="0">
+                                <a:solidFill>
+                                  <a:schemeClr val="bg2"/>
+                                </a:solidFill>
+                                <a:latin typeface="Cambria Math" panose="02040503050406030204" pitchFamily="18" charset="0"/>
+                                <a:ea typeface="Times New Roman"/>
+                                <a:cs typeface="Times New Roman" panose="02020603050405020304" pitchFamily="18" charset="0"/>
+                                <a:sym typeface="Times New Roman"/>
+                              </a:rPr>
+                            </m:ctrlPr>
+                          </m:sSubPr>
+                          <m:e>
+                            <m:r>
+                              <a:rPr lang="en-US" sz="1600" b="0" i="1" smtClean="0">
+                                <a:solidFill>
+                                  <a:schemeClr val="bg2"/>
+                                </a:solidFill>
+                                <a:latin typeface="Cambria Math" panose="02040503050406030204" pitchFamily="18" charset="0"/>
+                                <a:ea typeface="Times New Roman"/>
+                                <a:cs typeface="Times New Roman" panose="02020603050405020304" pitchFamily="18" charset="0"/>
+                                <a:sym typeface="Times New Roman"/>
+                              </a:rPr>
+                              <m:t>𝑡</m:t>
+                            </m:r>
+                          </m:e>
+                          <m:sub>
+                            <m:r>
+                              <a:rPr lang="en-US" sz="1600" b="0" i="1" smtClean="0">
+                                <a:solidFill>
+                                  <a:schemeClr val="bg2"/>
+                                </a:solidFill>
+                                <a:latin typeface="Cambria Math" panose="02040503050406030204" pitchFamily="18" charset="0"/>
+                                <a:ea typeface="Times New Roman"/>
+                                <a:cs typeface="Times New Roman" panose="02020603050405020304" pitchFamily="18" charset="0"/>
+                                <a:sym typeface="Times New Roman"/>
+                              </a:rPr>
+                              <m:t>1</m:t>
+                            </m:r>
+                          </m:sub>
+                        </m:sSub>
+                      </m:e>
+                    </m:d>
+                    <m:r>
+                      <a:rPr lang="en-US" sz="1600" b="0" i="1" smtClean="0">
+                        <a:solidFill>
+                          <a:schemeClr val="bg2"/>
+                        </a:solidFill>
+                        <a:latin typeface="Cambria Math" panose="02040503050406030204" pitchFamily="18" charset="0"/>
+                        <a:ea typeface="Times New Roman"/>
+                        <a:cs typeface="Times New Roman" panose="02020603050405020304" pitchFamily="18" charset="0"/>
+                        <a:sym typeface="Times New Roman"/>
+                      </a:rPr>
+                      <m:t>⋅</m:t>
+                    </m:r>
+                    <m:r>
+                      <m:rPr>
+                        <m:sty m:val="p"/>
+                      </m:rPr>
+                      <a:rPr lang="en-US" sz="1600" b="0" i="0" smtClean="0">
+                        <a:solidFill>
+                          <a:schemeClr val="bg2"/>
+                        </a:solidFill>
+                        <a:latin typeface="Cambria Math" panose="02040503050406030204" pitchFamily="18" charset="0"/>
+                        <a:ea typeface="Times New Roman"/>
+                        <a:cs typeface="Times New Roman" panose="02020603050405020304" pitchFamily="18" charset="0"/>
+                        <a:sym typeface="Times New Roman"/>
+                      </a:rPr>
+                      <m:t>Φ</m:t>
+                    </m:r>
+                    <m:d>
+                      <m:dPr>
+                        <m:ctrlPr>
+                          <a:rPr lang="en-US" sz="1600" b="0" i="1" smtClean="0">
+                            <a:solidFill>
+                              <a:schemeClr val="bg2"/>
+                            </a:solidFill>
+                            <a:latin typeface="Cambria Math" panose="02040503050406030204" pitchFamily="18" charset="0"/>
+                            <a:ea typeface="Times New Roman"/>
+                            <a:cs typeface="Times New Roman" panose="02020603050405020304" pitchFamily="18" charset="0"/>
+                            <a:sym typeface="Times New Roman"/>
+                          </a:rPr>
+                        </m:ctrlPr>
+                      </m:dPr>
+                      <m:e>
+                        <m:sSub>
+                          <m:sSubPr>
+                            <m:ctrlPr>
+                              <a:rPr lang="en-US" sz="1600" b="0" i="1" smtClean="0">
+                                <a:solidFill>
+                                  <a:schemeClr val="bg2"/>
+                                </a:solidFill>
+                                <a:latin typeface="Cambria Math" panose="02040503050406030204" pitchFamily="18" charset="0"/>
+                                <a:ea typeface="Times New Roman"/>
+                                <a:cs typeface="Times New Roman" panose="02020603050405020304" pitchFamily="18" charset="0"/>
+                                <a:sym typeface="Times New Roman"/>
+                              </a:rPr>
+                            </m:ctrlPr>
+                          </m:sSubPr>
+                          <m:e>
+                            <m:r>
+                              <a:rPr lang="en-US" sz="1600" b="0" i="1" smtClean="0">
+                                <a:solidFill>
+                                  <a:schemeClr val="bg2"/>
+                                </a:solidFill>
+                                <a:latin typeface="Cambria Math" panose="02040503050406030204" pitchFamily="18" charset="0"/>
+                                <a:ea typeface="Times New Roman"/>
+                                <a:cs typeface="Times New Roman" panose="02020603050405020304" pitchFamily="18" charset="0"/>
+                                <a:sym typeface="Times New Roman"/>
+                              </a:rPr>
+                              <m:t>𝑡</m:t>
+                            </m:r>
+                          </m:e>
+                          <m:sub>
+                            <m:r>
+                              <a:rPr lang="en-US" sz="1600" b="0" i="1" smtClean="0">
+                                <a:solidFill>
+                                  <a:schemeClr val="bg2"/>
+                                </a:solidFill>
+                                <a:latin typeface="Cambria Math" panose="02040503050406030204" pitchFamily="18" charset="0"/>
+                                <a:ea typeface="Times New Roman"/>
+                                <a:cs typeface="Times New Roman" panose="02020603050405020304" pitchFamily="18" charset="0"/>
+                                <a:sym typeface="Times New Roman"/>
+                              </a:rPr>
+                              <m:t>2</m:t>
+                            </m:r>
+                          </m:sub>
+                        </m:sSub>
+                      </m:e>
+                    </m:d>
+                  </m:oMath>
+                </a14:m>
+                <a:endParaRPr lang="en-US" sz="1600" dirty="0">
+                  <a:solidFill>
+                    <a:schemeClr val="bg2"/>
+                  </a:solidFill>
+                  <a:latin typeface="Times New Roman" panose="02020603050405020304" pitchFamily="18" charset="0"/>
+                  <a:ea typeface="Times New Roman"/>
+                  <a:cs typeface="Times New Roman" panose="02020603050405020304" pitchFamily="18" charset="0"/>
+                  <a:sym typeface="Times New Roman"/>
+                </a:endParaRPr>
+              </a:p>
+              <a:p>
+                <a:pPr marL="800100" lvl="3" indent="-342900">
+                  <a:lnSpc>
+                    <a:spcPct val="100000"/>
+                  </a:lnSpc>
+                  <a:buClr>
+                    <a:schemeClr val="bg2"/>
+                  </a:buClr>
+                  <a:buFont typeface="Arial" panose="020B0604020202020204" pitchFamily="34" charset="0"/>
+                  <a:buChar char="•"/>
+                </a:pPr>
+                <a14:m>
+                  <m:oMath xmlns:m="http://schemas.openxmlformats.org/officeDocument/2006/math">
+                    <m:r>
+                      <m:rPr>
+                        <m:sty m:val="p"/>
+                      </m:rPr>
+                      <a:rPr lang="en-US" sz="1600" b="0" i="0" smtClean="0">
+                        <a:solidFill>
+                          <a:schemeClr val="bg2"/>
+                        </a:solidFill>
+                        <a:latin typeface="Cambria Math" panose="02040503050406030204" pitchFamily="18" charset="0"/>
+                        <a:ea typeface="Times New Roman"/>
+                        <a:cs typeface="Times New Roman" panose="02020603050405020304" pitchFamily="18" charset="0"/>
+                        <a:sym typeface="Times New Roman"/>
+                      </a:rPr>
+                      <m:t>Φ</m:t>
+                    </m:r>
+                    <m:d>
+                      <m:dPr>
+                        <m:ctrlPr>
+                          <a:rPr lang="en-US" sz="1600" b="0" i="1" smtClean="0">
+                            <a:solidFill>
+                              <a:schemeClr val="bg2"/>
+                            </a:solidFill>
+                            <a:latin typeface="Cambria Math" panose="02040503050406030204" pitchFamily="18" charset="0"/>
+                            <a:ea typeface="Times New Roman"/>
+                            <a:cs typeface="Times New Roman" panose="02020603050405020304" pitchFamily="18" charset="0"/>
+                            <a:sym typeface="Times New Roman"/>
+                          </a:rPr>
+                        </m:ctrlPr>
+                      </m:dPr>
+                      <m:e>
+                        <m:r>
+                          <a:rPr lang="en-US" sz="1600" b="0" i="1" smtClean="0">
+                            <a:solidFill>
+                              <a:schemeClr val="bg2"/>
+                            </a:solidFill>
+                            <a:latin typeface="Cambria Math" panose="02040503050406030204" pitchFamily="18" charset="0"/>
+                            <a:ea typeface="Times New Roman"/>
+                            <a:cs typeface="Times New Roman" panose="02020603050405020304" pitchFamily="18" charset="0"/>
+                            <a:sym typeface="Times New Roman"/>
+                          </a:rPr>
+                          <m:t>𝑚𝑜𝑣𝑒</m:t>
+                        </m:r>
+                        <m:d>
+                          <m:dPr>
+                            <m:ctrlPr>
+                              <a:rPr lang="en-US" sz="1600" b="0" i="1" smtClean="0">
+                                <a:solidFill>
+                                  <a:schemeClr val="bg2"/>
+                                </a:solidFill>
+                                <a:latin typeface="Cambria Math" panose="02040503050406030204" pitchFamily="18" charset="0"/>
+                                <a:ea typeface="Times New Roman"/>
+                                <a:cs typeface="Times New Roman" panose="02020603050405020304" pitchFamily="18" charset="0"/>
+                                <a:sym typeface="Times New Roman"/>
+                              </a:rPr>
+                            </m:ctrlPr>
+                          </m:dPr>
+                          <m:e>
+                            <m:r>
+                              <a:rPr lang="en-US" sz="1600" b="0" i="1" smtClean="0">
+                                <a:solidFill>
+                                  <a:schemeClr val="bg2"/>
+                                </a:solidFill>
+                                <a:latin typeface="Cambria Math" panose="02040503050406030204" pitchFamily="18" charset="0"/>
+                                <a:ea typeface="Times New Roman"/>
+                                <a:cs typeface="Times New Roman" panose="02020603050405020304" pitchFamily="18" charset="0"/>
+                                <a:sym typeface="Times New Roman"/>
+                              </a:rPr>
+                              <m:t>𝑡</m:t>
+                            </m:r>
+                          </m:e>
+                        </m:d>
+                      </m:e>
+                    </m:d>
+                    <m:r>
+                      <a:rPr lang="en-US" sz="1600" b="0" i="1" smtClean="0">
+                        <a:solidFill>
+                          <a:schemeClr val="bg2"/>
+                        </a:solidFill>
+                        <a:latin typeface="Cambria Math" panose="02040503050406030204" pitchFamily="18" charset="0"/>
+                        <a:ea typeface="Times New Roman"/>
+                        <a:cs typeface="Times New Roman" panose="02020603050405020304" pitchFamily="18" charset="0"/>
+                        <a:sym typeface="Times New Roman"/>
+                      </a:rPr>
+                      <m:t>=</m:t>
+                    </m:r>
+                    <m:r>
+                      <m:rPr>
+                        <m:sty m:val="p"/>
+                      </m:rPr>
+                      <a:rPr lang="en-US" sz="1600" b="0" i="0" smtClean="0">
+                        <a:solidFill>
+                          <a:schemeClr val="bg2"/>
+                        </a:solidFill>
+                        <a:latin typeface="Cambria Math" panose="02040503050406030204" pitchFamily="18" charset="0"/>
+                        <a:ea typeface="Times New Roman"/>
+                        <a:cs typeface="Times New Roman" panose="02020603050405020304" pitchFamily="18" charset="0"/>
+                        <a:sym typeface="Times New Roman"/>
+                      </a:rPr>
+                      <m:t>Φ</m:t>
+                    </m:r>
+                    <m:d>
+                      <m:dPr>
+                        <m:ctrlPr>
+                          <a:rPr lang="en-US" sz="1600" b="0" i="1" smtClean="0">
+                            <a:solidFill>
+                              <a:schemeClr val="bg2"/>
+                            </a:solidFill>
+                            <a:latin typeface="Cambria Math" panose="02040503050406030204" pitchFamily="18" charset="0"/>
+                            <a:ea typeface="Times New Roman"/>
+                            <a:cs typeface="Times New Roman" panose="02020603050405020304" pitchFamily="18" charset="0"/>
+                            <a:sym typeface="Times New Roman"/>
+                          </a:rPr>
+                        </m:ctrlPr>
+                      </m:dPr>
+                      <m:e>
+                        <m:r>
+                          <a:rPr lang="en-US" sz="1600" b="0" i="1" smtClean="0">
+                            <a:solidFill>
+                              <a:schemeClr val="bg2"/>
+                            </a:solidFill>
+                            <a:latin typeface="Cambria Math" panose="02040503050406030204" pitchFamily="18" charset="0"/>
+                            <a:ea typeface="Times New Roman"/>
+                            <a:cs typeface="Times New Roman" panose="02020603050405020304" pitchFamily="18" charset="0"/>
+                            <a:sym typeface="Times New Roman"/>
+                          </a:rPr>
+                          <m:t>𝑡</m:t>
+                        </m:r>
+                      </m:e>
+                    </m:d>
+                  </m:oMath>
+                </a14:m>
+                <a:endParaRPr lang="en-US" sz="2000" dirty="0">
+                  <a:solidFill>
+                    <a:schemeClr val="bg2"/>
+                  </a:solidFill>
+                  <a:latin typeface="Times New Roman" panose="02020603050405020304" pitchFamily="18" charset="0"/>
+                  <a:ea typeface="Times New Roman"/>
+                  <a:cs typeface="Times New Roman" panose="02020603050405020304" pitchFamily="18" charset="0"/>
+                  <a:sym typeface="Times New Roman"/>
+                </a:endParaRPr>
+              </a:p>
+              <a:p>
+                <a:pPr lvl="1"/>
+                <a:endParaRPr lang="en-US" dirty="0"/>
+              </a:p>
+            </p:txBody>
+          </p:sp>
+        </mc:Choice>
+        <mc:Fallback xmlns="">
+          <p:sp>
+            <p:nvSpPr>
+              <p:cNvPr id="3" name="Text Placeholder 2">
+                <a:extLst>
+                  <a:ext uri="{FF2B5EF4-FFF2-40B4-BE49-F238E27FC236}">
+                    <a16:creationId xmlns:a16="http://schemas.microsoft.com/office/drawing/2014/main" id="{26691787-030C-C106-5DA3-6E2A447AEB0D}"/>
+                  </a:ext>
+                </a:extLst>
+              </p:cNvPr>
+              <p:cNvSpPr>
+                <a:spLocks noGrp="1" noRot="1" noChangeAspect="1" noMove="1" noResize="1" noEditPoints="1" noAdjustHandles="1" noChangeArrowheads="1" noChangeShapeType="1" noTextEdit="1"/>
+              </p:cNvSpPr>
+              <p:nvPr>
+                <p:ph type="body" idx="1"/>
+              </p:nvPr>
+            </p:nvSpPr>
+            <p:spPr>
+              <a:xfrm>
+                <a:off x="3627524" y="1017140"/>
+                <a:ext cx="5167773" cy="3639150"/>
+              </a:xfrm>
+              <a:blipFill>
+                <a:blip r:embed="rId3"/>
+                <a:stretch>
+                  <a:fillRect l="-708" t="-335"/>
+                </a:stretch>
+              </a:blipFill>
+            </p:spPr>
+            <p:txBody>
+              <a:bodyPr/>
+              <a:lstStyle/>
+              <a:p>
+                <a:r>
+                  <a:rPr lang="en-US">
+                    <a:noFill/>
+                  </a:rPr>
+                  <a:t> </a:t>
+                </a:r>
+              </a:p>
+            </p:txBody>
+          </p:sp>
+        </mc:Fallback>
+      </mc:AlternateContent>
+      <p:sp>
+        <p:nvSpPr>
+          <p:cNvPr id="4" name="Slide Number Placeholder 3">
+            <a:extLst>
+              <a:ext uri="{FF2B5EF4-FFF2-40B4-BE49-F238E27FC236}">
+                <a16:creationId xmlns:a16="http://schemas.microsoft.com/office/drawing/2014/main" id="{5DEE0C3E-40FE-60ED-EA7A-BAAB5DD0FB48}"/>
+              </a:ext>
+            </a:extLst>
+          </p:cNvPr>
+          <p:cNvSpPr>
+            <a:spLocks noGrp="1"/>
+          </p:cNvSpPr>
+          <p:nvPr>
+            <p:ph type="sldNum" idx="12"/>
+          </p:nvPr>
+        </p:nvSpPr>
+        <p:spPr/>
+        <p:txBody>
+          <a:bodyPr/>
+          <a:lstStyle/>
+          <a:p>
+            <a:pPr marL="0" lvl="0" indent="0" algn="r" rtl="0">
+              <a:spcBef>
+                <a:spcPts val="0"/>
+              </a:spcBef>
+              <a:spcAft>
+                <a:spcPts val="0"/>
+              </a:spcAft>
+              <a:buNone/>
+            </a:pPr>
+            <a:fld id="{00000000-1234-1234-1234-123412341234}" type="slidenum">
+              <a:rPr lang="en" smtClean="0"/>
+              <a:t>32</a:t>
+            </a:fld>
+            <a:endParaRPr lang="en"/>
+          </a:p>
+        </p:txBody>
+      </p:sp>
+      <p:graphicFrame>
+        <p:nvGraphicFramePr>
+          <p:cNvPr id="5" name="Google Shape;317;p37">
+            <a:extLst>
+              <a:ext uri="{FF2B5EF4-FFF2-40B4-BE49-F238E27FC236}">
+                <a16:creationId xmlns:a16="http://schemas.microsoft.com/office/drawing/2014/main" id="{8628C310-4714-C18A-2759-3C45822946D0}"/>
+              </a:ext>
+            </a:extLst>
+          </p:cNvPr>
+          <p:cNvGraphicFramePr/>
+          <p:nvPr>
+            <p:extLst>
+              <p:ext uri="{D42A27DB-BD31-4B8C-83A1-F6EECF244321}">
+                <p14:modId xmlns:p14="http://schemas.microsoft.com/office/powerpoint/2010/main" val="1210365249"/>
+              </p:ext>
+            </p:extLst>
+          </p:nvPr>
+        </p:nvGraphicFramePr>
+        <p:xfrm>
+          <a:off x="311700" y="1017725"/>
+          <a:ext cx="3249700" cy="2590620"/>
+        </p:xfrm>
+        <a:graphic>
+          <a:graphicData uri="http://schemas.openxmlformats.org/drawingml/2006/table">
+            <a:tbl>
+              <a:tblPr>
+                <a:noFill/>
+                <a:tableStyleId>{957C3E7A-245C-4847-85F8-382FA85EA222}</a:tableStyleId>
+              </a:tblPr>
+              <a:tblGrid>
+                <a:gridCol w="1682050">
+                  <a:extLst>
+                    <a:ext uri="{9D8B030D-6E8A-4147-A177-3AD203B41FA5}">
+                      <a16:colId xmlns:a16="http://schemas.microsoft.com/office/drawing/2014/main" val="20000"/>
+                    </a:ext>
+                  </a:extLst>
+                </a:gridCol>
+                <a:gridCol w="1567650">
+                  <a:extLst>
+                    <a:ext uri="{9D8B030D-6E8A-4147-A177-3AD203B41FA5}">
+                      <a16:colId xmlns:a16="http://schemas.microsoft.com/office/drawing/2014/main" val="20001"/>
+                    </a:ext>
+                  </a:extLst>
+                </a:gridCol>
+              </a:tblGrid>
+              <a:tr h="381000">
+                <a:tc>
+                  <a:txBody>
+                    <a:bodyPr/>
+                    <a:lstStyle/>
+                    <a:p>
+                      <a:pPr marL="0" lvl="0" indent="0" algn="ctr" rtl="0">
+                        <a:spcBef>
+                          <a:spcPts val="0"/>
+                        </a:spcBef>
+                        <a:spcAft>
+                          <a:spcPts val="0"/>
+                        </a:spcAft>
+                        <a:buNone/>
+                      </a:pPr>
+                      <a:r>
+                        <a:rPr lang="en"/>
+                        <a:t>Selectee Features</a:t>
+                      </a:r>
+                      <a:endParaRPr/>
+                    </a:p>
+                    <a:p>
+                      <a:pPr marL="0" lvl="0" indent="0" algn="ctr" rtl="0">
+                        <a:spcBef>
+                          <a:spcPts val="0"/>
+                        </a:spcBef>
+                        <a:spcAft>
+                          <a:spcPts val="0"/>
+                        </a:spcAft>
+                        <a:buNone/>
+                      </a:pPr>
+                      <a:r>
+                        <a:rPr lang="en"/>
+                        <a:t>in our MG</a:t>
+                      </a:r>
+                      <a:endParaRPr/>
+                    </a:p>
+                  </a:txBody>
+                  <a:tcPr marL="91425" marR="91425" marT="91425" marB="91425"/>
+                </a:tc>
+                <a:tc>
+                  <a:txBody>
+                    <a:bodyPr/>
+                    <a:lstStyle/>
+                    <a:p>
+                      <a:pPr marL="0" lvl="0" indent="0" algn="ctr" rtl="0">
+                        <a:spcBef>
+                          <a:spcPts val="0"/>
+                        </a:spcBef>
+                        <a:spcAft>
+                          <a:spcPts val="0"/>
+                        </a:spcAft>
+                        <a:buNone/>
+                      </a:pPr>
+                      <a:r>
+                        <a:rPr lang="en" dirty="0"/>
+                        <a:t>Corresponding Vector Space</a:t>
+                      </a:r>
+                      <a:endParaRPr dirty="0"/>
+                    </a:p>
+                  </a:txBody>
+                  <a:tcPr marL="91425" marR="91425" marT="91425" marB="91425"/>
+                </a:tc>
+                <a:extLst>
+                  <a:ext uri="{0D108BD9-81ED-4DB2-BD59-A6C34878D82A}">
+                    <a16:rowId xmlns:a16="http://schemas.microsoft.com/office/drawing/2014/main" val="10000"/>
+                  </a:ext>
+                </a:extLst>
+              </a:tr>
+              <a:tr h="381000">
+                <a:tc>
+                  <a:txBody>
+                    <a:bodyPr/>
+                    <a:lstStyle/>
+                    <a:p>
+                      <a:pPr marL="0" lvl="0" indent="0" algn="ctr" rtl="0">
+                        <a:spcBef>
+                          <a:spcPts val="0"/>
+                        </a:spcBef>
+                        <a:spcAft>
+                          <a:spcPts val="0"/>
+                        </a:spcAft>
+                        <a:buNone/>
+                      </a:pPr>
+                      <a:r>
+                        <a:rPr lang="en" dirty="0">
+                          <a:latin typeface="Times New Roman"/>
+                          <a:ea typeface="Times New Roman"/>
+                          <a:cs typeface="Times New Roman"/>
+                          <a:sym typeface="Times New Roman"/>
+                        </a:rPr>
+                        <a:t>D</a:t>
+                      </a:r>
+                      <a:endParaRPr dirty="0">
+                        <a:latin typeface="Times New Roman"/>
+                        <a:ea typeface="Times New Roman"/>
+                        <a:cs typeface="Times New Roman"/>
+                        <a:sym typeface="Times New Roman"/>
+                      </a:endParaRPr>
+                    </a:p>
+                  </a:txBody>
+                  <a:tcPr marL="91425" marR="91425" marT="91425" marB="91425"/>
+                </a:tc>
+                <a:tc>
+                  <a:txBody>
+                    <a:bodyPr/>
+                    <a:lstStyle/>
+                    <a:p>
+                      <a:pPr marL="0" lvl="0" indent="0" algn="ctr" rtl="0">
+                        <a:spcBef>
+                          <a:spcPts val="0"/>
+                        </a:spcBef>
+                        <a:spcAft>
+                          <a:spcPts val="0"/>
+                        </a:spcAft>
+                        <a:buClr>
+                          <a:schemeClr val="dk1"/>
+                        </a:buClr>
+                        <a:buSzPts val="1100"/>
+                        <a:buFont typeface="Arial"/>
+                        <a:buNone/>
+                      </a:pPr>
+                      <a:r>
+                        <a:rPr lang="en" dirty="0">
+                          <a:solidFill>
+                            <a:schemeClr val="dk1"/>
+                          </a:solidFill>
+                          <a:latin typeface="Times New Roman"/>
+                          <a:ea typeface="Times New Roman"/>
+                          <a:cs typeface="Times New Roman"/>
+                          <a:sym typeface="Times New Roman"/>
+                        </a:rPr>
+                        <a:t>𝗗</a:t>
+                      </a:r>
+                      <a:endParaRPr dirty="0">
+                        <a:latin typeface="Times New Roman"/>
+                        <a:ea typeface="Times New Roman"/>
+                        <a:cs typeface="Times New Roman"/>
+                        <a:sym typeface="Times New Roman"/>
+                      </a:endParaRPr>
+                    </a:p>
+                  </a:txBody>
+                  <a:tcPr marL="91425" marR="91425" marT="91425" marB="91425"/>
+                </a:tc>
+                <a:extLst>
+                  <a:ext uri="{0D108BD9-81ED-4DB2-BD59-A6C34878D82A}">
+                    <a16:rowId xmlns:a16="http://schemas.microsoft.com/office/drawing/2014/main" val="10001"/>
+                  </a:ext>
+                </a:extLst>
+              </a:tr>
+              <a:tr h="381000">
+                <a:tc>
+                  <a:txBody>
+                    <a:bodyPr/>
+                    <a:lstStyle/>
+                    <a:p>
+                      <a:pPr marL="0" lvl="0" indent="0" algn="ctr" rtl="0">
+                        <a:spcBef>
+                          <a:spcPts val="0"/>
+                        </a:spcBef>
+                        <a:spcAft>
+                          <a:spcPts val="0"/>
+                        </a:spcAft>
+                        <a:buNone/>
+                      </a:pPr>
+                      <a:r>
+                        <a:rPr lang="en" dirty="0">
+                          <a:latin typeface="Times New Roman"/>
+                          <a:ea typeface="Times New Roman"/>
+                          <a:cs typeface="Times New Roman"/>
+                          <a:sym typeface="Times New Roman"/>
+                        </a:rPr>
+                        <a:t>V</a:t>
+                      </a:r>
+                      <a:endParaRPr dirty="0">
+                        <a:latin typeface="Times New Roman"/>
+                        <a:ea typeface="Times New Roman"/>
+                        <a:cs typeface="Times New Roman"/>
+                        <a:sym typeface="Times New Roman"/>
+                      </a:endParaRPr>
+                    </a:p>
+                  </a:txBody>
+                  <a:tcPr marL="91425" marR="91425" marT="91425" marB="91425"/>
+                </a:tc>
+                <a:tc>
+                  <a:txBody>
+                    <a:bodyPr/>
+                    <a:lstStyle/>
+                    <a:p>
+                      <a:pPr marL="0" lvl="0" indent="0" algn="ctr" rtl="0">
+                        <a:spcBef>
+                          <a:spcPts val="0"/>
+                        </a:spcBef>
+                        <a:spcAft>
+                          <a:spcPts val="0"/>
+                        </a:spcAft>
+                        <a:buClr>
+                          <a:schemeClr val="dk1"/>
+                        </a:buClr>
+                        <a:buSzPts val="1100"/>
+                        <a:buFont typeface="Arial"/>
+                        <a:buNone/>
+                      </a:pPr>
+                      <a:r>
+                        <a:rPr lang="en" dirty="0">
+                          <a:solidFill>
+                            <a:schemeClr val="dk1"/>
+                          </a:solidFill>
+                          <a:latin typeface="Times New Roman"/>
+                          <a:ea typeface="Times New Roman"/>
+                          <a:cs typeface="Times New Roman"/>
+                          <a:sym typeface="Times New Roman"/>
+                        </a:rPr>
+                        <a:t>𝗩</a:t>
+                      </a:r>
+                      <a:endParaRPr dirty="0">
+                        <a:latin typeface="Times New Roman"/>
+                        <a:ea typeface="Times New Roman"/>
+                        <a:cs typeface="Times New Roman"/>
+                        <a:sym typeface="Times New Roman"/>
+                      </a:endParaRPr>
+                    </a:p>
+                  </a:txBody>
+                  <a:tcPr marL="91425" marR="91425" marT="91425" marB="91425"/>
+                </a:tc>
+                <a:extLst>
+                  <a:ext uri="{0D108BD9-81ED-4DB2-BD59-A6C34878D82A}">
+                    <a16:rowId xmlns:a16="http://schemas.microsoft.com/office/drawing/2014/main" val="10002"/>
+                  </a:ext>
+                </a:extLst>
+              </a:tr>
+              <a:tr h="381000">
+                <a:tc>
+                  <a:txBody>
+                    <a:bodyPr/>
+                    <a:lstStyle/>
+                    <a:p>
+                      <a:pPr marL="0" lvl="0" indent="0" algn="ctr" rtl="0">
+                        <a:spcBef>
+                          <a:spcPts val="0"/>
+                        </a:spcBef>
+                        <a:spcAft>
+                          <a:spcPts val="0"/>
+                        </a:spcAft>
+                        <a:buNone/>
+                      </a:pPr>
+                      <a:r>
+                        <a:rPr lang="en">
+                          <a:latin typeface="Times New Roman"/>
+                          <a:ea typeface="Times New Roman"/>
+                          <a:cs typeface="Times New Roman"/>
+                          <a:sym typeface="Times New Roman"/>
+                        </a:rPr>
+                        <a:t>v</a:t>
+                      </a:r>
+                      <a:endParaRPr>
+                        <a:latin typeface="Times New Roman"/>
+                        <a:ea typeface="Times New Roman"/>
+                        <a:cs typeface="Times New Roman"/>
+                        <a:sym typeface="Times New Roman"/>
+                      </a:endParaRPr>
+                    </a:p>
+                  </a:txBody>
+                  <a:tcPr marL="91425" marR="91425" marT="91425" marB="91425"/>
+                </a:tc>
+                <a:tc>
+                  <a:txBody>
+                    <a:bodyPr/>
+                    <a:lstStyle/>
+                    <a:p>
+                      <a:pPr marL="0" lvl="0" indent="0" algn="ctr" rtl="0">
+                        <a:spcBef>
+                          <a:spcPts val="0"/>
+                        </a:spcBef>
+                        <a:spcAft>
+                          <a:spcPts val="0"/>
+                        </a:spcAft>
+                        <a:buClr>
+                          <a:schemeClr val="dk1"/>
+                        </a:buClr>
+                        <a:buSzPts val="1100"/>
+                        <a:buFont typeface="Arial"/>
+                        <a:buNone/>
+                      </a:pPr>
+                      <a:r>
+                        <a:rPr lang="en" dirty="0">
+                          <a:solidFill>
+                            <a:schemeClr val="dk1"/>
+                          </a:solidFill>
+                          <a:latin typeface="Times New Roman"/>
+                          <a:ea typeface="Times New Roman"/>
+                          <a:cs typeface="Times New Roman"/>
+                          <a:sym typeface="Times New Roman"/>
+                        </a:rPr>
+                        <a:t>𝗨</a:t>
+                      </a:r>
+                      <a:endParaRPr dirty="0">
+                        <a:latin typeface="Times New Roman"/>
+                        <a:ea typeface="Times New Roman"/>
+                        <a:cs typeface="Times New Roman"/>
+                        <a:sym typeface="Times New Roman"/>
+                      </a:endParaRPr>
+                    </a:p>
+                  </a:txBody>
+                  <a:tcPr marL="91425" marR="91425" marT="91425" marB="91425"/>
+                </a:tc>
+                <a:extLst>
+                  <a:ext uri="{0D108BD9-81ED-4DB2-BD59-A6C34878D82A}">
+                    <a16:rowId xmlns:a16="http://schemas.microsoft.com/office/drawing/2014/main" val="10003"/>
+                  </a:ext>
+                </a:extLst>
+              </a:tr>
+              <a:tr h="381000">
+                <a:tc>
+                  <a:txBody>
+                    <a:bodyPr/>
+                    <a:lstStyle/>
+                    <a:p>
+                      <a:pPr marL="0" lvl="0" indent="0" algn="ctr" rtl="0">
+                        <a:spcBef>
+                          <a:spcPts val="0"/>
+                        </a:spcBef>
+                        <a:spcAft>
+                          <a:spcPts val="0"/>
+                        </a:spcAft>
+                        <a:buNone/>
+                      </a:pPr>
+                      <a:r>
+                        <a:rPr lang="en">
+                          <a:latin typeface="Times New Roman"/>
+                          <a:ea typeface="Times New Roman"/>
+                          <a:cs typeface="Times New Roman"/>
+                          <a:sym typeface="Times New Roman"/>
+                        </a:rPr>
+                        <a:t>T</a:t>
+                      </a:r>
+                      <a:endParaRPr>
+                        <a:latin typeface="Times New Roman"/>
+                        <a:ea typeface="Times New Roman"/>
+                        <a:cs typeface="Times New Roman"/>
+                        <a:sym typeface="Times New Roman"/>
+                      </a:endParaRPr>
+                    </a:p>
+                  </a:txBody>
+                  <a:tcPr marL="91425" marR="91425" marT="91425" marB="91425"/>
+                </a:tc>
+                <a:tc>
+                  <a:txBody>
+                    <a:bodyPr/>
+                    <a:lstStyle/>
+                    <a:p>
+                      <a:pPr marL="0" lvl="0" indent="0" algn="ctr" rtl="0">
+                        <a:spcBef>
+                          <a:spcPts val="0"/>
+                        </a:spcBef>
+                        <a:spcAft>
+                          <a:spcPts val="0"/>
+                        </a:spcAft>
+                        <a:buClr>
+                          <a:schemeClr val="dk1"/>
+                        </a:buClr>
+                        <a:buSzPts val="1100"/>
+                        <a:buFont typeface="Arial"/>
+                        <a:buNone/>
+                      </a:pPr>
+                      <a:r>
+                        <a:rPr lang="en" dirty="0">
+                          <a:solidFill>
+                            <a:schemeClr val="dk1"/>
+                          </a:solidFill>
+                          <a:latin typeface="Times New Roman"/>
+                          <a:ea typeface="Times New Roman"/>
+                          <a:cs typeface="Times New Roman"/>
+                          <a:sym typeface="Times New Roman"/>
+                        </a:rPr>
+                        <a:t>𝗧</a:t>
+                      </a:r>
+                      <a:endParaRPr dirty="0">
+                        <a:latin typeface="Times New Roman"/>
+                        <a:ea typeface="Times New Roman"/>
+                        <a:cs typeface="Times New Roman"/>
+                        <a:sym typeface="Times New Roman"/>
+                      </a:endParaRPr>
+                    </a:p>
+                  </a:txBody>
+                  <a:tcPr marL="91425" marR="91425" marT="91425" marB="91425"/>
+                </a:tc>
+                <a:extLst>
+                  <a:ext uri="{0D108BD9-81ED-4DB2-BD59-A6C34878D82A}">
+                    <a16:rowId xmlns:a16="http://schemas.microsoft.com/office/drawing/2014/main" val="10004"/>
+                  </a:ext>
+                </a:extLst>
+              </a:tr>
+              <a:tr h="381000">
+                <a:tc>
+                  <a:txBody>
+                    <a:bodyPr/>
+                    <a:lstStyle/>
+                    <a:p>
+                      <a:pPr marL="0" lvl="0" indent="0" algn="ctr" rtl="0">
+                        <a:spcBef>
+                          <a:spcPts val="0"/>
+                        </a:spcBef>
+                        <a:spcAft>
+                          <a:spcPts val="0"/>
+                        </a:spcAft>
+                        <a:buNone/>
+                      </a:pPr>
+                      <a:r>
+                        <a:rPr lang="en" dirty="0">
+                          <a:latin typeface="Times New Roman"/>
+                          <a:ea typeface="Times New Roman"/>
+                          <a:cs typeface="Times New Roman"/>
+                          <a:sym typeface="Times New Roman"/>
+                        </a:rPr>
+                        <a:t>C</a:t>
+                      </a:r>
+                      <a:endParaRPr dirty="0">
+                        <a:latin typeface="Times New Roman"/>
+                        <a:ea typeface="Times New Roman"/>
+                        <a:cs typeface="Times New Roman"/>
+                        <a:sym typeface="Times New Roman"/>
+                      </a:endParaRPr>
+                    </a:p>
+                  </a:txBody>
+                  <a:tcPr marL="91425" marR="91425" marT="91425" marB="91425"/>
+                </a:tc>
+                <a:tc>
+                  <a:txBody>
+                    <a:bodyPr/>
+                    <a:lstStyle/>
+                    <a:p>
+                      <a:pPr marL="0" lvl="0" indent="0" algn="ctr" rtl="0">
+                        <a:spcBef>
+                          <a:spcPts val="0"/>
+                        </a:spcBef>
+                        <a:spcAft>
+                          <a:spcPts val="0"/>
+                        </a:spcAft>
+                        <a:buClr>
+                          <a:schemeClr val="dk1"/>
+                        </a:buClr>
+                        <a:buSzPts val="1100"/>
+                        <a:buFont typeface="Arial"/>
+                        <a:buNone/>
+                      </a:pPr>
+                      <a:r>
+                        <a:rPr lang="en" dirty="0">
+                          <a:solidFill>
+                            <a:schemeClr val="dk1"/>
+                          </a:solidFill>
+                          <a:latin typeface="Times New Roman"/>
+                          <a:ea typeface="Times New Roman"/>
+                          <a:cs typeface="Times New Roman"/>
+                          <a:sym typeface="Times New Roman"/>
+                        </a:rPr>
+                        <a:t>𝗖</a:t>
+                      </a:r>
+                      <a:endParaRPr dirty="0">
+                        <a:latin typeface="Times New Roman"/>
+                        <a:ea typeface="Times New Roman"/>
+                        <a:cs typeface="Times New Roman"/>
+                        <a:sym typeface="Times New Roman"/>
+                      </a:endParaRPr>
+                    </a:p>
+                  </a:txBody>
+                  <a:tcPr marL="91425" marR="91425" marT="91425" marB="91425"/>
+                </a:tc>
+                <a:extLst>
+                  <a:ext uri="{0D108BD9-81ED-4DB2-BD59-A6C34878D82A}">
+                    <a16:rowId xmlns:a16="http://schemas.microsoft.com/office/drawing/2014/main" val="10005"/>
+                  </a:ext>
+                </a:extLst>
+              </a:tr>
+            </a:tbl>
+          </a:graphicData>
+        </a:graphic>
+      </p:graphicFrame>
+    </p:spTree>
+    <p:extLst>
+      <p:ext uri="{BB962C8B-B14F-4D97-AF65-F5344CB8AC3E}">
+        <p14:creationId xmlns:p14="http://schemas.microsoft.com/office/powerpoint/2010/main" val="722096871"/>
+      </p:ext>
+    </p:extLst>
+  </p:cSld>
+  <p:clrMapOvr>
+    <a:masterClrMapping/>
+  </p:clrMapOvr>
+</p:sld>
+</file>
+
+<file path=ppt/slides/slide33.xml><?xml version="1.0" encoding="utf-8"?>
+<p:sld xmlns:a="http://schemas.openxmlformats.org/drawingml/2006/main" xmlns:r="http://schemas.openxmlformats.org/officeDocument/2006/relationships" xmlns:p="http://schemas.openxmlformats.org/presentationml/2006/main">
+  <p:cSld>
+    <p:spTree>
+      <p:nvGrpSpPr>
+        <p:cNvPr id="1" name=""/>
+        <p:cNvGrpSpPr/>
+        <p:nvPr/>
+      </p:nvGrpSpPr>
+      <p:grpSpPr>
+        <a:xfrm>
+          <a:off x="0" y="0"/>
+          <a:ext cx="0" cy="0"/>
+          <a:chOff x="0" y="0"/>
+          <a:chExt cx="0" cy="0"/>
+        </a:xfrm>
+      </p:grpSpPr>
+      <p:sp>
+        <p:nvSpPr>
+          <p:cNvPr id="2" name="Title 1">
+            <a:extLst>
+              <a:ext uri="{FF2B5EF4-FFF2-40B4-BE49-F238E27FC236}">
+                <a16:creationId xmlns:a16="http://schemas.microsoft.com/office/drawing/2014/main" id="{A7F1F799-6418-9933-8AAE-2BB0913FA57C}"/>
+              </a:ext>
+            </a:extLst>
+          </p:cNvPr>
+          <p:cNvSpPr>
+            <a:spLocks noGrp="1"/>
+          </p:cNvSpPr>
+          <p:nvPr>
+            <p:ph type="title"/>
+          </p:nvPr>
+        </p:nvSpPr>
+        <p:spPr/>
+        <p:txBody>
+          <a:bodyPr>
+            <a:normAutofit fontScale="90000"/>
+          </a:bodyPr>
+          <a:lstStyle/>
+          <a:p>
+            <a:r>
+              <a:rPr lang="en-US" dirty="0"/>
+              <a:t>Tensor Contraction (General)</a:t>
+            </a:r>
+          </a:p>
+        </p:txBody>
+      </p:sp>
+      <mc:AlternateContent xmlns:mc="http://schemas.openxmlformats.org/markup-compatibility/2006" xmlns:a14="http://schemas.microsoft.com/office/drawing/2010/main">
+        <mc:Choice Requires="a14">
+          <p:sp>
+            <p:nvSpPr>
+              <p:cNvPr id="3" name="Text Placeholder 2">
+                <a:extLst>
+                  <a:ext uri="{FF2B5EF4-FFF2-40B4-BE49-F238E27FC236}">
+                    <a16:creationId xmlns:a16="http://schemas.microsoft.com/office/drawing/2014/main" id="{9DEBC122-3B42-B95C-3B52-72257A3CD728}"/>
+                  </a:ext>
+                </a:extLst>
+              </p:cNvPr>
+              <p:cNvSpPr>
+                <a:spLocks noGrp="1"/>
+              </p:cNvSpPr>
+              <p:nvPr>
+                <p:ph type="body" idx="1"/>
+              </p:nvPr>
+            </p:nvSpPr>
+            <p:spPr>
+              <a:xfrm>
+                <a:off x="311700" y="1152475"/>
+                <a:ext cx="8520600" cy="3546000"/>
+              </a:xfrm>
+            </p:spPr>
+            <p:txBody>
+              <a:bodyPr>
+                <a:normAutofit/>
+              </a:bodyPr>
+              <a:lstStyle/>
+              <a:p>
+                <a:r>
+                  <a:rPr lang="en-US" dirty="0"/>
+                  <a:t>Let </a:t>
+                </a:r>
+                <a14:m>
+                  <m:oMath xmlns:m="http://schemas.openxmlformats.org/officeDocument/2006/math">
+                    <m:r>
+                      <a:rPr lang="en-US" b="0" i="0" smtClean="0">
+                        <a:latin typeface="Cambria Math" panose="02040503050406030204" pitchFamily="18" charset="0"/>
+                      </a:rPr>
+                      <m:t>𝐴</m:t>
+                    </m:r>
+                    <m:r>
+                      <a:rPr lang="en-US" b="0" i="1" smtClean="0">
+                        <a:latin typeface="Cambria Math" panose="02040503050406030204" pitchFamily="18" charset="0"/>
+                      </a:rPr>
+                      <m:t>∈</m:t>
+                    </m:r>
+                    <m:sSub>
+                      <m:sSubPr>
+                        <m:ctrlPr>
+                          <a:rPr lang="en-US" b="0" i="1" smtClean="0">
+                            <a:latin typeface="Cambria Math" panose="02040503050406030204" pitchFamily="18" charset="0"/>
+                          </a:rPr>
+                        </m:ctrlPr>
+                      </m:sSubPr>
+                      <m:e>
+                        <m:r>
+                          <a:rPr lang="en-US" b="0" i="1" smtClean="0">
+                            <a:latin typeface="Cambria Math" panose="02040503050406030204" pitchFamily="18" charset="0"/>
+                          </a:rPr>
+                          <m:t>𝑈</m:t>
+                        </m:r>
+                      </m:e>
+                      <m:sub>
+                        <m:r>
+                          <a:rPr lang="en-US" b="0" i="1" smtClean="0">
+                            <a:latin typeface="Cambria Math" panose="02040503050406030204" pitchFamily="18" charset="0"/>
+                          </a:rPr>
+                          <m:t>1</m:t>
+                        </m:r>
+                      </m:sub>
+                    </m:sSub>
+                    <m:r>
+                      <a:rPr lang="en-US" b="0" i="1" smtClean="0">
+                        <a:latin typeface="Cambria Math" panose="02040503050406030204" pitchFamily="18" charset="0"/>
+                      </a:rPr>
+                      <m:t>⊗…⊗</m:t>
+                    </m:r>
+                    <m:sSub>
+                      <m:sSubPr>
+                        <m:ctrlPr>
+                          <a:rPr lang="en-US" b="0" i="1" smtClean="0">
+                            <a:latin typeface="Cambria Math" panose="02040503050406030204" pitchFamily="18" charset="0"/>
+                          </a:rPr>
+                        </m:ctrlPr>
+                      </m:sSubPr>
+                      <m:e>
+                        <m:r>
+                          <a:rPr lang="en-US" b="0" i="1" smtClean="0">
+                            <a:latin typeface="Cambria Math" panose="02040503050406030204" pitchFamily="18" charset="0"/>
+                          </a:rPr>
+                          <m:t>𝑈</m:t>
+                        </m:r>
+                      </m:e>
+                      <m:sub>
+                        <m:r>
+                          <a:rPr lang="en-US" b="0" i="1" smtClean="0">
+                            <a:latin typeface="Cambria Math" panose="02040503050406030204" pitchFamily="18" charset="0"/>
+                          </a:rPr>
+                          <m:t>𝑙</m:t>
+                        </m:r>
+                      </m:sub>
+                    </m:sSub>
+                    <m:r>
+                      <a:rPr lang="en-US" b="0" i="1" smtClean="0">
+                        <a:latin typeface="Cambria Math" panose="02040503050406030204" pitchFamily="18" charset="0"/>
+                      </a:rPr>
+                      <m:t>⊗</m:t>
+                    </m:r>
+                    <m:sSub>
+                      <m:sSubPr>
+                        <m:ctrlPr>
+                          <a:rPr lang="en-US" b="0" i="1" smtClean="0">
+                            <a:latin typeface="Cambria Math" panose="02040503050406030204" pitchFamily="18" charset="0"/>
+                          </a:rPr>
+                        </m:ctrlPr>
+                      </m:sSubPr>
+                      <m:e>
+                        <m:r>
+                          <a:rPr lang="en-US" b="0" i="1" smtClean="0">
+                            <a:latin typeface="Cambria Math" panose="02040503050406030204" pitchFamily="18" charset="0"/>
+                          </a:rPr>
+                          <m:t>𝑉</m:t>
+                        </m:r>
+                      </m:e>
+                      <m:sub>
+                        <m:r>
+                          <a:rPr lang="en-US" b="0" i="1" smtClean="0">
+                            <a:latin typeface="Cambria Math" panose="02040503050406030204" pitchFamily="18" charset="0"/>
+                          </a:rPr>
+                          <m:t>1</m:t>
+                        </m:r>
+                      </m:sub>
+                    </m:sSub>
+                    <m:r>
+                      <a:rPr lang="en-US" b="0" i="1" smtClean="0">
+                        <a:latin typeface="Cambria Math" panose="02040503050406030204" pitchFamily="18" charset="0"/>
+                      </a:rPr>
+                      <m:t>⊗…⊗</m:t>
+                    </m:r>
+                    <m:sSub>
+                      <m:sSubPr>
+                        <m:ctrlPr>
+                          <a:rPr lang="en-US" b="0" i="1" smtClean="0">
+                            <a:latin typeface="Cambria Math" panose="02040503050406030204" pitchFamily="18" charset="0"/>
+                          </a:rPr>
+                        </m:ctrlPr>
+                      </m:sSubPr>
+                      <m:e>
+                        <m:r>
+                          <a:rPr lang="en-US" b="0" i="1" smtClean="0">
+                            <a:latin typeface="Cambria Math" panose="02040503050406030204" pitchFamily="18" charset="0"/>
+                          </a:rPr>
+                          <m:t>𝑉</m:t>
+                        </m:r>
+                      </m:e>
+                      <m:sub>
+                        <m:r>
+                          <a:rPr lang="en-US" b="0" i="1" smtClean="0">
+                            <a:latin typeface="Cambria Math" panose="02040503050406030204" pitchFamily="18" charset="0"/>
+                          </a:rPr>
+                          <m:t>𝑚</m:t>
+                        </m:r>
+                      </m:sub>
+                    </m:sSub>
+                  </m:oMath>
+                </a14:m>
+                <a:r>
+                  <a:rPr lang="en-US" dirty="0"/>
+                  <a:t> be an order </a:t>
+                </a:r>
+                <a14:m>
+                  <m:oMath xmlns:m="http://schemas.openxmlformats.org/officeDocument/2006/math">
+                    <m:r>
+                      <a:rPr lang="en-US" b="0" i="1" smtClean="0">
+                        <a:latin typeface="Cambria Math" panose="02040503050406030204" pitchFamily="18" charset="0"/>
+                      </a:rPr>
+                      <m:t>𝑙</m:t>
+                    </m:r>
+                    <m:r>
+                      <a:rPr lang="en-US" b="0" i="1" smtClean="0">
+                        <a:latin typeface="Cambria Math" panose="02040503050406030204" pitchFamily="18" charset="0"/>
+                      </a:rPr>
+                      <m:t>+</m:t>
+                    </m:r>
+                    <m:r>
+                      <a:rPr lang="en-US" b="0" i="1" smtClean="0">
+                        <a:latin typeface="Cambria Math" panose="02040503050406030204" pitchFamily="18" charset="0"/>
+                      </a:rPr>
+                      <m:t>𝑚</m:t>
+                    </m:r>
+                  </m:oMath>
+                </a14:m>
+                <a:r>
+                  <a:rPr lang="en-US" dirty="0"/>
+                  <a:t> tensor</a:t>
+                </a:r>
+              </a:p>
+              <a:p>
+                <a:r>
+                  <a:rPr lang="en-US" b="0" dirty="0"/>
+                  <a:t>Let </a:t>
+                </a:r>
+                <a14:m>
+                  <m:oMath xmlns:m="http://schemas.openxmlformats.org/officeDocument/2006/math">
+                    <m:r>
+                      <a:rPr lang="en-US" b="0" i="0" smtClean="0">
+                        <a:latin typeface="Cambria Math" panose="02040503050406030204" pitchFamily="18" charset="0"/>
+                      </a:rPr>
+                      <m:t>𝐵</m:t>
+                    </m:r>
+                    <m:r>
+                      <a:rPr lang="en-US" b="0" i="1" smtClean="0">
+                        <a:latin typeface="Cambria Math" panose="02040503050406030204" pitchFamily="18" charset="0"/>
+                      </a:rPr>
+                      <m:t>∈</m:t>
+                    </m:r>
+                    <m:sSub>
+                      <m:sSubPr>
+                        <m:ctrlPr>
+                          <a:rPr lang="en-US" b="0" i="1" smtClean="0">
+                            <a:latin typeface="Cambria Math" panose="02040503050406030204" pitchFamily="18" charset="0"/>
+                          </a:rPr>
+                        </m:ctrlPr>
+                      </m:sSubPr>
+                      <m:e>
+                        <m:r>
+                          <a:rPr lang="en-US" b="0" i="1" smtClean="0">
+                            <a:latin typeface="Cambria Math" panose="02040503050406030204" pitchFamily="18" charset="0"/>
+                          </a:rPr>
+                          <m:t>𝑉</m:t>
+                        </m:r>
+                      </m:e>
+                      <m:sub>
+                        <m:r>
+                          <a:rPr lang="en-US" b="0" i="1" smtClean="0">
+                            <a:latin typeface="Cambria Math" panose="02040503050406030204" pitchFamily="18" charset="0"/>
+                          </a:rPr>
+                          <m:t>1</m:t>
+                        </m:r>
+                      </m:sub>
+                    </m:sSub>
+                    <m:r>
+                      <a:rPr lang="en-US" b="0" i="1" smtClean="0">
+                        <a:latin typeface="Cambria Math" panose="02040503050406030204" pitchFamily="18" charset="0"/>
+                      </a:rPr>
+                      <m:t>⊗…⊗</m:t>
+                    </m:r>
+                    <m:sSub>
+                      <m:sSubPr>
+                        <m:ctrlPr>
+                          <a:rPr lang="en-US" b="0" i="1" smtClean="0">
+                            <a:latin typeface="Cambria Math" panose="02040503050406030204" pitchFamily="18" charset="0"/>
+                          </a:rPr>
+                        </m:ctrlPr>
+                      </m:sSubPr>
+                      <m:e>
+                        <m:r>
+                          <a:rPr lang="en-US" b="0" i="1" smtClean="0">
+                            <a:latin typeface="Cambria Math" panose="02040503050406030204" pitchFamily="18" charset="0"/>
+                          </a:rPr>
+                          <m:t>𝑉</m:t>
+                        </m:r>
+                      </m:e>
+                      <m:sub>
+                        <m:r>
+                          <a:rPr lang="en-US" b="0" i="1" smtClean="0">
+                            <a:latin typeface="Cambria Math" panose="02040503050406030204" pitchFamily="18" charset="0"/>
+                          </a:rPr>
+                          <m:t>𝑚</m:t>
+                        </m:r>
+                      </m:sub>
+                    </m:sSub>
+                    <m:r>
+                      <a:rPr lang="en-US" b="0" i="1" smtClean="0">
+                        <a:latin typeface="Cambria Math" panose="02040503050406030204" pitchFamily="18" charset="0"/>
+                      </a:rPr>
+                      <m:t>⊗</m:t>
+                    </m:r>
+                    <m:sSub>
+                      <m:sSubPr>
+                        <m:ctrlPr>
+                          <a:rPr lang="en-US" b="0" i="1" smtClean="0">
+                            <a:latin typeface="Cambria Math" panose="02040503050406030204" pitchFamily="18" charset="0"/>
+                          </a:rPr>
+                        </m:ctrlPr>
+                      </m:sSubPr>
+                      <m:e>
+                        <m:r>
+                          <a:rPr lang="en-US" b="0" i="1" smtClean="0">
+                            <a:latin typeface="Cambria Math" panose="02040503050406030204" pitchFamily="18" charset="0"/>
+                          </a:rPr>
+                          <m:t>𝑊</m:t>
+                        </m:r>
+                      </m:e>
+                      <m:sub>
+                        <m:r>
+                          <a:rPr lang="en-US" b="0" i="1" smtClean="0">
+                            <a:latin typeface="Cambria Math" panose="02040503050406030204" pitchFamily="18" charset="0"/>
+                          </a:rPr>
+                          <m:t>1</m:t>
+                        </m:r>
+                      </m:sub>
+                    </m:sSub>
+                    <m:r>
+                      <a:rPr lang="en-US" b="0" i="1" smtClean="0">
+                        <a:latin typeface="Cambria Math" panose="02040503050406030204" pitchFamily="18" charset="0"/>
+                      </a:rPr>
+                      <m:t>⊗…⊗</m:t>
+                    </m:r>
+                    <m:sSub>
+                      <m:sSubPr>
+                        <m:ctrlPr>
+                          <a:rPr lang="en-US" b="0" i="1" smtClean="0">
+                            <a:latin typeface="Cambria Math" panose="02040503050406030204" pitchFamily="18" charset="0"/>
+                          </a:rPr>
+                        </m:ctrlPr>
+                      </m:sSubPr>
+                      <m:e>
+                        <m:r>
+                          <a:rPr lang="en-US" b="0" i="1" smtClean="0">
+                            <a:latin typeface="Cambria Math" panose="02040503050406030204" pitchFamily="18" charset="0"/>
+                          </a:rPr>
+                          <m:t>𝑊</m:t>
+                        </m:r>
+                      </m:e>
+                      <m:sub>
+                        <m:r>
+                          <a:rPr lang="en-US" b="0" i="1" smtClean="0">
+                            <a:latin typeface="Cambria Math" panose="02040503050406030204" pitchFamily="18" charset="0"/>
+                          </a:rPr>
+                          <m:t>𝑛</m:t>
+                        </m:r>
+                      </m:sub>
+                    </m:sSub>
+                  </m:oMath>
+                </a14:m>
+                <a:r>
+                  <a:rPr lang="en-US" dirty="0"/>
+                  <a:t> an order </a:t>
+                </a:r>
+                <a14:m>
+                  <m:oMath xmlns:m="http://schemas.openxmlformats.org/officeDocument/2006/math">
+                    <m:r>
+                      <a:rPr lang="en-US" b="0" i="1" smtClean="0">
+                        <a:latin typeface="Cambria Math" panose="02040503050406030204" pitchFamily="18" charset="0"/>
+                      </a:rPr>
+                      <m:t>𝑚</m:t>
+                    </m:r>
+                    <m:r>
+                      <a:rPr lang="en-US" b="0" i="1" smtClean="0">
+                        <a:latin typeface="Cambria Math" panose="02040503050406030204" pitchFamily="18" charset="0"/>
+                      </a:rPr>
+                      <m:t>+</m:t>
+                    </m:r>
+                    <m:r>
+                      <a:rPr lang="en-US" b="0" i="1" smtClean="0">
+                        <a:latin typeface="Cambria Math" panose="02040503050406030204" pitchFamily="18" charset="0"/>
+                      </a:rPr>
+                      <m:t>𝑛</m:t>
+                    </m:r>
+                  </m:oMath>
+                </a14:m>
+                <a:r>
+                  <a:rPr lang="en-US" dirty="0"/>
+                  <a:t> tensor</a:t>
+                </a:r>
+              </a:p>
+              <a:p>
+                <a:r>
+                  <a:rPr lang="en-US" dirty="0"/>
+                  <a:t>Denote by </a:t>
+                </a:r>
+                <a14:m>
+                  <m:oMath xmlns:m="http://schemas.openxmlformats.org/officeDocument/2006/math">
+                    <m:sSub>
+                      <m:sSubPr>
+                        <m:ctrlPr>
+                          <a:rPr lang="en-US" i="1">
+                            <a:latin typeface="Cambria Math" panose="02040503050406030204" pitchFamily="18" charset="0"/>
+                          </a:rPr>
+                        </m:ctrlPr>
+                      </m:sSubPr>
+                      <m:e>
+                        <m:r>
+                          <m:rPr>
+                            <m:sty m:val="p"/>
+                          </m:rPr>
+                          <a:rPr lang="en-US" b="0" i="1" smtClean="0">
+                            <a:latin typeface="Cambria Math" panose="02040503050406030204" pitchFamily="18" charset="0"/>
+                          </a:rPr>
+                          <m:t>a</m:t>
+                        </m:r>
+                      </m:e>
+                      <m:sub>
+                        <m:sSub>
+                          <m:sSubPr>
+                            <m:ctrlPr>
+                              <a:rPr lang="en-US" i="1">
+                                <a:latin typeface="Cambria Math" panose="02040503050406030204" pitchFamily="18" charset="0"/>
+                              </a:rPr>
+                            </m:ctrlPr>
+                          </m:sSubPr>
+                          <m:e>
+                            <m:r>
+                              <a:rPr lang="en-US" i="1">
+                                <a:latin typeface="Cambria Math" panose="02040503050406030204" pitchFamily="18" charset="0"/>
+                              </a:rPr>
+                              <m:t>𝑖</m:t>
+                            </m:r>
+                          </m:e>
+                          <m:sub>
+                            <m:r>
+                              <a:rPr lang="en-US" i="1">
+                                <a:latin typeface="Cambria Math" panose="02040503050406030204" pitchFamily="18" charset="0"/>
+                              </a:rPr>
+                              <m:t>1</m:t>
+                            </m:r>
+                          </m:sub>
+                        </m:sSub>
+                        <m:r>
+                          <a:rPr lang="en-US" i="1">
+                            <a:latin typeface="Cambria Math" panose="02040503050406030204" pitchFamily="18" charset="0"/>
+                          </a:rPr>
+                          <m:t>…</m:t>
+                        </m:r>
+                        <m:sSub>
+                          <m:sSubPr>
+                            <m:ctrlPr>
+                              <a:rPr lang="en-US" i="1">
+                                <a:latin typeface="Cambria Math" panose="02040503050406030204" pitchFamily="18" charset="0"/>
+                              </a:rPr>
+                            </m:ctrlPr>
+                          </m:sSubPr>
+                          <m:e>
+                            <m:r>
+                              <a:rPr lang="en-US" i="1">
+                                <a:latin typeface="Cambria Math" panose="02040503050406030204" pitchFamily="18" charset="0"/>
+                              </a:rPr>
+                              <m:t>𝑖</m:t>
+                            </m:r>
+                          </m:e>
+                          <m:sub>
+                            <m:r>
+                              <a:rPr lang="en-US" i="1">
+                                <a:latin typeface="Cambria Math" panose="02040503050406030204" pitchFamily="18" charset="0"/>
+                              </a:rPr>
+                              <m:t>𝑙</m:t>
+                            </m:r>
+                          </m:sub>
+                        </m:sSub>
+                        <m:sSub>
+                          <m:sSubPr>
+                            <m:ctrlPr>
+                              <a:rPr lang="en-US" i="1">
+                                <a:latin typeface="Cambria Math" panose="02040503050406030204" pitchFamily="18" charset="0"/>
+                              </a:rPr>
+                            </m:ctrlPr>
+                          </m:sSubPr>
+                          <m:e>
+                            <m:r>
+                              <a:rPr lang="en-US" i="1">
+                                <a:latin typeface="Cambria Math" panose="02040503050406030204" pitchFamily="18" charset="0"/>
+                              </a:rPr>
+                              <m:t>𝑗</m:t>
+                            </m:r>
+                          </m:e>
+                          <m:sub>
+                            <m:r>
+                              <a:rPr lang="en-US" i="1">
+                                <a:latin typeface="Cambria Math" panose="02040503050406030204" pitchFamily="18" charset="0"/>
+                              </a:rPr>
+                              <m:t>1</m:t>
+                            </m:r>
+                          </m:sub>
+                        </m:sSub>
+                        <m:r>
+                          <a:rPr lang="en-US" i="1">
+                            <a:latin typeface="Cambria Math" panose="02040503050406030204" pitchFamily="18" charset="0"/>
+                          </a:rPr>
+                          <m:t>…</m:t>
+                        </m:r>
+                        <m:sSub>
+                          <m:sSubPr>
+                            <m:ctrlPr>
+                              <a:rPr lang="en-US" i="1">
+                                <a:latin typeface="Cambria Math" panose="02040503050406030204" pitchFamily="18" charset="0"/>
+                              </a:rPr>
+                            </m:ctrlPr>
+                          </m:sSubPr>
+                          <m:e>
+                            <m:r>
+                              <a:rPr lang="en-US" i="1">
+                                <a:latin typeface="Cambria Math" panose="02040503050406030204" pitchFamily="18" charset="0"/>
+                              </a:rPr>
+                              <m:t>𝑗</m:t>
+                            </m:r>
+                          </m:e>
+                          <m:sub>
+                            <m:r>
+                              <a:rPr lang="en-US" i="1">
+                                <a:latin typeface="Cambria Math" panose="02040503050406030204" pitchFamily="18" charset="0"/>
+                              </a:rPr>
+                              <m:t>𝑚</m:t>
+                            </m:r>
+                          </m:sub>
+                        </m:sSub>
+                      </m:sub>
+                    </m:sSub>
+                  </m:oMath>
+                </a14:m>
+                <a:r>
+                  <a:rPr lang="en-US" dirty="0"/>
+                  <a:t> the element at index </a:t>
+                </a:r>
+                <a14:m>
+                  <m:oMath xmlns:m="http://schemas.openxmlformats.org/officeDocument/2006/math">
+                    <m:sSub>
+                      <m:sSubPr>
+                        <m:ctrlPr>
+                          <a:rPr lang="en-US" b="0" i="1" smtClean="0">
+                            <a:latin typeface="Cambria Math" panose="02040503050406030204" pitchFamily="18" charset="0"/>
+                          </a:rPr>
+                        </m:ctrlPr>
+                      </m:sSubPr>
+                      <m:e>
+                        <m:r>
+                          <a:rPr lang="en-US" b="0" i="1" smtClean="0">
+                            <a:latin typeface="Cambria Math" panose="02040503050406030204" pitchFamily="18" charset="0"/>
+                          </a:rPr>
+                          <m:t>𝑖</m:t>
+                        </m:r>
+                      </m:e>
+                      <m:sub>
+                        <m:r>
+                          <a:rPr lang="en-US" b="0" i="1" smtClean="0">
+                            <a:latin typeface="Cambria Math" panose="02040503050406030204" pitchFamily="18" charset="0"/>
+                          </a:rPr>
+                          <m:t>1</m:t>
+                        </m:r>
+                      </m:sub>
+                    </m:sSub>
+                    <m:r>
+                      <a:rPr lang="en-US" b="0" i="1" smtClean="0">
+                        <a:latin typeface="Cambria Math" panose="02040503050406030204" pitchFamily="18" charset="0"/>
+                      </a:rPr>
+                      <m:t>,…,</m:t>
+                    </m:r>
+                    <m:sSub>
+                      <m:sSubPr>
+                        <m:ctrlPr>
+                          <a:rPr lang="en-US" b="0" i="1" smtClean="0">
+                            <a:latin typeface="Cambria Math" panose="02040503050406030204" pitchFamily="18" charset="0"/>
+                          </a:rPr>
+                        </m:ctrlPr>
+                      </m:sSubPr>
+                      <m:e>
+                        <m:r>
+                          <a:rPr lang="en-US" b="0" i="1" smtClean="0">
+                            <a:latin typeface="Cambria Math" panose="02040503050406030204" pitchFamily="18" charset="0"/>
+                          </a:rPr>
+                          <m:t>𝑖</m:t>
+                        </m:r>
+                      </m:e>
+                      <m:sub>
+                        <m:r>
+                          <a:rPr lang="en-US" b="0" i="1" smtClean="0">
+                            <a:latin typeface="Cambria Math" panose="02040503050406030204" pitchFamily="18" charset="0"/>
+                          </a:rPr>
+                          <m:t>𝑙</m:t>
+                        </m:r>
+                      </m:sub>
+                    </m:sSub>
+                    <m:r>
+                      <a:rPr lang="en-US" b="0" i="1" smtClean="0">
+                        <a:latin typeface="Cambria Math" panose="02040503050406030204" pitchFamily="18" charset="0"/>
+                      </a:rPr>
+                      <m:t>,</m:t>
+                    </m:r>
+                    <m:sSub>
+                      <m:sSubPr>
+                        <m:ctrlPr>
+                          <a:rPr lang="en-US" b="0" i="1" smtClean="0">
+                            <a:latin typeface="Cambria Math" panose="02040503050406030204" pitchFamily="18" charset="0"/>
+                          </a:rPr>
+                        </m:ctrlPr>
+                      </m:sSubPr>
+                      <m:e>
+                        <m:r>
+                          <a:rPr lang="en-US" b="0" i="1" smtClean="0">
+                            <a:latin typeface="Cambria Math" panose="02040503050406030204" pitchFamily="18" charset="0"/>
+                          </a:rPr>
+                          <m:t>𝑗</m:t>
+                        </m:r>
+                      </m:e>
+                      <m:sub>
+                        <m:r>
+                          <a:rPr lang="en-US" b="0" i="1" smtClean="0">
+                            <a:latin typeface="Cambria Math" panose="02040503050406030204" pitchFamily="18" charset="0"/>
+                          </a:rPr>
+                          <m:t>1</m:t>
+                        </m:r>
+                      </m:sub>
+                    </m:sSub>
+                    <m:r>
+                      <a:rPr lang="en-US" b="0" i="1" smtClean="0">
+                        <a:latin typeface="Cambria Math" panose="02040503050406030204" pitchFamily="18" charset="0"/>
+                      </a:rPr>
+                      <m:t>,…,</m:t>
+                    </m:r>
+                    <m:sSub>
+                      <m:sSubPr>
+                        <m:ctrlPr>
+                          <a:rPr lang="en-US" b="0" i="1" smtClean="0">
+                            <a:latin typeface="Cambria Math" panose="02040503050406030204" pitchFamily="18" charset="0"/>
+                          </a:rPr>
+                        </m:ctrlPr>
+                      </m:sSubPr>
+                      <m:e>
+                        <m:r>
+                          <a:rPr lang="en-US" b="0" i="1" smtClean="0">
+                            <a:latin typeface="Cambria Math" panose="02040503050406030204" pitchFamily="18" charset="0"/>
+                          </a:rPr>
+                          <m:t>𝑗</m:t>
+                        </m:r>
+                      </m:e>
+                      <m:sub>
+                        <m:r>
+                          <a:rPr lang="en-US" b="0" i="1" smtClean="0">
+                            <a:latin typeface="Cambria Math" panose="02040503050406030204" pitchFamily="18" charset="0"/>
+                          </a:rPr>
+                          <m:t>𝑚</m:t>
+                        </m:r>
+                      </m:sub>
+                    </m:sSub>
+                  </m:oMath>
+                </a14:m>
+                <a:r>
+                  <a:rPr lang="en-US" dirty="0"/>
+                  <a:t> of </a:t>
+                </a:r>
+                <a14:m>
+                  <m:oMath xmlns:m="http://schemas.openxmlformats.org/officeDocument/2006/math">
+                    <m:r>
+                      <a:rPr lang="en-US" b="0" i="1" smtClean="0">
+                        <a:latin typeface="Cambria Math" panose="02040503050406030204" pitchFamily="18" charset="0"/>
+                      </a:rPr>
+                      <m:t>𝐴</m:t>
+                    </m:r>
+                  </m:oMath>
+                </a14:m>
+                <a:r>
+                  <a:rPr lang="en-US" dirty="0"/>
+                  <a:t> (thought of as an </a:t>
+                </a:r>
+                <a14:m>
+                  <m:oMath xmlns:m="http://schemas.openxmlformats.org/officeDocument/2006/math">
+                    <m:r>
+                      <a:rPr lang="en-US" b="0" i="1" smtClean="0">
+                        <a:latin typeface="Cambria Math" panose="02040503050406030204" pitchFamily="18" charset="0"/>
+                      </a:rPr>
+                      <m:t>𝑙</m:t>
+                    </m:r>
+                    <m:r>
+                      <a:rPr lang="en-US" b="0" i="1" smtClean="0">
+                        <a:latin typeface="Cambria Math" panose="02040503050406030204" pitchFamily="18" charset="0"/>
+                      </a:rPr>
+                      <m:t>+</m:t>
+                    </m:r>
+                    <m:r>
+                      <a:rPr lang="en-US" b="0" i="1" smtClean="0">
+                        <a:latin typeface="Cambria Math" panose="02040503050406030204" pitchFamily="18" charset="0"/>
+                      </a:rPr>
+                      <m:t>𝑚</m:t>
+                    </m:r>
+                  </m:oMath>
+                </a14:m>
+                <a:r>
+                  <a:rPr lang="en-US" dirty="0"/>
+                  <a:t> dimensional grid of numbers); likewise for </a:t>
+                </a:r>
+                <a14:m>
+                  <m:oMath xmlns:m="http://schemas.openxmlformats.org/officeDocument/2006/math">
+                    <m:sSub>
+                      <m:sSubPr>
+                        <m:ctrlPr>
+                          <a:rPr lang="en-US" i="1">
+                            <a:latin typeface="Cambria Math" panose="02040503050406030204" pitchFamily="18" charset="0"/>
+                          </a:rPr>
+                        </m:ctrlPr>
+                      </m:sSubPr>
+                      <m:e>
+                        <m:r>
+                          <m:rPr>
+                            <m:sty m:val="p"/>
+                          </m:rPr>
+                          <a:rPr lang="en-US" b="0" i="1" smtClean="0">
+                            <a:latin typeface="Cambria Math" panose="02040503050406030204" pitchFamily="18" charset="0"/>
+                          </a:rPr>
+                          <m:t>b</m:t>
+                        </m:r>
+                      </m:e>
+                      <m:sub>
+                        <m:sSub>
+                          <m:sSubPr>
+                            <m:ctrlPr>
+                              <a:rPr lang="en-US" i="1">
+                                <a:latin typeface="Cambria Math" panose="02040503050406030204" pitchFamily="18" charset="0"/>
+                              </a:rPr>
+                            </m:ctrlPr>
+                          </m:sSubPr>
+                          <m:e>
+                            <m:r>
+                              <a:rPr lang="en-US" i="1">
+                                <a:latin typeface="Cambria Math" panose="02040503050406030204" pitchFamily="18" charset="0"/>
+                              </a:rPr>
+                              <m:t>𝑗</m:t>
+                            </m:r>
+                          </m:e>
+                          <m:sub>
+                            <m:r>
+                              <a:rPr lang="en-US" i="1">
+                                <a:latin typeface="Cambria Math" panose="02040503050406030204" pitchFamily="18" charset="0"/>
+                              </a:rPr>
+                              <m:t>1</m:t>
+                            </m:r>
+                          </m:sub>
+                        </m:sSub>
+                        <m:r>
+                          <a:rPr lang="en-US" i="1">
+                            <a:latin typeface="Cambria Math" panose="02040503050406030204" pitchFamily="18" charset="0"/>
+                          </a:rPr>
+                          <m:t>…</m:t>
+                        </m:r>
+                        <m:sSub>
+                          <m:sSubPr>
+                            <m:ctrlPr>
+                              <a:rPr lang="en-US" i="1">
+                                <a:latin typeface="Cambria Math" panose="02040503050406030204" pitchFamily="18" charset="0"/>
+                              </a:rPr>
+                            </m:ctrlPr>
+                          </m:sSubPr>
+                          <m:e>
+                            <m:r>
+                              <a:rPr lang="en-US" i="1">
+                                <a:latin typeface="Cambria Math" panose="02040503050406030204" pitchFamily="18" charset="0"/>
+                              </a:rPr>
+                              <m:t>𝑗</m:t>
+                            </m:r>
+                          </m:e>
+                          <m:sub>
+                            <m:r>
+                              <a:rPr lang="en-US" i="1">
+                                <a:latin typeface="Cambria Math" panose="02040503050406030204" pitchFamily="18" charset="0"/>
+                              </a:rPr>
+                              <m:t>𝑚</m:t>
+                            </m:r>
+                          </m:sub>
+                        </m:sSub>
+                        <m:sSub>
+                          <m:sSubPr>
+                            <m:ctrlPr>
+                              <a:rPr lang="en-US" i="1">
+                                <a:latin typeface="Cambria Math" panose="02040503050406030204" pitchFamily="18" charset="0"/>
+                              </a:rPr>
+                            </m:ctrlPr>
+                          </m:sSubPr>
+                          <m:e>
+                            <m:r>
+                              <a:rPr lang="en-US" i="1">
+                                <a:latin typeface="Cambria Math" panose="02040503050406030204" pitchFamily="18" charset="0"/>
+                              </a:rPr>
+                              <m:t>𝑘</m:t>
+                            </m:r>
+                          </m:e>
+                          <m:sub>
+                            <m:r>
+                              <a:rPr lang="en-US" i="1">
+                                <a:latin typeface="Cambria Math" panose="02040503050406030204" pitchFamily="18" charset="0"/>
+                              </a:rPr>
+                              <m:t>1</m:t>
+                            </m:r>
+                          </m:sub>
+                        </m:sSub>
+                        <m:r>
+                          <a:rPr lang="en-US" i="1">
+                            <a:latin typeface="Cambria Math" panose="02040503050406030204" pitchFamily="18" charset="0"/>
+                          </a:rPr>
+                          <m:t>…</m:t>
+                        </m:r>
+                        <m:sSub>
+                          <m:sSubPr>
+                            <m:ctrlPr>
+                              <a:rPr lang="en-US" i="1">
+                                <a:latin typeface="Cambria Math" panose="02040503050406030204" pitchFamily="18" charset="0"/>
+                              </a:rPr>
+                            </m:ctrlPr>
+                          </m:sSubPr>
+                          <m:e>
+                            <m:r>
+                              <a:rPr lang="en-US" i="1">
+                                <a:latin typeface="Cambria Math" panose="02040503050406030204" pitchFamily="18" charset="0"/>
+                              </a:rPr>
+                              <m:t>𝑘</m:t>
+                            </m:r>
+                          </m:e>
+                          <m:sub>
+                            <m:r>
+                              <a:rPr lang="en-US" i="1">
+                                <a:latin typeface="Cambria Math" panose="02040503050406030204" pitchFamily="18" charset="0"/>
+                              </a:rPr>
+                              <m:t>𝑛</m:t>
+                            </m:r>
+                          </m:sub>
+                        </m:sSub>
+                      </m:sub>
+                    </m:sSub>
+                  </m:oMath>
+                </a14:m>
+                <a:endParaRPr lang="en-US" dirty="0"/>
+              </a:p>
+              <a:p>
+                <a:r>
+                  <a:rPr lang="en-US" dirty="0"/>
+                  <a:t>The </a:t>
+                </a:r>
+                <a:r>
+                  <a:rPr lang="en-US" i="1" dirty="0"/>
+                  <a:t>tensor contraction </a:t>
+                </a:r>
+                <a:r>
+                  <a:rPr lang="en-US" dirty="0"/>
+                  <a:t>of </a:t>
+                </a:r>
+                <a14:m>
+                  <m:oMath xmlns:m="http://schemas.openxmlformats.org/officeDocument/2006/math">
+                    <m:r>
+                      <a:rPr lang="en-US" b="0" i="1" smtClean="0">
+                        <a:latin typeface="Cambria Math" panose="02040503050406030204" pitchFamily="18" charset="0"/>
+                      </a:rPr>
+                      <m:t>𝐴</m:t>
+                    </m:r>
+                  </m:oMath>
+                </a14:m>
+                <a:r>
+                  <a:rPr lang="en-US" dirty="0"/>
+                  <a:t> and </a:t>
+                </a:r>
+                <a14:m>
+                  <m:oMath xmlns:m="http://schemas.openxmlformats.org/officeDocument/2006/math">
+                    <m:r>
+                      <a:rPr lang="en-US" b="0" i="1" smtClean="0">
+                        <a:latin typeface="Cambria Math" panose="02040503050406030204" pitchFamily="18" charset="0"/>
+                      </a:rPr>
+                      <m:t>𝐵</m:t>
+                    </m:r>
+                  </m:oMath>
+                </a14:m>
+                <a:r>
+                  <a:rPr lang="en-US" dirty="0"/>
+                  <a:t> (along the indices </a:t>
+                </a:r>
+                <a14:m>
+                  <m:oMath xmlns:m="http://schemas.openxmlformats.org/officeDocument/2006/math">
+                    <m:sSub>
+                      <m:sSubPr>
+                        <m:ctrlPr>
+                          <a:rPr lang="en-US" b="0" i="1" smtClean="0">
+                            <a:latin typeface="Cambria Math" panose="02040503050406030204" pitchFamily="18" charset="0"/>
+                          </a:rPr>
+                        </m:ctrlPr>
+                      </m:sSubPr>
+                      <m:e>
+                        <m:r>
+                          <a:rPr lang="en-US" b="0" i="1" smtClean="0">
+                            <a:latin typeface="Cambria Math" panose="02040503050406030204" pitchFamily="18" charset="0"/>
+                          </a:rPr>
+                          <m:t>𝑗</m:t>
+                        </m:r>
+                      </m:e>
+                      <m:sub>
+                        <m:r>
+                          <a:rPr lang="en-US" b="0" i="1" smtClean="0">
+                            <a:latin typeface="Cambria Math" panose="02040503050406030204" pitchFamily="18" charset="0"/>
+                          </a:rPr>
+                          <m:t>1</m:t>
+                        </m:r>
+                      </m:sub>
+                    </m:sSub>
+                    <m:r>
+                      <a:rPr lang="en-US" b="0" i="1" smtClean="0">
+                        <a:latin typeface="Cambria Math" panose="02040503050406030204" pitchFamily="18" charset="0"/>
+                      </a:rPr>
+                      <m:t>…</m:t>
+                    </m:r>
+                    <m:sSub>
+                      <m:sSubPr>
+                        <m:ctrlPr>
+                          <a:rPr lang="en-US" b="0" i="1" smtClean="0">
+                            <a:latin typeface="Cambria Math" panose="02040503050406030204" pitchFamily="18" charset="0"/>
+                          </a:rPr>
+                        </m:ctrlPr>
+                      </m:sSubPr>
+                      <m:e>
+                        <m:r>
+                          <a:rPr lang="en-US" b="0" i="1" smtClean="0">
+                            <a:latin typeface="Cambria Math" panose="02040503050406030204" pitchFamily="18" charset="0"/>
+                          </a:rPr>
+                          <m:t>𝑗</m:t>
+                        </m:r>
+                      </m:e>
+                      <m:sub>
+                        <m:r>
+                          <a:rPr lang="en-US" b="0" i="1" smtClean="0">
+                            <a:latin typeface="Cambria Math" panose="02040503050406030204" pitchFamily="18" charset="0"/>
+                          </a:rPr>
+                          <m:t>𝑚</m:t>
+                        </m:r>
+                      </m:sub>
+                    </m:sSub>
+                  </m:oMath>
+                </a14:m>
+                <a:r>
+                  <a:rPr lang="en-US" dirty="0"/>
+                  <a:t>) is an order </a:t>
+                </a:r>
+                <a14:m>
+                  <m:oMath xmlns:m="http://schemas.openxmlformats.org/officeDocument/2006/math">
+                    <m:r>
+                      <a:rPr lang="en-US" b="0" i="1" smtClean="0">
+                        <a:latin typeface="Cambria Math" panose="02040503050406030204" pitchFamily="18" charset="0"/>
+                      </a:rPr>
+                      <m:t>𝑙</m:t>
+                    </m:r>
+                    <m:r>
+                      <a:rPr lang="en-US" b="0" i="1" smtClean="0">
+                        <a:latin typeface="Cambria Math" panose="02040503050406030204" pitchFamily="18" charset="0"/>
+                      </a:rPr>
+                      <m:t>+</m:t>
+                    </m:r>
+                    <m:r>
+                      <a:rPr lang="en-US" b="0" i="1" smtClean="0">
+                        <a:latin typeface="Cambria Math" panose="02040503050406030204" pitchFamily="18" charset="0"/>
+                      </a:rPr>
+                      <m:t>𝑛</m:t>
+                    </m:r>
+                  </m:oMath>
+                </a14:m>
+                <a:r>
+                  <a:rPr lang="en-US" dirty="0"/>
+                  <a:t> tensor </a:t>
+                </a:r>
+                <a14:m>
+                  <m:oMath xmlns:m="http://schemas.openxmlformats.org/officeDocument/2006/math">
+                    <m:r>
+                      <a:rPr lang="en-US" b="0" i="1" smtClean="0">
+                        <a:latin typeface="Cambria Math" panose="02040503050406030204" pitchFamily="18" charset="0"/>
+                      </a:rPr>
+                      <m:t>𝐴𝐵</m:t>
+                    </m:r>
+                    <m:r>
+                      <a:rPr lang="en-US" b="0" i="1" smtClean="0">
+                        <a:latin typeface="Cambria Math" panose="02040503050406030204" pitchFamily="18" charset="0"/>
+                      </a:rPr>
+                      <m:t>∈</m:t>
+                    </m:r>
+                    <m:sSub>
+                      <m:sSubPr>
+                        <m:ctrlPr>
+                          <a:rPr lang="en-US" b="0" i="1" smtClean="0">
+                            <a:latin typeface="Cambria Math" panose="02040503050406030204" pitchFamily="18" charset="0"/>
+                          </a:rPr>
+                        </m:ctrlPr>
+                      </m:sSubPr>
+                      <m:e>
+                        <m:r>
+                          <a:rPr lang="en-US" b="0" i="1" smtClean="0">
+                            <a:latin typeface="Cambria Math" panose="02040503050406030204" pitchFamily="18" charset="0"/>
+                          </a:rPr>
+                          <m:t>𝑈</m:t>
+                        </m:r>
+                      </m:e>
+                      <m:sub>
+                        <m:r>
+                          <a:rPr lang="en-US" b="0" i="1" smtClean="0">
+                            <a:latin typeface="Cambria Math" panose="02040503050406030204" pitchFamily="18" charset="0"/>
+                          </a:rPr>
+                          <m:t>1</m:t>
+                        </m:r>
+                      </m:sub>
+                    </m:sSub>
+                    <m:r>
+                      <a:rPr lang="en-US" b="0" i="1" smtClean="0">
+                        <a:latin typeface="Cambria Math" panose="02040503050406030204" pitchFamily="18" charset="0"/>
+                      </a:rPr>
+                      <m:t>⊗…⊗</m:t>
+                    </m:r>
+                    <m:sSub>
+                      <m:sSubPr>
+                        <m:ctrlPr>
+                          <a:rPr lang="en-US" b="0" i="1" smtClean="0">
+                            <a:latin typeface="Cambria Math" panose="02040503050406030204" pitchFamily="18" charset="0"/>
+                          </a:rPr>
+                        </m:ctrlPr>
+                      </m:sSubPr>
+                      <m:e>
+                        <m:r>
+                          <a:rPr lang="en-US" b="0" i="1" smtClean="0">
+                            <a:latin typeface="Cambria Math" panose="02040503050406030204" pitchFamily="18" charset="0"/>
+                          </a:rPr>
+                          <m:t>𝑈</m:t>
+                        </m:r>
+                      </m:e>
+                      <m:sub>
+                        <m:r>
+                          <a:rPr lang="en-US" b="0" i="1" smtClean="0">
+                            <a:latin typeface="Cambria Math" panose="02040503050406030204" pitchFamily="18" charset="0"/>
+                          </a:rPr>
+                          <m:t>𝑙</m:t>
+                        </m:r>
+                      </m:sub>
+                    </m:sSub>
+                    <m:r>
+                      <a:rPr lang="en-US" b="0" i="1" smtClean="0">
+                        <a:latin typeface="Cambria Math" panose="02040503050406030204" pitchFamily="18" charset="0"/>
+                      </a:rPr>
+                      <m:t>⊗</m:t>
+                    </m:r>
+                    <m:sSub>
+                      <m:sSubPr>
+                        <m:ctrlPr>
+                          <a:rPr lang="en-US" b="0" i="1" smtClean="0">
+                            <a:latin typeface="Cambria Math" panose="02040503050406030204" pitchFamily="18" charset="0"/>
+                          </a:rPr>
+                        </m:ctrlPr>
+                      </m:sSubPr>
+                      <m:e>
+                        <m:r>
+                          <a:rPr lang="en-US" b="0" i="1" smtClean="0">
+                            <a:latin typeface="Cambria Math" panose="02040503050406030204" pitchFamily="18" charset="0"/>
+                          </a:rPr>
+                          <m:t>𝑊</m:t>
+                        </m:r>
+                      </m:e>
+                      <m:sub>
+                        <m:r>
+                          <a:rPr lang="en-US" b="0" i="1" smtClean="0">
+                            <a:latin typeface="Cambria Math" panose="02040503050406030204" pitchFamily="18" charset="0"/>
+                          </a:rPr>
+                          <m:t>1</m:t>
+                        </m:r>
+                      </m:sub>
+                    </m:sSub>
+                    <m:r>
+                      <a:rPr lang="en-US" b="0" i="1" smtClean="0">
+                        <a:latin typeface="Cambria Math" panose="02040503050406030204" pitchFamily="18" charset="0"/>
+                      </a:rPr>
+                      <m:t>⊗…⊗</m:t>
+                    </m:r>
+                    <m:sSub>
+                      <m:sSubPr>
+                        <m:ctrlPr>
+                          <a:rPr lang="en-US" b="0" i="1" smtClean="0">
+                            <a:latin typeface="Cambria Math" panose="02040503050406030204" pitchFamily="18" charset="0"/>
+                          </a:rPr>
+                        </m:ctrlPr>
+                      </m:sSubPr>
+                      <m:e>
+                        <m:r>
+                          <a:rPr lang="en-US" b="0" i="1" smtClean="0">
+                            <a:latin typeface="Cambria Math" panose="02040503050406030204" pitchFamily="18" charset="0"/>
+                          </a:rPr>
+                          <m:t>𝑊</m:t>
+                        </m:r>
+                      </m:e>
+                      <m:sub>
+                        <m:r>
+                          <a:rPr lang="en-US" b="0" i="1" smtClean="0">
+                            <a:latin typeface="Cambria Math" panose="02040503050406030204" pitchFamily="18" charset="0"/>
+                          </a:rPr>
+                          <m:t>𝑛</m:t>
+                        </m:r>
+                      </m:sub>
+                    </m:sSub>
+                  </m:oMath>
+                </a14:m>
+                <a:r>
+                  <a:rPr lang="en-US" dirty="0"/>
+                  <a:t>, with the element at </a:t>
+                </a:r>
+                <a14:m>
+                  <m:oMath xmlns:m="http://schemas.openxmlformats.org/officeDocument/2006/math">
+                    <m:sSub>
+                      <m:sSubPr>
+                        <m:ctrlPr>
+                          <a:rPr lang="en-US" b="0" i="1" smtClean="0">
+                            <a:latin typeface="Cambria Math" panose="02040503050406030204" pitchFamily="18" charset="0"/>
+                          </a:rPr>
+                        </m:ctrlPr>
+                      </m:sSubPr>
+                      <m:e>
+                        <m:r>
+                          <a:rPr lang="en-US" b="0" i="1" smtClean="0">
+                            <a:latin typeface="Cambria Math" panose="02040503050406030204" pitchFamily="18" charset="0"/>
+                          </a:rPr>
+                          <m:t>𝑖</m:t>
+                        </m:r>
+                      </m:e>
+                      <m:sub>
+                        <m:r>
+                          <a:rPr lang="en-US" b="0" i="1" smtClean="0">
+                            <a:latin typeface="Cambria Math" panose="02040503050406030204" pitchFamily="18" charset="0"/>
+                          </a:rPr>
+                          <m:t>1</m:t>
+                        </m:r>
+                      </m:sub>
+                    </m:sSub>
+                    <m:r>
+                      <a:rPr lang="en-US" b="0" i="1" smtClean="0">
+                        <a:latin typeface="Cambria Math" panose="02040503050406030204" pitchFamily="18" charset="0"/>
+                      </a:rPr>
+                      <m:t>,…,</m:t>
+                    </m:r>
+                    <m:sSub>
+                      <m:sSubPr>
+                        <m:ctrlPr>
+                          <a:rPr lang="en-US" b="0" i="1" smtClean="0">
+                            <a:latin typeface="Cambria Math" panose="02040503050406030204" pitchFamily="18" charset="0"/>
+                          </a:rPr>
+                        </m:ctrlPr>
+                      </m:sSubPr>
+                      <m:e>
+                        <m:r>
+                          <a:rPr lang="en-US" b="0" i="1" smtClean="0">
+                            <a:latin typeface="Cambria Math" panose="02040503050406030204" pitchFamily="18" charset="0"/>
+                          </a:rPr>
+                          <m:t>𝑖</m:t>
+                        </m:r>
+                      </m:e>
+                      <m:sub>
+                        <m:r>
+                          <a:rPr lang="en-US" b="0" i="1" smtClean="0">
+                            <a:latin typeface="Cambria Math" panose="02040503050406030204" pitchFamily="18" charset="0"/>
+                          </a:rPr>
+                          <m:t>𝑙</m:t>
+                        </m:r>
+                      </m:sub>
+                    </m:sSub>
+                    <m:r>
+                      <a:rPr lang="en-US" b="0" i="1" smtClean="0">
+                        <a:latin typeface="Cambria Math" panose="02040503050406030204" pitchFamily="18" charset="0"/>
+                      </a:rPr>
+                      <m:t>,</m:t>
+                    </m:r>
+                    <m:sSub>
+                      <m:sSubPr>
+                        <m:ctrlPr>
+                          <a:rPr lang="en-US" b="0" i="1" smtClean="0">
+                            <a:latin typeface="Cambria Math" panose="02040503050406030204" pitchFamily="18" charset="0"/>
+                          </a:rPr>
+                        </m:ctrlPr>
+                      </m:sSubPr>
+                      <m:e>
+                        <m:r>
+                          <a:rPr lang="en-US" b="0" i="1" smtClean="0">
+                            <a:latin typeface="Cambria Math" panose="02040503050406030204" pitchFamily="18" charset="0"/>
+                          </a:rPr>
+                          <m:t>𝑘</m:t>
+                        </m:r>
+                      </m:e>
+                      <m:sub>
+                        <m:r>
+                          <a:rPr lang="en-US" b="0" i="1" smtClean="0">
+                            <a:latin typeface="Cambria Math" panose="02040503050406030204" pitchFamily="18" charset="0"/>
+                          </a:rPr>
+                          <m:t>1</m:t>
+                        </m:r>
+                      </m:sub>
+                    </m:sSub>
+                    <m:r>
+                      <a:rPr lang="en-US" b="0" i="1" smtClean="0">
+                        <a:latin typeface="Cambria Math" panose="02040503050406030204" pitchFamily="18" charset="0"/>
+                      </a:rPr>
+                      <m:t>,…,</m:t>
+                    </m:r>
+                    <m:sSub>
+                      <m:sSubPr>
+                        <m:ctrlPr>
+                          <a:rPr lang="en-US" b="0" i="1" smtClean="0">
+                            <a:latin typeface="Cambria Math" panose="02040503050406030204" pitchFamily="18" charset="0"/>
+                          </a:rPr>
+                        </m:ctrlPr>
+                      </m:sSubPr>
+                      <m:e>
+                        <m:r>
+                          <a:rPr lang="en-US" b="0" i="1" smtClean="0">
+                            <a:latin typeface="Cambria Math" panose="02040503050406030204" pitchFamily="18" charset="0"/>
+                          </a:rPr>
+                          <m:t>𝑘</m:t>
+                        </m:r>
+                      </m:e>
+                      <m:sub>
+                        <m:r>
+                          <a:rPr lang="en-US" b="0" i="1" smtClean="0">
+                            <a:latin typeface="Cambria Math" panose="02040503050406030204" pitchFamily="18" charset="0"/>
+                          </a:rPr>
+                          <m:t>𝑛</m:t>
+                        </m:r>
+                      </m:sub>
+                    </m:sSub>
+                  </m:oMath>
+                </a14:m>
+                <a:r>
+                  <a:rPr lang="en-US" dirty="0"/>
+                  <a:t> given by</a:t>
+                </a:r>
+              </a:p>
+              <a:p>
+                <a:pPr marL="114300" indent="0">
+                  <a:buNone/>
+                </a:pPr>
+                <a14:m>
+                  <m:oMathPara xmlns:m="http://schemas.openxmlformats.org/officeDocument/2006/math">
+                    <m:oMathParaPr>
+                      <m:jc m:val="centerGroup"/>
+                    </m:oMathParaPr>
+                    <m:oMath xmlns:m="http://schemas.openxmlformats.org/officeDocument/2006/math">
+                      <m:nary>
+                        <m:naryPr>
+                          <m:chr m:val="∑"/>
+                          <m:ctrlPr>
+                            <a:rPr lang="en-US" b="0" i="1" smtClean="0">
+                              <a:latin typeface="Cambria Math" panose="02040503050406030204" pitchFamily="18" charset="0"/>
+                            </a:rPr>
+                          </m:ctrlPr>
+                        </m:naryPr>
+                        <m:sub>
+                          <m:sSub>
+                            <m:sSubPr>
+                              <m:ctrlPr>
+                                <a:rPr lang="en-US" b="0" i="1" smtClean="0">
+                                  <a:latin typeface="Cambria Math" panose="02040503050406030204" pitchFamily="18" charset="0"/>
+                                </a:rPr>
+                              </m:ctrlPr>
+                            </m:sSubPr>
+                            <m:e>
+                              <m:r>
+                                <a:rPr lang="en-US" b="0" i="1" smtClean="0">
+                                  <a:latin typeface="Cambria Math" panose="02040503050406030204" pitchFamily="18" charset="0"/>
+                                </a:rPr>
+                                <m:t>𝑗</m:t>
+                              </m:r>
+                            </m:e>
+                            <m:sub>
+                              <m:r>
+                                <a:rPr lang="en-US" b="0" i="1" smtClean="0">
+                                  <a:latin typeface="Cambria Math" panose="02040503050406030204" pitchFamily="18" charset="0"/>
+                                </a:rPr>
+                                <m:t>1</m:t>
+                              </m:r>
+                            </m:sub>
+                          </m:sSub>
+                          <m:r>
+                            <a:rPr lang="en-US" b="0" i="1" smtClean="0">
+                              <a:latin typeface="Cambria Math" panose="02040503050406030204" pitchFamily="18" charset="0"/>
+                            </a:rPr>
+                            <m:t>=1</m:t>
+                          </m:r>
+                        </m:sub>
+                        <m:sup>
+                          <m:r>
+                            <m:rPr>
+                              <m:sty m:val="p"/>
+                            </m:rPr>
+                            <a:rPr lang="en-US" b="0" i="1" smtClean="0">
+                              <a:latin typeface="Cambria Math" panose="02040503050406030204" pitchFamily="18" charset="0"/>
+                            </a:rPr>
+                            <m:t>dim</m:t>
+                          </m:r>
+                          <m:d>
+                            <m:dPr>
+                              <m:ctrlPr>
+                                <a:rPr lang="en-US" b="0" i="1" smtClean="0">
+                                  <a:latin typeface="Cambria Math" panose="02040503050406030204" pitchFamily="18" charset="0"/>
+                                </a:rPr>
+                              </m:ctrlPr>
+                            </m:dPr>
+                            <m:e>
+                              <m:sSub>
+                                <m:sSubPr>
+                                  <m:ctrlPr>
+                                    <a:rPr lang="en-US" b="0" i="1" smtClean="0">
+                                      <a:latin typeface="Cambria Math" panose="02040503050406030204" pitchFamily="18" charset="0"/>
+                                    </a:rPr>
+                                  </m:ctrlPr>
+                                </m:sSubPr>
+                                <m:e>
+                                  <m:r>
+                                    <a:rPr lang="en-US" b="0" i="1" smtClean="0">
+                                      <a:latin typeface="Cambria Math" panose="02040503050406030204" pitchFamily="18" charset="0"/>
+                                    </a:rPr>
+                                    <m:t>𝑉</m:t>
+                                  </m:r>
+                                </m:e>
+                                <m:sub>
+                                  <m:r>
+                                    <a:rPr lang="en-US" b="0" i="1" smtClean="0">
+                                      <a:latin typeface="Cambria Math" panose="02040503050406030204" pitchFamily="18" charset="0"/>
+                                    </a:rPr>
+                                    <m:t>1</m:t>
+                                  </m:r>
+                                </m:sub>
+                              </m:sSub>
+                            </m:e>
+                          </m:d>
+                        </m:sup>
+                        <m:e>
+                          <m:r>
+                            <a:rPr lang="en-US" b="0" i="1" smtClean="0">
+                              <a:latin typeface="Cambria Math" panose="02040503050406030204" pitchFamily="18" charset="0"/>
+                            </a:rPr>
+                            <m:t>…</m:t>
+                          </m:r>
+                        </m:e>
+                      </m:nary>
+                      <m:nary>
+                        <m:naryPr>
+                          <m:chr m:val="∑"/>
+                          <m:ctrlPr>
+                            <a:rPr lang="en-US" b="0" i="1" smtClean="0">
+                              <a:latin typeface="Cambria Math" panose="02040503050406030204" pitchFamily="18" charset="0"/>
+                            </a:rPr>
+                          </m:ctrlPr>
+                        </m:naryPr>
+                        <m:sub>
+                          <m:sSub>
+                            <m:sSubPr>
+                              <m:ctrlPr>
+                                <a:rPr lang="en-US" b="0" i="1" smtClean="0">
+                                  <a:latin typeface="Cambria Math" panose="02040503050406030204" pitchFamily="18" charset="0"/>
+                                </a:rPr>
+                              </m:ctrlPr>
+                            </m:sSubPr>
+                            <m:e>
+                              <m:r>
+                                <a:rPr lang="en-US" b="0" i="1" smtClean="0">
+                                  <a:latin typeface="Cambria Math" panose="02040503050406030204" pitchFamily="18" charset="0"/>
+                                </a:rPr>
+                                <m:t>𝑗</m:t>
+                              </m:r>
+                            </m:e>
+                            <m:sub>
+                              <m:r>
+                                <a:rPr lang="en-US" b="0" i="1" smtClean="0">
+                                  <a:latin typeface="Cambria Math" panose="02040503050406030204" pitchFamily="18" charset="0"/>
+                                </a:rPr>
+                                <m:t>𝑚</m:t>
+                              </m:r>
+                            </m:sub>
+                          </m:sSub>
+                          <m:r>
+                            <a:rPr lang="en-US" b="0" i="1" smtClean="0">
+                              <a:latin typeface="Cambria Math" panose="02040503050406030204" pitchFamily="18" charset="0"/>
+                            </a:rPr>
+                            <m:t>=1</m:t>
+                          </m:r>
+                        </m:sub>
+                        <m:sup>
+                          <m:r>
+                            <m:rPr>
+                              <m:sty m:val="p"/>
+                            </m:rPr>
+                            <a:rPr lang="en-US" b="0" i="1" smtClean="0">
+                              <a:latin typeface="Cambria Math" panose="02040503050406030204" pitchFamily="18" charset="0"/>
+                            </a:rPr>
+                            <m:t>dim</m:t>
+                          </m:r>
+                          <m:d>
+                            <m:dPr>
+                              <m:ctrlPr>
+                                <a:rPr lang="en-US" b="0" i="1" smtClean="0">
+                                  <a:latin typeface="Cambria Math" panose="02040503050406030204" pitchFamily="18" charset="0"/>
+                                </a:rPr>
+                              </m:ctrlPr>
+                            </m:dPr>
+                            <m:e>
+                              <m:sSub>
+                                <m:sSubPr>
+                                  <m:ctrlPr>
+                                    <a:rPr lang="en-US" b="0" i="1" smtClean="0">
+                                      <a:latin typeface="Cambria Math" panose="02040503050406030204" pitchFamily="18" charset="0"/>
+                                    </a:rPr>
+                                  </m:ctrlPr>
+                                </m:sSubPr>
+                                <m:e>
+                                  <m:r>
+                                    <a:rPr lang="en-US" b="0" i="1" smtClean="0">
+                                      <a:latin typeface="Cambria Math" panose="02040503050406030204" pitchFamily="18" charset="0"/>
+                                    </a:rPr>
+                                    <m:t>𝑉</m:t>
+                                  </m:r>
+                                </m:e>
+                                <m:sub>
+                                  <m:r>
+                                    <a:rPr lang="en-US" b="0" i="1" smtClean="0">
+                                      <a:latin typeface="Cambria Math" panose="02040503050406030204" pitchFamily="18" charset="0"/>
+                                    </a:rPr>
+                                    <m:t>𝑚</m:t>
+                                  </m:r>
+                                </m:sub>
+                              </m:sSub>
+                            </m:e>
+                          </m:d>
+                        </m:sup>
+                        <m:e>
+                          <m:sSub>
+                            <m:sSubPr>
+                              <m:ctrlPr>
+                                <a:rPr lang="en-US" i="1">
+                                  <a:latin typeface="Cambria Math" panose="02040503050406030204" pitchFamily="18" charset="0"/>
+                                </a:rPr>
+                              </m:ctrlPr>
+                            </m:sSubPr>
+                            <m:e>
+                              <m:r>
+                                <m:rPr>
+                                  <m:sty m:val="p"/>
+                                </m:rPr>
+                                <a:rPr lang="en-US" i="1">
+                                  <a:latin typeface="Cambria Math" panose="02040503050406030204" pitchFamily="18" charset="0"/>
+                                </a:rPr>
+                                <m:t>a</m:t>
+                              </m:r>
+                            </m:e>
+                            <m:sub>
+                              <m:sSub>
+                                <m:sSubPr>
+                                  <m:ctrlPr>
+                                    <a:rPr lang="en-US" i="1">
+                                      <a:latin typeface="Cambria Math" panose="02040503050406030204" pitchFamily="18" charset="0"/>
+                                    </a:rPr>
+                                  </m:ctrlPr>
+                                </m:sSubPr>
+                                <m:e>
+                                  <m:r>
+                                    <a:rPr lang="en-US" i="1">
+                                      <a:latin typeface="Cambria Math" panose="02040503050406030204" pitchFamily="18" charset="0"/>
+                                    </a:rPr>
+                                    <m:t>𝑖</m:t>
+                                  </m:r>
+                                </m:e>
+                                <m:sub>
+                                  <m:r>
+                                    <a:rPr lang="en-US" i="1">
+                                      <a:latin typeface="Cambria Math" panose="02040503050406030204" pitchFamily="18" charset="0"/>
+                                    </a:rPr>
+                                    <m:t>1</m:t>
+                                  </m:r>
+                                </m:sub>
+                              </m:sSub>
+                              <m:r>
+                                <a:rPr lang="en-US" i="1">
+                                  <a:latin typeface="Cambria Math" panose="02040503050406030204" pitchFamily="18" charset="0"/>
+                                </a:rPr>
+                                <m:t>…</m:t>
+                              </m:r>
+                              <m:sSub>
+                                <m:sSubPr>
+                                  <m:ctrlPr>
+                                    <a:rPr lang="en-US" i="1">
+                                      <a:latin typeface="Cambria Math" panose="02040503050406030204" pitchFamily="18" charset="0"/>
+                                    </a:rPr>
+                                  </m:ctrlPr>
+                                </m:sSubPr>
+                                <m:e>
+                                  <m:r>
+                                    <a:rPr lang="en-US" i="1">
+                                      <a:latin typeface="Cambria Math" panose="02040503050406030204" pitchFamily="18" charset="0"/>
+                                    </a:rPr>
+                                    <m:t>𝑖</m:t>
+                                  </m:r>
+                                </m:e>
+                                <m:sub>
+                                  <m:r>
+                                    <a:rPr lang="en-US" i="1">
+                                      <a:latin typeface="Cambria Math" panose="02040503050406030204" pitchFamily="18" charset="0"/>
+                                    </a:rPr>
+                                    <m:t>𝑙</m:t>
+                                  </m:r>
+                                </m:sub>
+                              </m:sSub>
+                              <m:sSub>
+                                <m:sSubPr>
+                                  <m:ctrlPr>
+                                    <a:rPr lang="en-US" i="1">
+                                      <a:latin typeface="Cambria Math" panose="02040503050406030204" pitchFamily="18" charset="0"/>
+                                    </a:rPr>
+                                  </m:ctrlPr>
+                                </m:sSubPr>
+                                <m:e>
+                                  <m:r>
+                                    <a:rPr lang="en-US" i="1">
+                                      <a:latin typeface="Cambria Math" panose="02040503050406030204" pitchFamily="18" charset="0"/>
+                                    </a:rPr>
+                                    <m:t>𝑗</m:t>
+                                  </m:r>
+                                </m:e>
+                                <m:sub>
+                                  <m:r>
+                                    <a:rPr lang="en-US" i="1">
+                                      <a:latin typeface="Cambria Math" panose="02040503050406030204" pitchFamily="18" charset="0"/>
+                                    </a:rPr>
+                                    <m:t>1</m:t>
+                                  </m:r>
+                                </m:sub>
+                              </m:sSub>
+                              <m:r>
+                                <a:rPr lang="en-US" i="1">
+                                  <a:latin typeface="Cambria Math" panose="02040503050406030204" pitchFamily="18" charset="0"/>
+                                </a:rPr>
+                                <m:t>…</m:t>
+                              </m:r>
+                              <m:sSub>
+                                <m:sSubPr>
+                                  <m:ctrlPr>
+                                    <a:rPr lang="en-US" i="1">
+                                      <a:latin typeface="Cambria Math" panose="02040503050406030204" pitchFamily="18" charset="0"/>
+                                    </a:rPr>
+                                  </m:ctrlPr>
+                                </m:sSubPr>
+                                <m:e>
+                                  <m:r>
+                                    <a:rPr lang="en-US" i="1">
+                                      <a:latin typeface="Cambria Math" panose="02040503050406030204" pitchFamily="18" charset="0"/>
+                                    </a:rPr>
+                                    <m:t>𝑗</m:t>
+                                  </m:r>
+                                </m:e>
+                                <m:sub>
+                                  <m:r>
+                                    <a:rPr lang="en-US" i="1">
+                                      <a:latin typeface="Cambria Math" panose="02040503050406030204" pitchFamily="18" charset="0"/>
+                                    </a:rPr>
+                                    <m:t>𝑚</m:t>
+                                  </m:r>
+                                </m:sub>
+                              </m:sSub>
+                            </m:sub>
+                          </m:sSub>
+                          <m:sSub>
+                            <m:sSubPr>
+                              <m:ctrlPr>
+                                <a:rPr lang="en-US" i="1">
+                                  <a:latin typeface="Cambria Math" panose="02040503050406030204" pitchFamily="18" charset="0"/>
+                                </a:rPr>
+                              </m:ctrlPr>
+                            </m:sSubPr>
+                            <m:e>
+                              <m:r>
+                                <m:rPr>
+                                  <m:sty m:val="p"/>
+                                </m:rPr>
+                                <a:rPr lang="en-US" i="1">
+                                  <a:latin typeface="Cambria Math" panose="02040503050406030204" pitchFamily="18" charset="0"/>
+                                </a:rPr>
+                                <m:t>b</m:t>
+                              </m:r>
+                            </m:e>
+                            <m:sub>
+                              <m:sSub>
+                                <m:sSubPr>
+                                  <m:ctrlPr>
+                                    <a:rPr lang="en-US" i="1">
+                                      <a:latin typeface="Cambria Math" panose="02040503050406030204" pitchFamily="18" charset="0"/>
+                                    </a:rPr>
+                                  </m:ctrlPr>
+                                </m:sSubPr>
+                                <m:e>
+                                  <m:r>
+                                    <a:rPr lang="en-US" i="1">
+                                      <a:latin typeface="Cambria Math" panose="02040503050406030204" pitchFamily="18" charset="0"/>
+                                    </a:rPr>
+                                    <m:t>𝑗</m:t>
+                                  </m:r>
+                                </m:e>
+                                <m:sub>
+                                  <m:r>
+                                    <a:rPr lang="en-US" i="1">
+                                      <a:latin typeface="Cambria Math" panose="02040503050406030204" pitchFamily="18" charset="0"/>
+                                    </a:rPr>
+                                    <m:t>1</m:t>
+                                  </m:r>
+                                </m:sub>
+                              </m:sSub>
+                              <m:r>
+                                <a:rPr lang="en-US" i="1">
+                                  <a:latin typeface="Cambria Math" panose="02040503050406030204" pitchFamily="18" charset="0"/>
+                                </a:rPr>
+                                <m:t>…</m:t>
+                              </m:r>
+                              <m:sSub>
+                                <m:sSubPr>
+                                  <m:ctrlPr>
+                                    <a:rPr lang="en-US" i="1">
+                                      <a:latin typeface="Cambria Math" panose="02040503050406030204" pitchFamily="18" charset="0"/>
+                                    </a:rPr>
+                                  </m:ctrlPr>
+                                </m:sSubPr>
+                                <m:e>
+                                  <m:r>
+                                    <a:rPr lang="en-US" i="1">
+                                      <a:latin typeface="Cambria Math" panose="02040503050406030204" pitchFamily="18" charset="0"/>
+                                    </a:rPr>
+                                    <m:t>𝑗</m:t>
+                                  </m:r>
+                                </m:e>
+                                <m:sub>
+                                  <m:r>
+                                    <a:rPr lang="en-US" i="1">
+                                      <a:latin typeface="Cambria Math" panose="02040503050406030204" pitchFamily="18" charset="0"/>
+                                    </a:rPr>
+                                    <m:t>𝑚</m:t>
+                                  </m:r>
+                                </m:sub>
+                              </m:sSub>
+                              <m:sSub>
+                                <m:sSubPr>
+                                  <m:ctrlPr>
+                                    <a:rPr lang="en-US" i="1">
+                                      <a:latin typeface="Cambria Math" panose="02040503050406030204" pitchFamily="18" charset="0"/>
+                                    </a:rPr>
+                                  </m:ctrlPr>
+                                </m:sSubPr>
+                                <m:e>
+                                  <m:r>
+                                    <a:rPr lang="en-US" i="1">
+                                      <a:latin typeface="Cambria Math" panose="02040503050406030204" pitchFamily="18" charset="0"/>
+                                    </a:rPr>
+                                    <m:t>𝑘</m:t>
+                                  </m:r>
+                                </m:e>
+                                <m:sub>
+                                  <m:r>
+                                    <a:rPr lang="en-US" i="1">
+                                      <a:latin typeface="Cambria Math" panose="02040503050406030204" pitchFamily="18" charset="0"/>
+                                    </a:rPr>
+                                    <m:t>1</m:t>
+                                  </m:r>
+                                </m:sub>
+                              </m:sSub>
+                              <m:r>
+                                <a:rPr lang="en-US" i="1">
+                                  <a:latin typeface="Cambria Math" panose="02040503050406030204" pitchFamily="18" charset="0"/>
+                                </a:rPr>
+                                <m:t>…</m:t>
+                              </m:r>
+                              <m:sSub>
+                                <m:sSubPr>
+                                  <m:ctrlPr>
+                                    <a:rPr lang="en-US" i="1">
+                                      <a:latin typeface="Cambria Math" panose="02040503050406030204" pitchFamily="18" charset="0"/>
+                                    </a:rPr>
+                                  </m:ctrlPr>
+                                </m:sSubPr>
+                                <m:e>
+                                  <m:r>
+                                    <a:rPr lang="en-US" i="1">
+                                      <a:latin typeface="Cambria Math" panose="02040503050406030204" pitchFamily="18" charset="0"/>
+                                    </a:rPr>
+                                    <m:t>𝑘</m:t>
+                                  </m:r>
+                                </m:e>
+                                <m:sub>
+                                  <m:r>
+                                    <a:rPr lang="en-US" i="1">
+                                      <a:latin typeface="Cambria Math" panose="02040503050406030204" pitchFamily="18" charset="0"/>
+                                    </a:rPr>
+                                    <m:t>𝑛</m:t>
+                                  </m:r>
+                                </m:sub>
+                              </m:sSub>
+                            </m:sub>
+                          </m:sSub>
+                        </m:e>
+                      </m:nary>
+                    </m:oMath>
+                  </m:oMathPara>
+                </a14:m>
+                <a:endParaRPr lang="en-US" dirty="0"/>
+              </a:p>
+            </p:txBody>
+          </p:sp>
+        </mc:Choice>
+        <mc:Fallback xmlns="">
+          <p:sp>
+            <p:nvSpPr>
+              <p:cNvPr id="3" name="Text Placeholder 2">
+                <a:extLst>
+                  <a:ext uri="{FF2B5EF4-FFF2-40B4-BE49-F238E27FC236}">
+                    <a16:creationId xmlns:a16="http://schemas.microsoft.com/office/drawing/2014/main" id="{9DEBC122-3B42-B95C-3B52-72257A3CD728}"/>
+                  </a:ext>
+                </a:extLst>
+              </p:cNvPr>
+              <p:cNvSpPr>
+                <a:spLocks noGrp="1" noRot="1" noChangeAspect="1" noMove="1" noResize="1" noEditPoints="1" noAdjustHandles="1" noChangeArrowheads="1" noChangeShapeType="1" noTextEdit="1"/>
+              </p:cNvSpPr>
+              <p:nvPr>
+                <p:ph type="body" idx="1"/>
+              </p:nvPr>
+            </p:nvSpPr>
+            <p:spPr>
+              <a:xfrm>
+                <a:off x="311700" y="1152475"/>
+                <a:ext cx="8520600" cy="3546000"/>
+              </a:xfrm>
+              <a:blipFill>
+                <a:blip r:embed="rId2"/>
+                <a:stretch>
+                  <a:fillRect r="-572"/>
+                </a:stretch>
+              </a:blipFill>
+            </p:spPr>
+            <p:txBody>
+              <a:bodyPr/>
+              <a:lstStyle/>
+              <a:p>
+                <a:r>
+                  <a:rPr lang="en-US">
+                    <a:noFill/>
+                  </a:rPr>
+                  <a:t> </a:t>
+                </a:r>
+              </a:p>
+            </p:txBody>
+          </p:sp>
+        </mc:Fallback>
+      </mc:AlternateContent>
+      <p:sp>
+        <p:nvSpPr>
+          <p:cNvPr id="4" name="Slide Number Placeholder 3">
+            <a:extLst>
+              <a:ext uri="{FF2B5EF4-FFF2-40B4-BE49-F238E27FC236}">
+                <a16:creationId xmlns:a16="http://schemas.microsoft.com/office/drawing/2014/main" id="{4B9C8D8F-A9EA-CCB9-B8B4-4A6D3D7D4B59}"/>
+              </a:ext>
+            </a:extLst>
+          </p:cNvPr>
+          <p:cNvSpPr>
+            <a:spLocks noGrp="1"/>
+          </p:cNvSpPr>
+          <p:nvPr>
+            <p:ph type="sldNum" idx="12"/>
+          </p:nvPr>
+        </p:nvSpPr>
+        <p:spPr/>
+        <p:txBody>
+          <a:bodyPr/>
+          <a:lstStyle/>
+          <a:p>
+            <a:pPr marL="0" lvl="0" indent="0" algn="r" rtl="0">
+              <a:spcBef>
+                <a:spcPts val="0"/>
+              </a:spcBef>
+              <a:spcAft>
+                <a:spcPts val="0"/>
+              </a:spcAft>
+              <a:buNone/>
+            </a:pPr>
+            <a:fld id="{00000000-1234-1234-1234-123412341234}" type="slidenum">
+              <a:rPr lang="en" smtClean="0"/>
+              <a:t>33</a:t>
+            </a:fld>
+            <a:endParaRPr lang="en"/>
+          </a:p>
+        </p:txBody>
+      </p:sp>
+    </p:spTree>
+    <p:extLst>
+      <p:ext uri="{BB962C8B-B14F-4D97-AF65-F5344CB8AC3E}">
+        <p14:creationId xmlns:p14="http://schemas.microsoft.com/office/powerpoint/2010/main" val="792753068"/>
+      </p:ext>
+    </p:extLst>
+  </p:cSld>
+  <p:clrMapOvr>
+    <a:masterClrMapping/>
+  </p:clrMapOvr>
+</p:sld>
+</file>
+
+<file path=ppt/slides/slide34.xml><?xml version="1.0" encoding="utf-8"?>
+<p:sld xmlns:a="http://schemas.openxmlformats.org/drawingml/2006/main" xmlns:r="http://schemas.openxmlformats.org/officeDocument/2006/relationships" xmlns:p="http://schemas.openxmlformats.org/presentationml/2006/main">
+  <p:cSld>
+    <p:spTree>
+      <p:nvGrpSpPr>
+        <p:cNvPr id="1" name=""/>
+        <p:cNvGrpSpPr/>
+        <p:nvPr/>
+      </p:nvGrpSpPr>
+      <p:grpSpPr>
+        <a:xfrm>
+          <a:off x="0" y="0"/>
+          <a:ext cx="0" cy="0"/>
+          <a:chOff x="0" y="0"/>
+          <a:chExt cx="0" cy="0"/>
+        </a:xfrm>
+      </p:grpSpPr>
+      <p:sp>
+        <p:nvSpPr>
+          <p:cNvPr id="2" name="Title 1">
+            <a:extLst>
+              <a:ext uri="{FF2B5EF4-FFF2-40B4-BE49-F238E27FC236}">
+                <a16:creationId xmlns:a16="http://schemas.microsoft.com/office/drawing/2014/main" id="{DC37A994-06E4-06DC-435C-13308FD01A43}"/>
+              </a:ext>
+            </a:extLst>
+          </p:cNvPr>
+          <p:cNvSpPr>
+            <a:spLocks noGrp="1"/>
+          </p:cNvSpPr>
+          <p:nvPr>
+            <p:ph type="title"/>
+          </p:nvPr>
+        </p:nvSpPr>
+        <p:spPr/>
+        <p:txBody>
+          <a:bodyPr>
+            <a:normAutofit fontScale="90000"/>
+          </a:bodyPr>
+          <a:lstStyle/>
+          <a:p>
+            <a:r>
+              <a:rPr lang="en-US" dirty="0"/>
+              <a:t>Combinatory Categorial Grammar (CCG)</a:t>
+            </a:r>
+          </a:p>
+        </p:txBody>
+      </p:sp>
+      <p:sp>
+        <p:nvSpPr>
+          <p:cNvPr id="3" name="Text Placeholder 2">
+            <a:extLst>
+              <a:ext uri="{FF2B5EF4-FFF2-40B4-BE49-F238E27FC236}">
+                <a16:creationId xmlns:a16="http://schemas.microsoft.com/office/drawing/2014/main" id="{7FBC7003-8674-E66E-61AD-8D33F08CF6FE}"/>
+              </a:ext>
+            </a:extLst>
+          </p:cNvPr>
+          <p:cNvSpPr>
+            <a:spLocks noGrp="1"/>
+          </p:cNvSpPr>
+          <p:nvPr>
+            <p:ph type="body" idx="1"/>
+          </p:nvPr>
+        </p:nvSpPr>
+        <p:spPr/>
+        <p:txBody>
+          <a:bodyPr/>
+          <a:lstStyle/>
+          <a:p>
+            <a:r>
+              <a:rPr lang="en-US" dirty="0"/>
+              <a:t>Mildly Context Sensitive formalism</a:t>
+            </a:r>
+          </a:p>
+          <a:p>
+            <a:r>
+              <a:rPr lang="en-US" dirty="0"/>
+              <a:t>Thought to be capable of expressing all human syntax</a:t>
+            </a:r>
+          </a:p>
+          <a:p>
+            <a:r>
+              <a:rPr lang="en-US" dirty="0"/>
+              <a:t>Steedman (2001), Steedman and Baldridge (2011)</a:t>
+            </a:r>
+          </a:p>
+          <a:p>
+            <a:endParaRPr lang="en-US" dirty="0"/>
+          </a:p>
+        </p:txBody>
+      </p:sp>
+      <p:sp>
+        <p:nvSpPr>
+          <p:cNvPr id="4" name="Slide Number Placeholder 3">
+            <a:extLst>
+              <a:ext uri="{FF2B5EF4-FFF2-40B4-BE49-F238E27FC236}">
+                <a16:creationId xmlns:a16="http://schemas.microsoft.com/office/drawing/2014/main" id="{27DDFFEA-DF14-9067-345E-A05FF11DDA67}"/>
+              </a:ext>
+            </a:extLst>
+          </p:cNvPr>
+          <p:cNvSpPr>
+            <a:spLocks noGrp="1"/>
+          </p:cNvSpPr>
+          <p:nvPr>
+            <p:ph type="sldNum" idx="12"/>
+          </p:nvPr>
+        </p:nvSpPr>
+        <p:spPr/>
+        <p:txBody>
+          <a:bodyPr/>
+          <a:lstStyle/>
+          <a:p>
+            <a:pPr marL="0" lvl="0" indent="0" algn="r" rtl="0">
+              <a:spcBef>
+                <a:spcPts val="0"/>
+              </a:spcBef>
+              <a:spcAft>
+                <a:spcPts val="0"/>
+              </a:spcAft>
+              <a:buNone/>
+            </a:pPr>
+            <a:fld id="{00000000-1234-1234-1234-123412341234}" type="slidenum">
+              <a:rPr lang="en" smtClean="0"/>
+              <a:t>34</a:t>
+            </a:fld>
+            <a:endParaRPr lang="en"/>
+          </a:p>
+        </p:txBody>
+      </p:sp>
+      <p:pic>
+        <p:nvPicPr>
+          <p:cNvPr id="10" name="Picture 9">
+            <a:extLst>
+              <a:ext uri="{FF2B5EF4-FFF2-40B4-BE49-F238E27FC236}">
+                <a16:creationId xmlns:a16="http://schemas.microsoft.com/office/drawing/2014/main" id="{9032A1F0-F1FC-6E50-CFDD-0D2E4DF01DAA}"/>
+              </a:ext>
+            </a:extLst>
+          </p:cNvPr>
+          <p:cNvPicPr>
+            <a:picLocks noChangeAspect="1"/>
+          </p:cNvPicPr>
+          <p:nvPr/>
+        </p:nvPicPr>
+        <p:blipFill>
+          <a:blip r:embed="rId2"/>
+          <a:stretch>
+            <a:fillRect/>
+          </a:stretch>
+        </p:blipFill>
+        <p:spPr>
+          <a:xfrm>
+            <a:off x="2492424" y="2571750"/>
+            <a:ext cx="4159152" cy="2317946"/>
+          </a:xfrm>
+          <a:prstGeom prst="rect">
+            <a:avLst/>
+          </a:prstGeom>
+        </p:spPr>
+      </p:pic>
+    </p:spTree>
+    <p:extLst>
+      <p:ext uri="{BB962C8B-B14F-4D97-AF65-F5344CB8AC3E}">
+        <p14:creationId xmlns:p14="http://schemas.microsoft.com/office/powerpoint/2010/main" val="3194706214"/>
+      </p:ext>
+    </p:extLst>
+  </p:cSld>
+  <p:clrMapOvr>
+    <a:masterClrMapping/>
+  </p:clrMapOvr>
+</p:sld>
+</file>
+
+<file path=ppt/slides/slide35.xml><?xml version="1.0" encoding="utf-8"?>
+<p:sld xmlns:a="http://schemas.openxmlformats.org/drawingml/2006/main" xmlns:r="http://schemas.openxmlformats.org/officeDocument/2006/relationships" xmlns:p="http://schemas.openxmlformats.org/presentationml/2006/main">
+  <p:cSld>
+    <p:spTree>
+      <p:nvGrpSpPr>
+        <p:cNvPr id="1" name=""/>
+        <p:cNvGrpSpPr/>
+        <p:nvPr/>
+      </p:nvGrpSpPr>
+      <p:grpSpPr>
+        <a:xfrm>
+          <a:off x="0" y="0"/>
+          <a:ext cx="0" cy="0"/>
+          <a:chOff x="0" y="0"/>
+          <a:chExt cx="0" cy="0"/>
+        </a:xfrm>
+      </p:grpSpPr>
+      <p:sp>
+        <p:nvSpPr>
+          <p:cNvPr id="2" name="Title 1">
+            <a:extLst>
+              <a:ext uri="{FF2B5EF4-FFF2-40B4-BE49-F238E27FC236}">
+                <a16:creationId xmlns:a16="http://schemas.microsoft.com/office/drawing/2014/main" id="{6F9F43C8-1B92-BB26-964B-B590F95C44D5}"/>
+              </a:ext>
+            </a:extLst>
+          </p:cNvPr>
+          <p:cNvSpPr>
+            <a:spLocks noGrp="1"/>
+          </p:cNvSpPr>
+          <p:nvPr>
+            <p:ph type="title"/>
+          </p:nvPr>
+        </p:nvSpPr>
+        <p:spPr/>
+        <p:txBody>
+          <a:bodyPr>
+            <a:normAutofit fontScale="90000"/>
+          </a:bodyPr>
+          <a:lstStyle/>
+          <a:p>
+            <a:r>
+              <a:rPr lang="en-US" dirty="0"/>
+              <a:t>CCG and Tensor Semantics</a:t>
+            </a:r>
+          </a:p>
+        </p:txBody>
+      </p:sp>
+      <p:sp>
+        <p:nvSpPr>
+          <p:cNvPr id="3" name="Text Placeholder 2">
+            <a:extLst>
+              <a:ext uri="{FF2B5EF4-FFF2-40B4-BE49-F238E27FC236}">
+                <a16:creationId xmlns:a16="http://schemas.microsoft.com/office/drawing/2014/main" id="{F12277A3-B632-7CB8-2D51-69A4EB7D4308}"/>
+              </a:ext>
+            </a:extLst>
+          </p:cNvPr>
+          <p:cNvSpPr>
+            <a:spLocks noGrp="1"/>
+          </p:cNvSpPr>
+          <p:nvPr>
+            <p:ph type="body" idx="1"/>
+          </p:nvPr>
+        </p:nvSpPr>
+        <p:spPr/>
+        <p:txBody>
+          <a:bodyPr/>
+          <a:lstStyle/>
+          <a:p>
+            <a:r>
+              <a:rPr lang="en-US" dirty="0"/>
+              <a:t>Approach due to Maillard et al. (2014), Coecke et al. (2010), </a:t>
+            </a:r>
+            <a:r>
+              <a:rPr lang="en-US" dirty="0" err="1"/>
+              <a:t>a.o.</a:t>
+            </a:r>
+            <a:endParaRPr lang="en-US" dirty="0"/>
+          </a:p>
+        </p:txBody>
+      </p:sp>
+      <p:sp>
+        <p:nvSpPr>
+          <p:cNvPr id="4" name="Slide Number Placeholder 3">
+            <a:extLst>
+              <a:ext uri="{FF2B5EF4-FFF2-40B4-BE49-F238E27FC236}">
+                <a16:creationId xmlns:a16="http://schemas.microsoft.com/office/drawing/2014/main" id="{AC769E58-69AD-2C0B-30E3-63C51FEA7262}"/>
+              </a:ext>
+            </a:extLst>
+          </p:cNvPr>
+          <p:cNvSpPr>
+            <a:spLocks noGrp="1"/>
+          </p:cNvSpPr>
+          <p:nvPr>
+            <p:ph type="sldNum" idx="12"/>
+          </p:nvPr>
+        </p:nvSpPr>
+        <p:spPr/>
+        <p:txBody>
+          <a:bodyPr/>
+          <a:lstStyle/>
+          <a:p>
+            <a:pPr marL="0" lvl="0" indent="0" algn="r" rtl="0">
+              <a:spcBef>
+                <a:spcPts val="0"/>
+              </a:spcBef>
+              <a:spcAft>
+                <a:spcPts val="0"/>
+              </a:spcAft>
+              <a:buNone/>
+            </a:pPr>
+            <a:fld id="{00000000-1234-1234-1234-123412341234}" type="slidenum">
+              <a:rPr lang="en" smtClean="0"/>
+              <a:t>35</a:t>
+            </a:fld>
+            <a:endParaRPr lang="en"/>
+          </a:p>
+        </p:txBody>
+      </p:sp>
+      <p:pic>
+        <p:nvPicPr>
+          <p:cNvPr id="6" name="Picture 5">
+            <a:extLst>
+              <a:ext uri="{FF2B5EF4-FFF2-40B4-BE49-F238E27FC236}">
+                <a16:creationId xmlns:a16="http://schemas.microsoft.com/office/drawing/2014/main" id="{02A31BA5-4621-CF28-68CB-C03FCAF394A0}"/>
+              </a:ext>
+            </a:extLst>
+          </p:cNvPr>
+          <p:cNvPicPr>
+            <a:picLocks noChangeAspect="1"/>
+          </p:cNvPicPr>
+          <p:nvPr/>
+        </p:nvPicPr>
+        <p:blipFill>
+          <a:blip r:embed="rId2"/>
+          <a:stretch>
+            <a:fillRect/>
+          </a:stretch>
+        </p:blipFill>
+        <p:spPr>
+          <a:xfrm>
+            <a:off x="2641635" y="1841453"/>
+            <a:ext cx="3860729" cy="3081357"/>
+          </a:xfrm>
+          <a:prstGeom prst="rect">
+            <a:avLst/>
+          </a:prstGeom>
+        </p:spPr>
+      </p:pic>
+    </p:spTree>
+    <p:extLst>
+      <p:ext uri="{BB962C8B-B14F-4D97-AF65-F5344CB8AC3E}">
+        <p14:creationId xmlns:p14="http://schemas.microsoft.com/office/powerpoint/2010/main" val="246169693"/>
+      </p:ext>
+    </p:extLst>
+  </p:cSld>
+  <p:clrMapOvr>
+    <a:masterClrMapping/>
+  </p:clrMapOvr>
+</p:sld>
+</file>
+
+<file path=ppt/slides/slide36.xml><?xml version="1.0" encoding="utf-8"?>
+<p:sld xmlns:a="http://schemas.openxmlformats.org/drawingml/2006/main" xmlns:r="http://schemas.openxmlformats.org/officeDocument/2006/relationships" xmlns:p="http://schemas.openxmlformats.org/presentationml/2006/main">
+  <p:cSld>
+    <p:spTree>
+      <p:nvGrpSpPr>
+        <p:cNvPr id="1" name=""/>
+        <p:cNvGrpSpPr/>
+        <p:nvPr/>
+      </p:nvGrpSpPr>
+      <p:grpSpPr>
+        <a:xfrm>
+          <a:off x="0" y="0"/>
+          <a:ext cx="0" cy="0"/>
+          <a:chOff x="0" y="0"/>
+          <a:chExt cx="0" cy="0"/>
+        </a:xfrm>
+      </p:grpSpPr>
+      <p:sp>
+        <p:nvSpPr>
+          <p:cNvPr id="2" name="Title 1">
+            <a:extLst>
+              <a:ext uri="{FF2B5EF4-FFF2-40B4-BE49-F238E27FC236}">
+                <a16:creationId xmlns:a16="http://schemas.microsoft.com/office/drawing/2014/main" id="{095DD689-FA33-3206-1562-C44D331A1F97}"/>
+              </a:ext>
+            </a:extLst>
+          </p:cNvPr>
+          <p:cNvSpPr>
+            <a:spLocks noGrp="1"/>
+          </p:cNvSpPr>
+          <p:nvPr>
+            <p:ph type="title"/>
+          </p:nvPr>
+        </p:nvSpPr>
+        <p:spPr/>
+        <p:txBody>
+          <a:bodyPr>
+            <a:normAutofit fontScale="90000"/>
+          </a:bodyPr>
+          <a:lstStyle/>
+          <a:p>
+            <a:r>
+              <a:rPr lang="en-US" dirty="0" err="1"/>
+              <a:t>beim</a:t>
+            </a:r>
+            <a:r>
+              <a:rPr lang="en-US" dirty="0"/>
+              <a:t> Graben and Gerth (2012)</a:t>
+            </a:r>
+          </a:p>
+        </p:txBody>
+      </p:sp>
+      <mc:AlternateContent xmlns:mc="http://schemas.openxmlformats.org/markup-compatibility/2006" xmlns:a14="http://schemas.microsoft.com/office/drawing/2010/main">
+        <mc:Choice Requires="a14">
+          <p:sp>
+            <p:nvSpPr>
+              <p:cNvPr id="3" name="Text Placeholder 2">
+                <a:extLst>
+                  <a:ext uri="{FF2B5EF4-FFF2-40B4-BE49-F238E27FC236}">
+                    <a16:creationId xmlns:a16="http://schemas.microsoft.com/office/drawing/2014/main" id="{491138A7-B4FB-A950-E2E0-AFDA55C8D88D}"/>
+                  </a:ext>
+                </a:extLst>
+              </p:cNvPr>
+              <p:cNvSpPr>
+                <a:spLocks noGrp="1"/>
+              </p:cNvSpPr>
+              <p:nvPr>
+                <p:ph type="body" idx="1"/>
+              </p:nvPr>
+            </p:nvSpPr>
+            <p:spPr>
+              <a:xfrm>
+                <a:off x="311700" y="1152473"/>
+                <a:ext cx="8520600" cy="3546001"/>
+              </a:xfrm>
+            </p:spPr>
+            <p:txBody>
+              <a:bodyPr>
+                <a:normAutofit/>
+              </a:bodyPr>
+              <a:lstStyle/>
+              <a:p>
+                <a14:m>
+                  <m:oMath xmlns:m="http://schemas.openxmlformats.org/officeDocument/2006/math">
+                    <m:r>
+                      <a:rPr lang="en-US" b="0" i="1" smtClean="0">
+                        <a:latin typeface="Cambria Math" panose="02040503050406030204" pitchFamily="18" charset="0"/>
+                        <a:ea typeface="Cambria Math" panose="02040503050406030204" pitchFamily="18" charset="0"/>
+                      </a:rPr>
+                      <m:t>ℱ</m:t>
+                    </m:r>
+                  </m:oMath>
+                </a14:m>
+                <a:r>
+                  <a:rPr lang="en-US" i="0" dirty="0">
+                    <a:latin typeface="+mn-lt"/>
+                  </a:rPr>
+                  <a:t> is a vector space</a:t>
+                </a:r>
+              </a:p>
+              <a:p>
+                <a14:m>
+                  <m:oMath xmlns:m="http://schemas.openxmlformats.org/officeDocument/2006/math">
+                    <m:sSub>
+                      <m:sSubPr>
+                        <m:ctrlPr>
+                          <a:rPr lang="en-US" b="0" i="1" smtClean="0">
+                            <a:latin typeface="Cambria Math" panose="02040503050406030204" pitchFamily="18" charset="0"/>
+                          </a:rPr>
+                        </m:ctrlPr>
+                      </m:sSubPr>
+                      <m:e>
+                        <m:r>
+                          <a:rPr lang="en-US" b="0" i="1" smtClean="0">
+                            <a:latin typeface="Cambria Math" panose="02040503050406030204" pitchFamily="18" charset="0"/>
+                          </a:rPr>
+                          <m:t>𝑇</m:t>
+                        </m:r>
+                      </m:e>
+                      <m:sub>
+                        <m:r>
+                          <a:rPr lang="en-US" b="0" i="1" smtClean="0">
+                            <a:latin typeface="Cambria Math" panose="02040503050406030204" pitchFamily="18" charset="0"/>
+                          </a:rPr>
+                          <m:t>𝐴</m:t>
+                        </m:r>
+                      </m:sub>
+                    </m:sSub>
+                  </m:oMath>
+                </a14:m>
+                <a:r>
+                  <a:rPr lang="en-US" i="0" dirty="0">
+                    <a:latin typeface="+mn-lt"/>
+                  </a:rPr>
+                  <a:t> is the set of trees over an MG</a:t>
+                </a:r>
+              </a:p>
+              <a:p>
+                <a14:m>
+                  <m:oMath xmlns:m="http://schemas.openxmlformats.org/officeDocument/2006/math">
+                    <m:r>
+                      <m:rPr>
+                        <m:nor/>
+                      </m:rPr>
+                      <a:rPr lang="en-US" b="1" i="0" smtClean="0">
+                        <a:latin typeface="Cambria Math" panose="02040503050406030204" pitchFamily="18" charset="0"/>
+                      </a:rPr>
+                      <m:t>merge</m:t>
+                    </m:r>
+                    <m:r>
+                      <a:rPr lang="en-US" b="0" i="1" smtClean="0">
+                        <a:latin typeface="Cambria Math" panose="02040503050406030204" pitchFamily="18" charset="0"/>
+                      </a:rPr>
+                      <m:t>: </m:t>
+                    </m:r>
+                    <m:r>
+                      <a:rPr lang="en-US" b="0" i="1" smtClean="0">
+                        <a:latin typeface="Cambria Math" panose="02040503050406030204" pitchFamily="18" charset="0"/>
+                      </a:rPr>
+                      <m:t>ℱ</m:t>
+                    </m:r>
+                    <m:r>
+                      <a:rPr lang="en-US" b="0" i="1" smtClean="0">
+                        <a:latin typeface="Cambria Math" panose="02040503050406030204" pitchFamily="18" charset="0"/>
+                      </a:rPr>
+                      <m:t>×</m:t>
+                    </m:r>
+                    <m:r>
+                      <a:rPr lang="en-US" b="0" i="1" smtClean="0">
+                        <a:latin typeface="Cambria Math" panose="02040503050406030204" pitchFamily="18" charset="0"/>
+                      </a:rPr>
+                      <m:t>ℱ</m:t>
+                    </m:r>
+                    <m:r>
+                      <a:rPr lang="en-US" b="0" i="1" smtClean="0">
+                        <a:latin typeface="Cambria Math" panose="02040503050406030204" pitchFamily="18" charset="0"/>
+                      </a:rPr>
+                      <m:t>⇀</m:t>
+                    </m:r>
+                    <m:r>
+                      <a:rPr lang="en-US" b="0" i="1" smtClean="0">
+                        <a:latin typeface="Cambria Math" panose="02040503050406030204" pitchFamily="18" charset="0"/>
+                        <a:ea typeface="Cambria Math" panose="02040503050406030204" pitchFamily="18" charset="0"/>
+                      </a:rPr>
+                      <m:t>ℱ</m:t>
+                    </m:r>
+                  </m:oMath>
+                </a14:m>
+                <a:r>
+                  <a:rPr lang="en-US" dirty="0"/>
+                  <a:t> is a partial binary operation </a:t>
+                </a:r>
+              </a:p>
+              <a:p>
+                <a14:m>
+                  <m:oMath xmlns:m="http://schemas.openxmlformats.org/officeDocument/2006/math">
+                    <m:r>
+                      <m:rPr>
+                        <m:nor/>
+                      </m:rPr>
+                      <a:rPr lang="en-US" b="1" i="0" smtClean="0">
+                        <a:latin typeface="Cambria Math" panose="02040503050406030204" pitchFamily="18" charset="0"/>
+                      </a:rPr>
+                      <m:t>move</m:t>
+                    </m:r>
+                    <m:r>
+                      <a:rPr lang="en-US" b="0" i="1" smtClean="0">
+                        <a:latin typeface="Cambria Math" panose="02040503050406030204" pitchFamily="18" charset="0"/>
+                      </a:rPr>
+                      <m:t>: </m:t>
+                    </m:r>
+                    <m:r>
+                      <a:rPr lang="en-US" b="0" i="1" smtClean="0">
+                        <a:latin typeface="Cambria Math" panose="02040503050406030204" pitchFamily="18" charset="0"/>
+                      </a:rPr>
+                      <m:t>ℱ</m:t>
+                    </m:r>
+                    <m:r>
+                      <a:rPr lang="en-US" b="0" i="1" smtClean="0">
+                        <a:latin typeface="Cambria Math" panose="02040503050406030204" pitchFamily="18" charset="0"/>
+                      </a:rPr>
+                      <m:t>⇀</m:t>
+                    </m:r>
+                    <m:r>
+                      <a:rPr lang="en-US" b="0" i="1" smtClean="0">
+                        <a:latin typeface="Cambria Math" panose="02040503050406030204" pitchFamily="18" charset="0"/>
+                      </a:rPr>
+                      <m:t>ℱ</m:t>
+                    </m:r>
+                  </m:oMath>
+                </a14:m>
+                <a:r>
+                  <a:rPr lang="en-US" b="1" dirty="0"/>
+                  <a:t> </a:t>
+                </a:r>
+                <a:r>
+                  <a:rPr lang="en-US" dirty="0"/>
+                  <a:t>is a partial unary operation</a:t>
+                </a:r>
+              </a:p>
+              <a:p>
+                <a14:m>
+                  <m:oMath xmlns:m="http://schemas.openxmlformats.org/officeDocument/2006/math">
+                    <m:r>
+                      <m:rPr>
+                        <m:sty m:val="p"/>
+                      </m:rPr>
+                      <a:rPr lang="en-US" i="0" smtClean="0">
+                        <a:latin typeface="Cambria Math" panose="02040503050406030204" pitchFamily="18" charset="0"/>
+                      </a:rPr>
+                      <m:t>Ψ</m:t>
+                    </m:r>
+                    <m:r>
+                      <a:rPr lang="en-US" b="0" i="1" smtClean="0">
+                        <a:latin typeface="Cambria Math" panose="02040503050406030204" pitchFamily="18" charset="0"/>
+                      </a:rPr>
+                      <m:t>:</m:t>
+                    </m:r>
+                    <m:sSub>
+                      <m:sSubPr>
+                        <m:ctrlPr>
+                          <a:rPr lang="en-US" i="1" smtClean="0">
+                            <a:latin typeface="Cambria Math" panose="02040503050406030204" pitchFamily="18" charset="0"/>
+                          </a:rPr>
+                        </m:ctrlPr>
+                      </m:sSubPr>
+                      <m:e>
+                        <m:r>
+                          <a:rPr lang="en-US" b="0" i="1" smtClean="0">
+                            <a:latin typeface="Cambria Math" panose="02040503050406030204" pitchFamily="18" charset="0"/>
+                          </a:rPr>
+                          <m:t>𝑇</m:t>
+                        </m:r>
+                      </m:e>
+                      <m:sub>
+                        <m:r>
+                          <a:rPr lang="en-US" b="0" i="1" smtClean="0">
+                            <a:latin typeface="Cambria Math" panose="02040503050406030204" pitchFamily="18" charset="0"/>
+                          </a:rPr>
+                          <m:t>𝐴</m:t>
+                        </m:r>
+                      </m:sub>
+                    </m:sSub>
+                    <m:r>
+                      <a:rPr lang="en-US" b="0" i="1" smtClean="0">
+                        <a:latin typeface="Cambria Math" panose="02040503050406030204" pitchFamily="18" charset="0"/>
+                      </a:rPr>
+                      <m:t>→</m:t>
+                    </m:r>
+                    <m:r>
+                      <a:rPr lang="en-US" b="0" i="1" smtClean="0">
+                        <a:latin typeface="Cambria Math" panose="02040503050406030204" pitchFamily="18" charset="0"/>
+                      </a:rPr>
+                      <m:t>ℱ</m:t>
+                    </m:r>
+                  </m:oMath>
+                </a14:m>
+                <a:r>
+                  <a:rPr lang="en-US" dirty="0"/>
+                  <a:t> is a function such that</a:t>
+                </a:r>
+              </a:p>
+              <a:p>
+                <a:pPr lvl="1"/>
+                <a14:m>
+                  <m:oMath xmlns:m="http://schemas.openxmlformats.org/officeDocument/2006/math">
+                    <m:r>
+                      <m:rPr>
+                        <m:sty m:val="p"/>
+                      </m:rPr>
+                      <a:rPr lang="en-US" b="0" i="0" smtClean="0">
+                        <a:latin typeface="Cambria Math" panose="02040503050406030204" pitchFamily="18" charset="0"/>
+                      </a:rPr>
+                      <m:t>Ψ</m:t>
+                    </m:r>
+                    <m:d>
+                      <m:dPr>
+                        <m:ctrlPr>
+                          <a:rPr lang="en-US" b="0" i="1" smtClean="0">
+                            <a:latin typeface="Cambria Math" panose="02040503050406030204" pitchFamily="18" charset="0"/>
+                          </a:rPr>
+                        </m:ctrlPr>
+                      </m:dPr>
+                      <m:e>
+                        <m:r>
+                          <m:rPr>
+                            <m:nor/>
+                          </m:rPr>
+                          <a:rPr lang="en-US" i="0" smtClean="0">
+                            <a:latin typeface="Cambria Math" panose="02040503050406030204" pitchFamily="18" charset="0"/>
+                          </a:rPr>
+                          <m:t>merge</m:t>
+                        </m:r>
+                        <m:d>
+                          <m:dPr>
+                            <m:ctrlPr>
+                              <a:rPr lang="en-US" b="0" i="1" smtClean="0">
+                                <a:latin typeface="Cambria Math" panose="02040503050406030204" pitchFamily="18" charset="0"/>
+                              </a:rPr>
+                            </m:ctrlPr>
+                          </m:dPr>
+                          <m:e>
+                            <m:sSub>
+                              <m:sSubPr>
+                                <m:ctrlPr>
+                                  <a:rPr lang="en-US" b="0" i="1" smtClean="0">
+                                    <a:latin typeface="Cambria Math" panose="02040503050406030204" pitchFamily="18" charset="0"/>
+                                  </a:rPr>
+                                </m:ctrlPr>
+                              </m:sSubPr>
+                              <m:e>
+                                <m:r>
+                                  <a:rPr lang="en-US" b="0" i="1" smtClean="0">
+                                    <a:latin typeface="Cambria Math" panose="02040503050406030204" pitchFamily="18" charset="0"/>
+                                  </a:rPr>
+                                  <m:t>𝑡</m:t>
+                                </m:r>
+                              </m:e>
+                              <m:sub>
+                                <m:r>
+                                  <a:rPr lang="en-US" b="0" i="1" smtClean="0">
+                                    <a:latin typeface="Cambria Math" panose="02040503050406030204" pitchFamily="18" charset="0"/>
+                                  </a:rPr>
+                                  <m:t>1</m:t>
+                                </m:r>
+                              </m:sub>
+                            </m:sSub>
+                            <m:r>
+                              <a:rPr lang="en-US" b="0" i="1" smtClean="0">
+                                <a:latin typeface="Cambria Math" panose="02040503050406030204" pitchFamily="18" charset="0"/>
+                              </a:rPr>
+                              <m:t>,</m:t>
+                            </m:r>
+                            <m:sSub>
+                              <m:sSubPr>
+                                <m:ctrlPr>
+                                  <a:rPr lang="en-US" b="0" i="1" smtClean="0">
+                                    <a:latin typeface="Cambria Math" panose="02040503050406030204" pitchFamily="18" charset="0"/>
+                                  </a:rPr>
+                                </m:ctrlPr>
+                              </m:sSubPr>
+                              <m:e>
+                                <m:r>
+                                  <a:rPr lang="en-US" b="0" i="1" smtClean="0">
+                                    <a:latin typeface="Cambria Math" panose="02040503050406030204" pitchFamily="18" charset="0"/>
+                                  </a:rPr>
+                                  <m:t>𝑡</m:t>
+                                </m:r>
+                              </m:e>
+                              <m:sub>
+                                <m:r>
+                                  <a:rPr lang="en-US" b="0" i="1" smtClean="0">
+                                    <a:latin typeface="Cambria Math" panose="02040503050406030204" pitchFamily="18" charset="0"/>
+                                  </a:rPr>
+                                  <m:t>2</m:t>
+                                </m:r>
+                              </m:sub>
+                            </m:sSub>
+                          </m:e>
+                        </m:d>
+                      </m:e>
+                    </m:d>
+                    <m:r>
+                      <a:rPr lang="en-US" b="0" i="1" smtClean="0">
+                        <a:latin typeface="Cambria Math" panose="02040503050406030204" pitchFamily="18" charset="0"/>
+                      </a:rPr>
+                      <m:t>=</m:t>
+                    </m:r>
+                    <m:r>
+                      <m:rPr>
+                        <m:nor/>
+                      </m:rPr>
+                      <a:rPr lang="en-US" b="1" i="0" smtClean="0">
+                        <a:latin typeface="Cambria Math" panose="02040503050406030204" pitchFamily="18" charset="0"/>
+                      </a:rPr>
+                      <m:t>merge</m:t>
+                    </m:r>
+                    <m:d>
+                      <m:dPr>
+                        <m:ctrlPr>
+                          <a:rPr lang="en-US" b="0" i="1" smtClean="0">
+                            <a:latin typeface="Cambria Math" panose="02040503050406030204" pitchFamily="18" charset="0"/>
+                          </a:rPr>
+                        </m:ctrlPr>
+                      </m:dPr>
+                      <m:e>
+                        <m:r>
+                          <m:rPr>
+                            <m:sty m:val="p"/>
+                          </m:rPr>
+                          <a:rPr lang="en-US" b="0" i="0" smtClean="0">
+                            <a:latin typeface="Cambria Math" panose="02040503050406030204" pitchFamily="18" charset="0"/>
+                          </a:rPr>
+                          <m:t>Ψ</m:t>
+                        </m:r>
+                        <m:d>
+                          <m:dPr>
+                            <m:ctrlPr>
+                              <a:rPr lang="en-US" b="0" i="1" smtClean="0">
+                                <a:latin typeface="Cambria Math" panose="02040503050406030204" pitchFamily="18" charset="0"/>
+                              </a:rPr>
+                            </m:ctrlPr>
+                          </m:dPr>
+                          <m:e>
+                            <m:sSub>
+                              <m:sSubPr>
+                                <m:ctrlPr>
+                                  <a:rPr lang="en-US" b="0" i="1" smtClean="0">
+                                    <a:latin typeface="Cambria Math" panose="02040503050406030204" pitchFamily="18" charset="0"/>
+                                  </a:rPr>
+                                </m:ctrlPr>
+                              </m:sSubPr>
+                              <m:e>
+                                <m:r>
+                                  <a:rPr lang="en-US" b="0" i="1" smtClean="0">
+                                    <a:latin typeface="Cambria Math" panose="02040503050406030204" pitchFamily="18" charset="0"/>
+                                  </a:rPr>
+                                  <m:t>𝑡</m:t>
+                                </m:r>
+                              </m:e>
+                              <m:sub>
+                                <m:r>
+                                  <a:rPr lang="en-US" b="0" i="1" smtClean="0">
+                                    <a:latin typeface="Cambria Math" panose="02040503050406030204" pitchFamily="18" charset="0"/>
+                                  </a:rPr>
+                                  <m:t>1</m:t>
+                                </m:r>
+                              </m:sub>
+                            </m:sSub>
+                          </m:e>
+                        </m:d>
+                        <m:r>
+                          <a:rPr lang="en-US" b="0" i="1" smtClean="0">
+                            <a:latin typeface="Cambria Math" panose="02040503050406030204" pitchFamily="18" charset="0"/>
+                          </a:rPr>
+                          <m:t>,</m:t>
+                        </m:r>
+                        <m:r>
+                          <m:rPr>
+                            <m:sty m:val="p"/>
+                          </m:rPr>
+                          <a:rPr lang="en-US" b="0" i="0" smtClean="0">
+                            <a:latin typeface="Cambria Math" panose="02040503050406030204" pitchFamily="18" charset="0"/>
+                          </a:rPr>
+                          <m:t>Ψ</m:t>
+                        </m:r>
+                        <m:d>
+                          <m:dPr>
+                            <m:ctrlPr>
+                              <a:rPr lang="en-US" b="0" i="1" smtClean="0">
+                                <a:latin typeface="Cambria Math" panose="02040503050406030204" pitchFamily="18" charset="0"/>
+                              </a:rPr>
+                            </m:ctrlPr>
+                          </m:dPr>
+                          <m:e>
+                            <m:sSub>
+                              <m:sSubPr>
+                                <m:ctrlPr>
+                                  <a:rPr lang="en-US" b="0" i="1" smtClean="0">
+                                    <a:latin typeface="Cambria Math" panose="02040503050406030204" pitchFamily="18" charset="0"/>
+                                  </a:rPr>
+                                </m:ctrlPr>
+                              </m:sSubPr>
+                              <m:e>
+                                <m:r>
+                                  <a:rPr lang="en-US" b="0" i="1" smtClean="0">
+                                    <a:latin typeface="Cambria Math" panose="02040503050406030204" pitchFamily="18" charset="0"/>
+                                  </a:rPr>
+                                  <m:t>𝑡</m:t>
+                                </m:r>
+                              </m:e>
+                              <m:sub>
+                                <m:r>
+                                  <a:rPr lang="en-US" b="0" i="1" smtClean="0">
+                                    <a:latin typeface="Cambria Math" panose="02040503050406030204" pitchFamily="18" charset="0"/>
+                                  </a:rPr>
+                                  <m:t>2</m:t>
+                                </m:r>
+                              </m:sub>
+                            </m:sSub>
+                          </m:e>
+                        </m:d>
+                      </m:e>
+                    </m:d>
+                  </m:oMath>
+                </a14:m>
+                <a:endParaRPr lang="en-US" b="0" i="1" dirty="0">
+                  <a:latin typeface="Cambria Math" panose="02040503050406030204" pitchFamily="18" charset="0"/>
+                </a:endParaRPr>
+              </a:p>
+              <a:p>
+                <a:pPr lvl="1"/>
+                <a14:m>
+                  <m:oMath xmlns:m="http://schemas.openxmlformats.org/officeDocument/2006/math">
+                    <m:r>
+                      <m:rPr>
+                        <m:sty m:val="p"/>
+                      </m:rPr>
+                      <a:rPr lang="en-US" b="0" i="0" smtClean="0">
+                        <a:latin typeface="Cambria Math" panose="02040503050406030204" pitchFamily="18" charset="0"/>
+                      </a:rPr>
+                      <m:t>Ψ</m:t>
+                    </m:r>
+                    <m:d>
+                      <m:dPr>
+                        <m:ctrlPr>
+                          <a:rPr lang="en-US" b="0" i="1" smtClean="0">
+                            <a:latin typeface="Cambria Math" panose="02040503050406030204" pitchFamily="18" charset="0"/>
+                          </a:rPr>
+                        </m:ctrlPr>
+                      </m:dPr>
+                      <m:e>
+                        <m:r>
+                          <m:rPr>
+                            <m:nor/>
+                          </m:rPr>
+                          <a:rPr lang="en-US" b="0" i="0" smtClean="0">
+                            <a:latin typeface="Cambria Math" panose="02040503050406030204" pitchFamily="18" charset="0"/>
+                          </a:rPr>
+                          <m:t>move</m:t>
+                        </m:r>
+                        <m:d>
+                          <m:dPr>
+                            <m:ctrlPr>
+                              <a:rPr lang="en-US" b="0" i="1" smtClean="0">
+                                <a:latin typeface="Cambria Math" panose="02040503050406030204" pitchFamily="18" charset="0"/>
+                              </a:rPr>
+                            </m:ctrlPr>
+                          </m:dPr>
+                          <m:e>
+                            <m:r>
+                              <a:rPr lang="en-US" b="0" i="1" smtClean="0">
+                                <a:latin typeface="Cambria Math" panose="02040503050406030204" pitchFamily="18" charset="0"/>
+                              </a:rPr>
+                              <m:t>𝑡</m:t>
+                            </m:r>
+                          </m:e>
+                        </m:d>
+                      </m:e>
+                    </m:d>
+                    <m:r>
+                      <a:rPr lang="en-US" b="0" i="1" smtClean="0">
+                        <a:latin typeface="Cambria Math" panose="02040503050406030204" pitchFamily="18" charset="0"/>
+                      </a:rPr>
+                      <m:t>=</m:t>
+                    </m:r>
+                    <m:r>
+                      <m:rPr>
+                        <m:nor/>
+                      </m:rPr>
+                      <a:rPr lang="en-US" b="1" i="0" smtClean="0">
+                        <a:latin typeface="Cambria Math" panose="02040503050406030204" pitchFamily="18" charset="0"/>
+                      </a:rPr>
+                      <m:t>move</m:t>
+                    </m:r>
+                    <m:d>
+                      <m:dPr>
+                        <m:ctrlPr>
+                          <a:rPr lang="en-US" b="0" i="1" smtClean="0">
+                            <a:latin typeface="Cambria Math" panose="02040503050406030204" pitchFamily="18" charset="0"/>
+                          </a:rPr>
+                        </m:ctrlPr>
+                      </m:dPr>
+                      <m:e>
+                        <m:r>
+                          <m:rPr>
+                            <m:sty m:val="p"/>
+                          </m:rPr>
+                          <a:rPr lang="en-US" b="0" i="0" smtClean="0">
+                            <a:latin typeface="Cambria Math" panose="02040503050406030204" pitchFamily="18" charset="0"/>
+                          </a:rPr>
+                          <m:t>Ψ</m:t>
+                        </m:r>
+                        <m:d>
+                          <m:dPr>
+                            <m:ctrlPr>
+                              <a:rPr lang="en-US" b="0" i="1" smtClean="0">
+                                <a:latin typeface="Cambria Math" panose="02040503050406030204" pitchFamily="18" charset="0"/>
+                              </a:rPr>
+                            </m:ctrlPr>
+                          </m:dPr>
+                          <m:e>
+                            <m:r>
+                              <a:rPr lang="en-US" b="0" i="1" smtClean="0">
+                                <a:latin typeface="Cambria Math" panose="02040503050406030204" pitchFamily="18" charset="0"/>
+                              </a:rPr>
+                              <m:t>𝑡</m:t>
+                            </m:r>
+                          </m:e>
+                        </m:d>
+                      </m:e>
+                    </m:d>
+                  </m:oMath>
+                </a14:m>
+                <a:endParaRPr lang="en-US" dirty="0"/>
+              </a:p>
+              <a:p>
+                <a:r>
+                  <a:rPr lang="en-US" dirty="0"/>
+                  <a:t>Gives a geometric vector space representation for the syntax of MGs</a:t>
+                </a:r>
+              </a:p>
+            </p:txBody>
+          </p:sp>
+        </mc:Choice>
+        <mc:Fallback xmlns="">
+          <p:sp>
+            <p:nvSpPr>
+              <p:cNvPr id="3" name="Text Placeholder 2">
+                <a:extLst>
+                  <a:ext uri="{FF2B5EF4-FFF2-40B4-BE49-F238E27FC236}">
+                    <a16:creationId xmlns:a16="http://schemas.microsoft.com/office/drawing/2014/main" id="{491138A7-B4FB-A950-E2E0-AFDA55C8D88D}"/>
+                  </a:ext>
+                </a:extLst>
+              </p:cNvPr>
+              <p:cNvSpPr>
+                <a:spLocks noGrp="1" noRot="1" noChangeAspect="1" noMove="1" noResize="1" noEditPoints="1" noAdjustHandles="1" noChangeArrowheads="1" noChangeShapeType="1" noTextEdit="1"/>
+              </p:cNvSpPr>
+              <p:nvPr>
+                <p:ph type="body" idx="1"/>
+              </p:nvPr>
+            </p:nvSpPr>
+            <p:spPr>
+              <a:xfrm>
+                <a:off x="311700" y="1152473"/>
+                <a:ext cx="8520600" cy="3546001"/>
+              </a:xfrm>
+              <a:blipFill>
+                <a:blip r:embed="rId2"/>
+                <a:stretch>
+                  <a:fillRect/>
+                </a:stretch>
+              </a:blipFill>
+            </p:spPr>
+            <p:txBody>
+              <a:bodyPr/>
+              <a:lstStyle/>
+              <a:p>
+                <a:r>
+                  <a:rPr lang="en-US">
+                    <a:noFill/>
+                  </a:rPr>
+                  <a:t> </a:t>
+                </a:r>
+              </a:p>
+            </p:txBody>
+          </p:sp>
+        </mc:Fallback>
+      </mc:AlternateContent>
+      <p:sp>
+        <p:nvSpPr>
+          <p:cNvPr id="4" name="Slide Number Placeholder 3">
+            <a:extLst>
+              <a:ext uri="{FF2B5EF4-FFF2-40B4-BE49-F238E27FC236}">
+                <a16:creationId xmlns:a16="http://schemas.microsoft.com/office/drawing/2014/main" id="{AB488812-0F13-356C-B961-C6E2DEB34303}"/>
+              </a:ext>
+            </a:extLst>
+          </p:cNvPr>
+          <p:cNvSpPr>
+            <a:spLocks noGrp="1"/>
+          </p:cNvSpPr>
+          <p:nvPr>
+            <p:ph type="sldNum" idx="12"/>
+          </p:nvPr>
+        </p:nvSpPr>
+        <p:spPr/>
+        <p:txBody>
+          <a:bodyPr/>
+          <a:lstStyle/>
+          <a:p>
+            <a:pPr marL="0" lvl="0" indent="0" algn="r" rtl="0">
+              <a:spcBef>
+                <a:spcPts val="0"/>
+              </a:spcBef>
+              <a:spcAft>
+                <a:spcPts val="0"/>
+              </a:spcAft>
+              <a:buNone/>
+            </a:pPr>
+            <a:fld id="{00000000-1234-1234-1234-123412341234}" type="slidenum">
+              <a:rPr lang="en" smtClean="0"/>
+              <a:t>36</a:t>
+            </a:fld>
+            <a:endParaRPr lang="en"/>
+          </a:p>
+        </p:txBody>
+      </p:sp>
+    </p:spTree>
+    <p:extLst>
+      <p:ext uri="{BB962C8B-B14F-4D97-AF65-F5344CB8AC3E}">
+        <p14:creationId xmlns:p14="http://schemas.microsoft.com/office/powerpoint/2010/main" val="2765861796"/>
+      </p:ext>
+    </p:extLst>
+  </p:cSld>
+  <p:clrMapOvr>
+    <a:masterClrMapping/>
+  </p:clrMapOvr>
+</p:sld>
+</file>
+
+<file path=ppt/slides/slide37.xml><?xml version="1.0" encoding="utf-8"?>
+<p:sld xmlns:a="http://schemas.openxmlformats.org/drawingml/2006/main" xmlns:r="http://schemas.openxmlformats.org/officeDocument/2006/relationships" xmlns:p="http://schemas.openxmlformats.org/presentationml/2006/main">
+  <p:cSld>
+    <p:spTree>
+      <p:nvGrpSpPr>
+        <p:cNvPr id="1" name=""/>
+        <p:cNvGrpSpPr/>
+        <p:nvPr/>
+      </p:nvGrpSpPr>
+      <p:grpSpPr>
+        <a:xfrm>
+          <a:off x="0" y="0"/>
+          <a:ext cx="0" cy="0"/>
+          <a:chOff x="0" y="0"/>
+          <a:chExt cx="0" cy="0"/>
+        </a:xfrm>
+      </p:grpSpPr>
+      <p:sp>
+        <p:nvSpPr>
+          <p:cNvPr id="2" name="Title 1">
+            <a:extLst>
+              <a:ext uri="{FF2B5EF4-FFF2-40B4-BE49-F238E27FC236}">
+                <a16:creationId xmlns:a16="http://schemas.microsoft.com/office/drawing/2014/main" id="{395E0ED7-D26F-184F-3865-8486B60B2EA0}"/>
+              </a:ext>
+            </a:extLst>
+          </p:cNvPr>
+          <p:cNvSpPr>
+            <a:spLocks noGrp="1"/>
+          </p:cNvSpPr>
+          <p:nvPr>
+            <p:ph type="title"/>
+          </p:nvPr>
+        </p:nvSpPr>
+        <p:spPr/>
+        <p:txBody>
+          <a:bodyPr>
+            <a:normAutofit fontScale="90000"/>
+          </a:bodyPr>
+          <a:lstStyle/>
+          <a:p>
+            <a:r>
+              <a:rPr lang="en-US" dirty="0"/>
+              <a:t>Our Semantics with </a:t>
+            </a:r>
+            <a:r>
+              <a:rPr lang="en-US" dirty="0" err="1"/>
+              <a:t>bG&amp;G’s</a:t>
+            </a:r>
+            <a:r>
+              <a:rPr lang="en-US" dirty="0"/>
+              <a:t> Syntax</a:t>
+            </a:r>
+          </a:p>
+        </p:txBody>
+      </p:sp>
+      <mc:AlternateContent xmlns:mc="http://schemas.openxmlformats.org/markup-compatibility/2006" xmlns:a14="http://schemas.microsoft.com/office/drawing/2010/main">
+        <mc:Choice Requires="a14">
+          <p:sp>
+            <p:nvSpPr>
+              <p:cNvPr id="3" name="Text Placeholder 2">
+                <a:extLst>
+                  <a:ext uri="{FF2B5EF4-FFF2-40B4-BE49-F238E27FC236}">
+                    <a16:creationId xmlns:a16="http://schemas.microsoft.com/office/drawing/2014/main" id="{EA31B4B9-43B4-087E-BF20-406C1186116D}"/>
+                  </a:ext>
+                </a:extLst>
+              </p:cNvPr>
+              <p:cNvSpPr>
+                <a:spLocks noGrp="1"/>
+              </p:cNvSpPr>
+              <p:nvPr>
+                <p:ph type="body" idx="1"/>
+              </p:nvPr>
+            </p:nvSpPr>
+            <p:spPr/>
+            <p:txBody>
+              <a:bodyPr/>
+              <a:lstStyle/>
+              <a:p>
+                <a14:m>
+                  <m:oMath xmlns:m="http://schemas.openxmlformats.org/officeDocument/2006/math">
+                    <m:r>
+                      <m:rPr>
+                        <m:sty m:val="p"/>
+                      </m:rPr>
+                      <a:rPr lang="en-US">
+                        <a:latin typeface="Cambria Math" panose="02040503050406030204" pitchFamily="18" charset="0"/>
+                      </a:rPr>
+                      <m:t>Ω</m:t>
+                    </m:r>
+                    <m:r>
+                      <a:rPr lang="en-US" i="1">
+                        <a:latin typeface="Cambria Math" panose="02040503050406030204" pitchFamily="18" charset="0"/>
+                      </a:rPr>
+                      <m:t>:</m:t>
+                    </m:r>
+                    <m:sSub>
+                      <m:sSubPr>
+                        <m:ctrlPr>
+                          <a:rPr lang="en-US" i="1">
+                            <a:latin typeface="Cambria Math" panose="02040503050406030204" pitchFamily="18" charset="0"/>
+                          </a:rPr>
+                        </m:ctrlPr>
+                      </m:sSubPr>
+                      <m:e>
+                        <m:r>
+                          <a:rPr lang="en-US" i="1">
+                            <a:latin typeface="Cambria Math" panose="02040503050406030204" pitchFamily="18" charset="0"/>
+                          </a:rPr>
+                          <m:t>𝑇</m:t>
+                        </m:r>
+                      </m:e>
+                      <m:sub>
+                        <m:r>
+                          <a:rPr lang="en-US" i="1">
+                            <a:latin typeface="Cambria Math" panose="02040503050406030204" pitchFamily="18" charset="0"/>
+                          </a:rPr>
+                          <m:t>𝐴</m:t>
+                        </m:r>
+                      </m:sub>
+                    </m:sSub>
+                    <m:r>
+                      <a:rPr lang="en-US" i="1">
+                        <a:latin typeface="Cambria Math" panose="02040503050406030204" pitchFamily="18" charset="0"/>
+                      </a:rPr>
+                      <m:t>→</m:t>
+                    </m:r>
+                    <m:d>
+                      <m:dPr>
+                        <m:ctrlPr>
+                          <a:rPr lang="en-US" i="1">
+                            <a:latin typeface="Cambria Math" panose="02040503050406030204" pitchFamily="18" charset="0"/>
+                          </a:rPr>
+                        </m:ctrlPr>
+                      </m:dPr>
+                      <m:e>
+                        <m:r>
+                          <a:rPr lang="en-US" i="1">
+                            <a:latin typeface="Cambria Math" panose="02040503050406030204" pitchFamily="18" charset="0"/>
+                          </a:rPr>
+                          <m:t>ℱ</m:t>
+                        </m:r>
+                        <m:r>
+                          <a:rPr lang="en-US" i="1">
+                            <a:latin typeface="Cambria Math" panose="02040503050406030204" pitchFamily="18" charset="0"/>
+                          </a:rPr>
+                          <m:t>×</m:t>
+                        </m:r>
+                        <m:r>
+                          <a:rPr lang="en-US" i="1">
+                            <a:latin typeface="Cambria Math" panose="02040503050406030204" pitchFamily="18" charset="0"/>
+                          </a:rPr>
+                          <m:t>𝗟</m:t>
+                        </m:r>
+                      </m:e>
+                    </m:d>
+                    <m:r>
+                      <a:rPr lang="en-US">
+                        <a:latin typeface="Cambria Math" panose="02040503050406030204" pitchFamily="18" charset="0"/>
+                      </a:rPr>
+                      <m:t>,</m:t>
+                    </m:r>
+                    <m:r>
+                      <a:rPr lang="en-US" i="1">
+                        <a:latin typeface="Cambria Math" panose="02040503050406030204" pitchFamily="18" charset="0"/>
+                      </a:rPr>
+                      <m:t>  </m:t>
+                    </m:r>
+                    <m:r>
+                      <a:rPr lang="en-US" i="1">
+                        <a:latin typeface="Cambria Math" panose="02040503050406030204" pitchFamily="18" charset="0"/>
+                      </a:rPr>
+                      <m:t>𝑡</m:t>
+                    </m:r>
+                    <m:r>
+                      <a:rPr lang="en-US" i="1">
+                        <a:latin typeface="Cambria Math" panose="02040503050406030204" pitchFamily="18" charset="0"/>
+                      </a:rPr>
+                      <m:t>↦</m:t>
+                    </m:r>
+                    <m:d>
+                      <m:dPr>
+                        <m:ctrlPr>
+                          <a:rPr lang="en-US" i="1">
+                            <a:latin typeface="Cambria Math" panose="02040503050406030204" pitchFamily="18" charset="0"/>
+                          </a:rPr>
+                        </m:ctrlPr>
+                      </m:dPr>
+                      <m:e>
+                        <m:r>
+                          <m:rPr>
+                            <m:sty m:val="p"/>
+                          </m:rPr>
+                          <a:rPr lang="en-US">
+                            <a:latin typeface="Cambria Math" panose="02040503050406030204" pitchFamily="18" charset="0"/>
+                          </a:rPr>
+                          <m:t>Ψ</m:t>
+                        </m:r>
+                        <m:d>
+                          <m:dPr>
+                            <m:ctrlPr>
+                              <a:rPr lang="en-US" i="1">
+                                <a:latin typeface="Cambria Math" panose="02040503050406030204" pitchFamily="18" charset="0"/>
+                              </a:rPr>
+                            </m:ctrlPr>
+                          </m:dPr>
+                          <m:e>
+                            <m:r>
+                              <a:rPr lang="en-US" i="1">
+                                <a:latin typeface="Cambria Math" panose="02040503050406030204" pitchFamily="18" charset="0"/>
+                              </a:rPr>
+                              <m:t>𝑡</m:t>
+                            </m:r>
+                          </m:e>
+                        </m:d>
+                        <m:r>
+                          <a:rPr lang="en-US" i="1">
+                            <a:latin typeface="Cambria Math" panose="02040503050406030204" pitchFamily="18" charset="0"/>
+                          </a:rPr>
+                          <m:t>,</m:t>
+                        </m:r>
+                        <m:r>
+                          <m:rPr>
+                            <m:sty m:val="p"/>
+                          </m:rPr>
+                          <a:rPr lang="en-US">
+                            <a:latin typeface="Cambria Math" panose="02040503050406030204" pitchFamily="18" charset="0"/>
+                          </a:rPr>
+                          <m:t>Φ</m:t>
+                        </m:r>
+                        <m:d>
+                          <m:dPr>
+                            <m:ctrlPr>
+                              <a:rPr lang="en-US" i="1">
+                                <a:latin typeface="Cambria Math" panose="02040503050406030204" pitchFamily="18" charset="0"/>
+                              </a:rPr>
+                            </m:ctrlPr>
+                          </m:dPr>
+                          <m:e>
+                            <m:r>
+                              <a:rPr lang="en-US" i="1">
+                                <a:latin typeface="Cambria Math" panose="02040503050406030204" pitchFamily="18" charset="0"/>
+                              </a:rPr>
+                              <m:t>𝑡</m:t>
+                            </m:r>
+                          </m:e>
+                        </m:d>
+                      </m:e>
+                    </m:d>
+                  </m:oMath>
+                </a14:m>
+                <a:endParaRPr lang="en-US" i="1" dirty="0">
+                  <a:latin typeface="Cambria Math" panose="02040503050406030204" pitchFamily="18" charset="0"/>
+                </a:endParaRPr>
+              </a:p>
+              <a:p>
+                <a14:m>
+                  <m:oMath xmlns:m="http://schemas.openxmlformats.org/officeDocument/2006/math">
+                    <m:r>
+                      <a:rPr lang="en-US" i="1">
+                        <a:latin typeface="Cambria Math" panose="02040503050406030204" pitchFamily="18" charset="0"/>
+                      </a:rPr>
+                      <m:t>ℳ</m:t>
+                    </m:r>
+                    <m:r>
+                      <a:rPr lang="en-US" i="1">
+                        <a:latin typeface="Cambria Math" panose="02040503050406030204" pitchFamily="18" charset="0"/>
+                      </a:rPr>
+                      <m:t>𝑒𝑟𝑔𝑒</m:t>
+                    </m:r>
+                    <m:r>
+                      <a:rPr lang="en-US" i="1">
+                        <a:latin typeface="Cambria Math" panose="02040503050406030204" pitchFamily="18" charset="0"/>
+                      </a:rPr>
+                      <m:t>:</m:t>
+                    </m:r>
+                    <m:d>
+                      <m:dPr>
+                        <m:ctrlPr>
+                          <a:rPr lang="en-US" i="1">
+                            <a:latin typeface="Cambria Math" panose="02040503050406030204" pitchFamily="18" charset="0"/>
+                          </a:rPr>
+                        </m:ctrlPr>
+                      </m:dPr>
+                      <m:e>
+                        <m:r>
+                          <a:rPr lang="en-US" i="1">
+                            <a:latin typeface="Cambria Math" panose="02040503050406030204" pitchFamily="18" charset="0"/>
+                          </a:rPr>
+                          <m:t>ℱ</m:t>
+                        </m:r>
+                        <m:r>
+                          <a:rPr lang="en-US" i="1">
+                            <a:latin typeface="Cambria Math" panose="02040503050406030204" pitchFamily="18" charset="0"/>
+                          </a:rPr>
+                          <m:t>×</m:t>
+                        </m:r>
+                        <m:r>
+                          <a:rPr lang="en-US" i="1">
+                            <a:latin typeface="Cambria Math" panose="02040503050406030204" pitchFamily="18" charset="0"/>
+                          </a:rPr>
+                          <m:t>𝗟</m:t>
+                        </m:r>
+                      </m:e>
+                    </m:d>
+                    <m:r>
+                      <a:rPr lang="en-US" i="1">
+                        <a:latin typeface="Cambria Math" panose="02040503050406030204" pitchFamily="18" charset="0"/>
+                      </a:rPr>
+                      <m:t> ×</m:t>
+                    </m:r>
+                    <m:d>
+                      <m:dPr>
+                        <m:ctrlPr>
+                          <a:rPr lang="en-US" i="1">
+                            <a:latin typeface="Cambria Math" panose="02040503050406030204" pitchFamily="18" charset="0"/>
+                          </a:rPr>
+                        </m:ctrlPr>
+                      </m:dPr>
+                      <m:e>
+                        <m:r>
+                          <a:rPr lang="en-US" i="1">
+                            <a:latin typeface="Cambria Math" panose="02040503050406030204" pitchFamily="18" charset="0"/>
+                          </a:rPr>
+                          <m:t>ℱ</m:t>
+                        </m:r>
+                        <m:r>
+                          <a:rPr lang="en-US" i="1">
+                            <a:latin typeface="Cambria Math" panose="02040503050406030204" pitchFamily="18" charset="0"/>
+                          </a:rPr>
+                          <m:t>×</m:t>
+                        </m:r>
+                        <m:r>
+                          <a:rPr lang="en-US" i="1">
+                            <a:latin typeface="Cambria Math" panose="02040503050406030204" pitchFamily="18" charset="0"/>
+                          </a:rPr>
+                          <m:t>𝗟</m:t>
+                        </m:r>
+                      </m:e>
+                    </m:d>
+                    <m:r>
+                      <a:rPr lang="en-US" i="1">
+                        <a:latin typeface="Cambria Math" panose="02040503050406030204" pitchFamily="18" charset="0"/>
+                      </a:rPr>
+                      <m:t> ⇀</m:t>
+                    </m:r>
+                    <m:d>
+                      <m:dPr>
+                        <m:ctrlPr>
+                          <a:rPr lang="en-US" i="1">
+                            <a:latin typeface="Cambria Math" panose="02040503050406030204" pitchFamily="18" charset="0"/>
+                          </a:rPr>
+                        </m:ctrlPr>
+                      </m:dPr>
+                      <m:e>
+                        <m:r>
+                          <a:rPr lang="en-US" i="1">
+                            <a:latin typeface="Cambria Math" panose="02040503050406030204" pitchFamily="18" charset="0"/>
+                          </a:rPr>
+                          <m:t>ℱ</m:t>
+                        </m:r>
+                        <m:r>
+                          <a:rPr lang="en-US" i="1">
+                            <a:latin typeface="Cambria Math" panose="02040503050406030204" pitchFamily="18" charset="0"/>
+                          </a:rPr>
+                          <m:t>×</m:t>
+                        </m:r>
+                        <m:r>
+                          <a:rPr lang="en-US" i="1">
+                            <a:latin typeface="Cambria Math" panose="02040503050406030204" pitchFamily="18" charset="0"/>
+                          </a:rPr>
+                          <m:t>𝗟</m:t>
+                        </m:r>
+                      </m:e>
+                    </m:d>
+                    <m:r>
+                      <a:rPr lang="en-US" i="1">
+                        <a:latin typeface="Cambria Math" panose="02040503050406030204" pitchFamily="18" charset="0"/>
+                      </a:rPr>
+                      <m:t>,  </m:t>
+                    </m:r>
+                    <m:d>
+                      <m:dPr>
+                        <m:ctrlPr>
+                          <a:rPr lang="en-US" i="1">
+                            <a:latin typeface="Cambria Math" panose="02040503050406030204" pitchFamily="18" charset="0"/>
+                          </a:rPr>
+                        </m:ctrlPr>
+                      </m:dPr>
+                      <m:e>
+                        <m:d>
+                          <m:dPr>
+                            <m:ctrlPr>
+                              <a:rPr lang="en-US" i="1">
+                                <a:latin typeface="Cambria Math" panose="02040503050406030204" pitchFamily="18" charset="0"/>
+                              </a:rPr>
+                            </m:ctrlPr>
+                          </m:dPr>
+                          <m:e>
+                            <m:r>
+                              <m:rPr>
+                                <m:nor/>
+                              </m:rPr>
+                              <a:rPr lang="en-US" b="1">
+                                <a:latin typeface="Cambria Math" panose="02040503050406030204" pitchFamily="18" charset="0"/>
+                              </a:rPr>
+                              <m:t>a</m:t>
+                            </m:r>
+                            <m:r>
+                              <a:rPr lang="en-US" i="1">
+                                <a:latin typeface="Cambria Math" panose="02040503050406030204" pitchFamily="18" charset="0"/>
+                              </a:rPr>
+                              <m:t>,</m:t>
+                            </m:r>
+                            <m:r>
+                              <a:rPr lang="en-US" i="1">
+                                <a:latin typeface="Cambria Math" panose="02040503050406030204" pitchFamily="18" charset="0"/>
+                              </a:rPr>
+                              <m:t>𝐴</m:t>
+                            </m:r>
+                          </m:e>
+                        </m:d>
+                        <m:r>
+                          <a:rPr lang="en-US" i="1">
+                            <a:latin typeface="Cambria Math" panose="02040503050406030204" pitchFamily="18" charset="0"/>
+                          </a:rPr>
+                          <m:t>,</m:t>
+                        </m:r>
+                        <m:d>
+                          <m:dPr>
+                            <m:ctrlPr>
+                              <a:rPr lang="en-US" i="1">
+                                <a:latin typeface="Cambria Math" panose="02040503050406030204" pitchFamily="18" charset="0"/>
+                              </a:rPr>
+                            </m:ctrlPr>
+                          </m:dPr>
+                          <m:e>
+                            <m:r>
+                              <m:rPr>
+                                <m:nor/>
+                              </m:rPr>
+                              <a:rPr lang="en-US" b="1">
+                                <a:latin typeface="Cambria Math" panose="02040503050406030204" pitchFamily="18" charset="0"/>
+                              </a:rPr>
+                              <m:t>b</m:t>
+                            </m:r>
+                            <m:r>
+                              <a:rPr lang="en-US" i="1">
+                                <a:latin typeface="Cambria Math" panose="02040503050406030204" pitchFamily="18" charset="0"/>
+                              </a:rPr>
+                              <m:t>,</m:t>
+                            </m:r>
+                            <m:r>
+                              <a:rPr lang="en-US" i="1">
+                                <a:latin typeface="Cambria Math" panose="02040503050406030204" pitchFamily="18" charset="0"/>
+                              </a:rPr>
+                              <m:t>𝐵</m:t>
+                            </m:r>
+                          </m:e>
+                        </m:d>
+                      </m:e>
+                    </m:d>
+                    <m:r>
+                      <a:rPr lang="en-US" i="1">
+                        <a:latin typeface="Cambria Math" panose="02040503050406030204" pitchFamily="18" charset="0"/>
+                      </a:rPr>
+                      <m:t>↦</m:t>
+                    </m:r>
+                    <m:d>
+                      <m:dPr>
+                        <m:ctrlPr>
+                          <a:rPr lang="en-US" i="1">
+                            <a:latin typeface="Cambria Math" panose="02040503050406030204" pitchFamily="18" charset="0"/>
+                          </a:rPr>
+                        </m:ctrlPr>
+                      </m:dPr>
+                      <m:e>
+                        <m:r>
+                          <m:rPr>
+                            <m:nor/>
+                          </m:rPr>
+                          <a:rPr lang="en-US" b="1">
+                            <a:latin typeface="Cambria Math" panose="02040503050406030204" pitchFamily="18" charset="0"/>
+                          </a:rPr>
+                          <m:t>merge</m:t>
+                        </m:r>
+                        <m:d>
+                          <m:dPr>
+                            <m:ctrlPr>
+                              <a:rPr lang="en-US" i="1">
+                                <a:latin typeface="Cambria Math" panose="02040503050406030204" pitchFamily="18" charset="0"/>
+                              </a:rPr>
+                            </m:ctrlPr>
+                          </m:dPr>
+                          <m:e>
+                            <m:r>
+                              <m:rPr>
+                                <m:nor/>
+                              </m:rPr>
+                              <a:rPr lang="en-US" b="1">
+                                <a:latin typeface="Cambria Math" panose="02040503050406030204" pitchFamily="18" charset="0"/>
+                              </a:rPr>
+                              <m:t>a</m:t>
+                            </m:r>
+                            <m:r>
+                              <a:rPr lang="en-US" i="1">
+                                <a:latin typeface="Cambria Math" panose="02040503050406030204" pitchFamily="18" charset="0"/>
+                              </a:rPr>
+                              <m:t>,</m:t>
+                            </m:r>
+                            <m:r>
+                              <m:rPr>
+                                <m:nor/>
+                              </m:rPr>
+                              <a:rPr lang="en-US" b="1">
+                                <a:latin typeface="Cambria Math" panose="02040503050406030204" pitchFamily="18" charset="0"/>
+                              </a:rPr>
+                              <m:t>b</m:t>
+                            </m:r>
+                          </m:e>
+                        </m:d>
+                        <m:r>
+                          <a:rPr lang="en-US" i="1">
+                            <a:latin typeface="Cambria Math" panose="02040503050406030204" pitchFamily="18" charset="0"/>
+                          </a:rPr>
+                          <m:t>, </m:t>
+                        </m:r>
+                        <m:r>
+                          <a:rPr lang="en-US" i="1">
+                            <a:latin typeface="Cambria Math" panose="02040503050406030204" pitchFamily="18" charset="0"/>
+                          </a:rPr>
+                          <m:t>𝐴</m:t>
+                        </m:r>
+                        <m:r>
+                          <a:rPr lang="en-US" i="1">
+                            <a:latin typeface="Cambria Math" panose="02040503050406030204" pitchFamily="18" charset="0"/>
+                          </a:rPr>
+                          <m:t>⋅</m:t>
+                        </m:r>
+                        <m:r>
+                          <a:rPr lang="en-US" i="1">
+                            <a:latin typeface="Cambria Math" panose="02040503050406030204" pitchFamily="18" charset="0"/>
+                          </a:rPr>
+                          <m:t>𝐵</m:t>
+                        </m:r>
+                      </m:e>
+                    </m:d>
+                  </m:oMath>
+                </a14:m>
+                <a:r>
+                  <a:rPr lang="en-US" dirty="0"/>
+                  <a:t> </a:t>
+                </a:r>
+              </a:p>
+              <a:p>
+                <a:pPr lvl="1"/>
+                <a14:m>
+                  <m:oMath xmlns:m="http://schemas.openxmlformats.org/officeDocument/2006/math">
+                    <m:r>
+                      <m:rPr>
+                        <m:sty m:val="p"/>
+                      </m:rPr>
+                      <a:rPr lang="en-US">
+                        <a:latin typeface="Cambria Math" panose="02040503050406030204" pitchFamily="18" charset="0"/>
+                      </a:rPr>
+                      <m:t>Ω</m:t>
+                    </m:r>
+                    <m:d>
+                      <m:dPr>
+                        <m:ctrlPr>
+                          <a:rPr lang="en-US" i="1">
+                            <a:latin typeface="Cambria Math" panose="02040503050406030204" pitchFamily="18" charset="0"/>
+                          </a:rPr>
+                        </m:ctrlPr>
+                      </m:dPr>
+                      <m:e>
+                        <m:r>
+                          <m:rPr>
+                            <m:nor/>
+                          </m:rPr>
+                          <a:rPr lang="en-US">
+                            <a:latin typeface="Cambria Math" panose="02040503050406030204" pitchFamily="18" charset="0"/>
+                          </a:rPr>
+                          <m:t>merge</m:t>
+                        </m:r>
+                        <m:d>
+                          <m:dPr>
+                            <m:ctrlPr>
+                              <a:rPr lang="en-US" i="1">
+                                <a:latin typeface="Cambria Math" panose="02040503050406030204" pitchFamily="18" charset="0"/>
+                              </a:rPr>
+                            </m:ctrlPr>
+                          </m:dPr>
+                          <m:e>
+                            <m:sSub>
+                              <m:sSubPr>
+                                <m:ctrlPr>
+                                  <a:rPr lang="en-US" i="1">
+                                    <a:latin typeface="Cambria Math" panose="02040503050406030204" pitchFamily="18" charset="0"/>
+                                  </a:rPr>
+                                </m:ctrlPr>
+                              </m:sSubPr>
+                              <m:e>
+                                <m:r>
+                                  <a:rPr lang="en-US" i="1">
+                                    <a:latin typeface="Cambria Math" panose="02040503050406030204" pitchFamily="18" charset="0"/>
+                                  </a:rPr>
+                                  <m:t>𝑡</m:t>
+                                </m:r>
+                              </m:e>
+                              <m:sub>
+                                <m:r>
+                                  <a:rPr lang="en-US" i="1">
+                                    <a:latin typeface="Cambria Math" panose="02040503050406030204" pitchFamily="18" charset="0"/>
+                                  </a:rPr>
+                                  <m:t>1</m:t>
+                                </m:r>
+                              </m:sub>
+                            </m:sSub>
+                            <m:r>
+                              <a:rPr lang="en-US" i="1">
+                                <a:latin typeface="Cambria Math" panose="02040503050406030204" pitchFamily="18" charset="0"/>
+                              </a:rPr>
+                              <m:t>,</m:t>
+                            </m:r>
+                            <m:sSub>
+                              <m:sSubPr>
+                                <m:ctrlPr>
+                                  <a:rPr lang="en-US" i="1">
+                                    <a:latin typeface="Cambria Math" panose="02040503050406030204" pitchFamily="18" charset="0"/>
+                                  </a:rPr>
+                                </m:ctrlPr>
+                              </m:sSubPr>
+                              <m:e>
+                                <m:r>
+                                  <a:rPr lang="en-US" i="1">
+                                    <a:latin typeface="Cambria Math" panose="02040503050406030204" pitchFamily="18" charset="0"/>
+                                  </a:rPr>
+                                  <m:t>𝑡</m:t>
+                                </m:r>
+                              </m:e>
+                              <m:sub>
+                                <m:r>
+                                  <a:rPr lang="en-US" i="1">
+                                    <a:latin typeface="Cambria Math" panose="02040503050406030204" pitchFamily="18" charset="0"/>
+                                  </a:rPr>
+                                  <m:t>2</m:t>
+                                </m:r>
+                              </m:sub>
+                            </m:sSub>
+                          </m:e>
+                        </m:d>
+                      </m:e>
+                    </m:d>
+                    <m:r>
+                      <a:rPr lang="en-US" i="1">
+                        <a:latin typeface="Cambria Math" panose="02040503050406030204" pitchFamily="18" charset="0"/>
+                      </a:rPr>
+                      <m:t>=</m:t>
+                    </m:r>
+                    <m:r>
+                      <a:rPr lang="en-US" i="1">
+                        <a:latin typeface="Cambria Math" panose="02040503050406030204" pitchFamily="18" charset="0"/>
+                      </a:rPr>
+                      <m:t>ℳ</m:t>
+                    </m:r>
+                    <m:r>
+                      <a:rPr lang="en-US" i="1">
+                        <a:latin typeface="Cambria Math" panose="02040503050406030204" pitchFamily="18" charset="0"/>
+                      </a:rPr>
+                      <m:t>𝑒𝑟𝑔𝑒</m:t>
+                    </m:r>
+                    <m:d>
+                      <m:dPr>
+                        <m:ctrlPr>
+                          <a:rPr lang="en-US" i="1">
+                            <a:latin typeface="Cambria Math" panose="02040503050406030204" pitchFamily="18" charset="0"/>
+                          </a:rPr>
+                        </m:ctrlPr>
+                      </m:dPr>
+                      <m:e>
+                        <m:r>
+                          <m:rPr>
+                            <m:sty m:val="p"/>
+                          </m:rPr>
+                          <a:rPr lang="en-US">
+                            <a:latin typeface="Cambria Math" panose="02040503050406030204" pitchFamily="18" charset="0"/>
+                          </a:rPr>
+                          <m:t>Ω</m:t>
+                        </m:r>
+                        <m:d>
+                          <m:dPr>
+                            <m:ctrlPr>
+                              <a:rPr lang="en-US" i="1">
+                                <a:latin typeface="Cambria Math" panose="02040503050406030204" pitchFamily="18" charset="0"/>
+                              </a:rPr>
+                            </m:ctrlPr>
+                          </m:dPr>
+                          <m:e>
+                            <m:sSub>
+                              <m:sSubPr>
+                                <m:ctrlPr>
+                                  <a:rPr lang="en-US" i="1">
+                                    <a:latin typeface="Cambria Math" panose="02040503050406030204" pitchFamily="18" charset="0"/>
+                                  </a:rPr>
+                                </m:ctrlPr>
+                              </m:sSubPr>
+                              <m:e>
+                                <m:r>
+                                  <a:rPr lang="en-US" i="1">
+                                    <a:latin typeface="Cambria Math" panose="02040503050406030204" pitchFamily="18" charset="0"/>
+                                  </a:rPr>
+                                  <m:t>𝑡</m:t>
+                                </m:r>
+                              </m:e>
+                              <m:sub>
+                                <m:r>
+                                  <a:rPr lang="en-US" i="1">
+                                    <a:latin typeface="Cambria Math" panose="02040503050406030204" pitchFamily="18" charset="0"/>
+                                  </a:rPr>
+                                  <m:t>1</m:t>
+                                </m:r>
+                              </m:sub>
+                            </m:sSub>
+                          </m:e>
+                        </m:d>
+                        <m:r>
+                          <a:rPr lang="en-US" i="1">
+                            <a:latin typeface="Cambria Math" panose="02040503050406030204" pitchFamily="18" charset="0"/>
+                          </a:rPr>
+                          <m:t>,</m:t>
+                        </m:r>
+                        <m:r>
+                          <m:rPr>
+                            <m:sty m:val="p"/>
+                          </m:rPr>
+                          <a:rPr lang="en-US">
+                            <a:latin typeface="Cambria Math" panose="02040503050406030204" pitchFamily="18" charset="0"/>
+                          </a:rPr>
+                          <m:t>Ω</m:t>
+                        </m:r>
+                        <m:d>
+                          <m:dPr>
+                            <m:ctrlPr>
+                              <a:rPr lang="en-US" i="1">
+                                <a:latin typeface="Cambria Math" panose="02040503050406030204" pitchFamily="18" charset="0"/>
+                              </a:rPr>
+                            </m:ctrlPr>
+                          </m:dPr>
+                          <m:e>
+                            <m:sSub>
+                              <m:sSubPr>
+                                <m:ctrlPr>
+                                  <a:rPr lang="en-US" i="1">
+                                    <a:latin typeface="Cambria Math" panose="02040503050406030204" pitchFamily="18" charset="0"/>
+                                  </a:rPr>
+                                </m:ctrlPr>
+                              </m:sSubPr>
+                              <m:e>
+                                <m:r>
+                                  <a:rPr lang="en-US" i="1">
+                                    <a:latin typeface="Cambria Math" panose="02040503050406030204" pitchFamily="18" charset="0"/>
+                                  </a:rPr>
+                                  <m:t>𝑡</m:t>
+                                </m:r>
+                              </m:e>
+                              <m:sub>
+                                <m:r>
+                                  <a:rPr lang="en-US" i="1">
+                                    <a:latin typeface="Cambria Math" panose="02040503050406030204" pitchFamily="18" charset="0"/>
+                                  </a:rPr>
+                                  <m:t>2</m:t>
+                                </m:r>
+                              </m:sub>
+                            </m:sSub>
+                          </m:e>
+                        </m:d>
+                      </m:e>
+                    </m:d>
+                  </m:oMath>
+                </a14:m>
+                <a:endParaRPr lang="en-US" dirty="0"/>
+              </a:p>
+              <a:p>
+                <a14:m>
+                  <m:oMath xmlns:m="http://schemas.openxmlformats.org/officeDocument/2006/math">
+                    <m:r>
+                      <a:rPr lang="en-US" i="1">
+                        <a:latin typeface="Cambria Math" panose="02040503050406030204" pitchFamily="18" charset="0"/>
+                      </a:rPr>
+                      <m:t>ℳ</m:t>
+                    </m:r>
+                    <m:r>
+                      <a:rPr lang="en-US" i="1">
+                        <a:latin typeface="Cambria Math" panose="02040503050406030204" pitchFamily="18" charset="0"/>
+                      </a:rPr>
+                      <m:t>𝑜𝑣𝑒</m:t>
+                    </m:r>
+                    <m:r>
+                      <a:rPr lang="en-US" i="1">
+                        <a:latin typeface="Cambria Math" panose="02040503050406030204" pitchFamily="18" charset="0"/>
+                      </a:rPr>
+                      <m:t>:</m:t>
+                    </m:r>
+                    <m:d>
+                      <m:dPr>
+                        <m:ctrlPr>
+                          <a:rPr lang="en-US" i="1">
+                            <a:latin typeface="Cambria Math" panose="02040503050406030204" pitchFamily="18" charset="0"/>
+                          </a:rPr>
+                        </m:ctrlPr>
+                      </m:dPr>
+                      <m:e>
+                        <m:r>
+                          <a:rPr lang="en-US" i="1">
+                            <a:latin typeface="Cambria Math" panose="02040503050406030204" pitchFamily="18" charset="0"/>
+                          </a:rPr>
+                          <m:t>ℱ</m:t>
+                        </m:r>
+                        <m:r>
+                          <a:rPr lang="en-US" i="1">
+                            <a:latin typeface="Cambria Math" panose="02040503050406030204" pitchFamily="18" charset="0"/>
+                          </a:rPr>
+                          <m:t>×</m:t>
+                        </m:r>
+                        <m:r>
+                          <a:rPr lang="en-US" i="1">
+                            <a:latin typeface="Cambria Math" panose="02040503050406030204" pitchFamily="18" charset="0"/>
+                          </a:rPr>
+                          <m:t>𝗟</m:t>
+                        </m:r>
+                      </m:e>
+                    </m:d>
+                    <m:r>
+                      <a:rPr lang="en-US" i="1">
+                        <a:latin typeface="Cambria Math" panose="02040503050406030204" pitchFamily="18" charset="0"/>
+                      </a:rPr>
+                      <m:t>⇀</m:t>
+                    </m:r>
+                    <m:d>
+                      <m:dPr>
+                        <m:ctrlPr>
+                          <a:rPr lang="en-US" i="1">
+                            <a:latin typeface="Cambria Math" panose="02040503050406030204" pitchFamily="18" charset="0"/>
+                          </a:rPr>
+                        </m:ctrlPr>
+                      </m:dPr>
+                      <m:e>
+                        <m:r>
+                          <a:rPr lang="en-US" i="1">
+                            <a:latin typeface="Cambria Math" panose="02040503050406030204" pitchFamily="18" charset="0"/>
+                          </a:rPr>
+                          <m:t>ℱ</m:t>
+                        </m:r>
+                        <m:r>
+                          <a:rPr lang="en-US" i="1">
+                            <a:latin typeface="Cambria Math" panose="02040503050406030204" pitchFamily="18" charset="0"/>
+                          </a:rPr>
+                          <m:t>×</m:t>
+                        </m:r>
+                        <m:r>
+                          <a:rPr lang="en-US" i="1">
+                            <a:latin typeface="Cambria Math" panose="02040503050406030204" pitchFamily="18" charset="0"/>
+                          </a:rPr>
+                          <m:t>𝗟</m:t>
+                        </m:r>
+                      </m:e>
+                    </m:d>
+                    <m:r>
+                      <a:rPr lang="en-US" i="1">
+                        <a:latin typeface="Cambria Math" panose="02040503050406030204" pitchFamily="18" charset="0"/>
+                      </a:rPr>
+                      <m:t>,</m:t>
+                    </m:r>
+                    <m:d>
+                      <m:dPr>
+                        <m:ctrlPr>
+                          <a:rPr lang="en-US" i="1">
+                            <a:latin typeface="Cambria Math" panose="02040503050406030204" pitchFamily="18" charset="0"/>
+                          </a:rPr>
+                        </m:ctrlPr>
+                      </m:dPr>
+                      <m:e>
+                        <m:r>
+                          <m:rPr>
+                            <m:nor/>
+                          </m:rPr>
+                          <a:rPr lang="en-US" b="1">
+                            <a:latin typeface="Cambria Math" panose="02040503050406030204" pitchFamily="18" charset="0"/>
+                          </a:rPr>
+                          <m:t>a</m:t>
+                        </m:r>
+                        <m:r>
+                          <a:rPr lang="en-US" i="1">
+                            <a:latin typeface="Cambria Math" panose="02040503050406030204" pitchFamily="18" charset="0"/>
+                          </a:rPr>
+                          <m:t>,</m:t>
+                        </m:r>
+                        <m:r>
+                          <a:rPr lang="en-US" i="1">
+                            <a:latin typeface="Cambria Math" panose="02040503050406030204" pitchFamily="18" charset="0"/>
+                          </a:rPr>
+                          <m:t>𝐴</m:t>
+                        </m:r>
+                      </m:e>
+                    </m:d>
+                    <m:r>
+                      <a:rPr lang="en-US" i="1">
+                        <a:latin typeface="Cambria Math" panose="02040503050406030204" pitchFamily="18" charset="0"/>
+                      </a:rPr>
+                      <m:t>↦</m:t>
+                    </m:r>
+                    <m:d>
+                      <m:dPr>
+                        <m:ctrlPr>
+                          <a:rPr lang="en-US" i="1">
+                            <a:latin typeface="Cambria Math" panose="02040503050406030204" pitchFamily="18" charset="0"/>
+                          </a:rPr>
+                        </m:ctrlPr>
+                      </m:dPr>
+                      <m:e>
+                        <m:r>
+                          <m:rPr>
+                            <m:nor/>
+                          </m:rPr>
+                          <a:rPr lang="en-US" b="1">
+                            <a:latin typeface="Cambria Math" panose="02040503050406030204" pitchFamily="18" charset="0"/>
+                          </a:rPr>
+                          <m:t>move</m:t>
+                        </m:r>
+                        <m:d>
+                          <m:dPr>
+                            <m:ctrlPr>
+                              <a:rPr lang="en-US" i="1">
+                                <a:latin typeface="Cambria Math" panose="02040503050406030204" pitchFamily="18" charset="0"/>
+                              </a:rPr>
+                            </m:ctrlPr>
+                          </m:dPr>
+                          <m:e>
+                            <m:r>
+                              <m:rPr>
+                                <m:nor/>
+                              </m:rPr>
+                              <a:rPr lang="en-US" b="1">
+                                <a:latin typeface="Cambria Math" panose="02040503050406030204" pitchFamily="18" charset="0"/>
+                              </a:rPr>
+                              <m:t>a</m:t>
+                            </m:r>
+                          </m:e>
+                        </m:d>
+                        <m:r>
+                          <a:rPr lang="en-US" i="1">
+                            <a:latin typeface="Cambria Math" panose="02040503050406030204" pitchFamily="18" charset="0"/>
+                          </a:rPr>
+                          <m:t>,</m:t>
+                        </m:r>
+                        <m:r>
+                          <a:rPr lang="en-US" i="1">
+                            <a:latin typeface="Cambria Math" panose="02040503050406030204" pitchFamily="18" charset="0"/>
+                          </a:rPr>
+                          <m:t>𝐴</m:t>
+                        </m:r>
+                      </m:e>
+                    </m:d>
+                  </m:oMath>
+                </a14:m>
+                <a:endParaRPr lang="en-US" dirty="0"/>
+              </a:p>
+              <a:p>
+                <a:pPr lvl="1"/>
+                <a14:m>
+                  <m:oMath xmlns:m="http://schemas.openxmlformats.org/officeDocument/2006/math">
+                    <m:r>
+                      <m:rPr>
+                        <m:sty m:val="p"/>
+                      </m:rPr>
+                      <a:rPr lang="en-US">
+                        <a:latin typeface="Cambria Math" panose="02040503050406030204" pitchFamily="18" charset="0"/>
+                      </a:rPr>
+                      <m:t>Ω</m:t>
+                    </m:r>
+                    <m:d>
+                      <m:dPr>
+                        <m:ctrlPr>
+                          <a:rPr lang="en-US" i="1">
+                            <a:latin typeface="Cambria Math" panose="02040503050406030204" pitchFamily="18" charset="0"/>
+                          </a:rPr>
+                        </m:ctrlPr>
+                      </m:dPr>
+                      <m:e>
+                        <m:r>
+                          <a:rPr lang="en-US" i="1">
+                            <a:latin typeface="Cambria Math" panose="02040503050406030204" pitchFamily="18" charset="0"/>
+                          </a:rPr>
+                          <m:t>𝑚𝑜𝑣𝑒</m:t>
+                        </m:r>
+                        <m:d>
+                          <m:dPr>
+                            <m:ctrlPr>
+                              <a:rPr lang="en-US" i="1">
+                                <a:latin typeface="Cambria Math" panose="02040503050406030204" pitchFamily="18" charset="0"/>
+                              </a:rPr>
+                            </m:ctrlPr>
+                          </m:dPr>
+                          <m:e>
+                            <m:r>
+                              <a:rPr lang="en-US" i="1">
+                                <a:latin typeface="Cambria Math" panose="02040503050406030204" pitchFamily="18" charset="0"/>
+                              </a:rPr>
+                              <m:t>𝑡</m:t>
+                            </m:r>
+                          </m:e>
+                        </m:d>
+                      </m:e>
+                    </m:d>
+                    <m:r>
+                      <a:rPr lang="en-US" i="1">
+                        <a:latin typeface="Cambria Math" panose="02040503050406030204" pitchFamily="18" charset="0"/>
+                      </a:rPr>
+                      <m:t>=</m:t>
+                    </m:r>
+                    <m:r>
+                      <a:rPr lang="en-US" i="1">
+                        <a:latin typeface="Cambria Math" panose="02040503050406030204" pitchFamily="18" charset="0"/>
+                      </a:rPr>
+                      <m:t>ℳ</m:t>
+                    </m:r>
+                    <m:r>
+                      <a:rPr lang="en-US" i="1">
+                        <a:latin typeface="Cambria Math" panose="02040503050406030204" pitchFamily="18" charset="0"/>
+                      </a:rPr>
+                      <m:t>𝑜𝑣𝑒</m:t>
+                    </m:r>
+                    <m:d>
+                      <m:dPr>
+                        <m:ctrlPr>
+                          <a:rPr lang="en-US" i="1">
+                            <a:latin typeface="Cambria Math" panose="02040503050406030204" pitchFamily="18" charset="0"/>
+                          </a:rPr>
+                        </m:ctrlPr>
+                      </m:dPr>
+                      <m:e>
+                        <m:r>
+                          <m:rPr>
+                            <m:sty m:val="p"/>
+                          </m:rPr>
+                          <a:rPr lang="en-US">
+                            <a:latin typeface="Cambria Math" panose="02040503050406030204" pitchFamily="18" charset="0"/>
+                          </a:rPr>
+                          <m:t>Ω</m:t>
+                        </m:r>
+                        <m:d>
+                          <m:dPr>
+                            <m:ctrlPr>
+                              <a:rPr lang="en-US" i="1">
+                                <a:latin typeface="Cambria Math" panose="02040503050406030204" pitchFamily="18" charset="0"/>
+                              </a:rPr>
+                            </m:ctrlPr>
+                          </m:dPr>
+                          <m:e>
+                            <m:r>
+                              <a:rPr lang="en-US" i="1">
+                                <a:latin typeface="Cambria Math" panose="02040503050406030204" pitchFamily="18" charset="0"/>
+                              </a:rPr>
+                              <m:t>𝑡</m:t>
+                            </m:r>
+                          </m:e>
+                        </m:d>
+                      </m:e>
+                    </m:d>
+                  </m:oMath>
+                </a14:m>
+                <a:endParaRPr lang="en-US" dirty="0"/>
+              </a:p>
+            </p:txBody>
+          </p:sp>
+        </mc:Choice>
+        <mc:Fallback xmlns="">
+          <p:sp>
+            <p:nvSpPr>
+              <p:cNvPr id="3" name="Text Placeholder 2">
+                <a:extLst>
+                  <a:ext uri="{FF2B5EF4-FFF2-40B4-BE49-F238E27FC236}">
+                    <a16:creationId xmlns:a16="http://schemas.microsoft.com/office/drawing/2014/main" id="{EA31B4B9-43B4-087E-BF20-406C1186116D}"/>
+                  </a:ext>
+                </a:extLst>
+              </p:cNvPr>
+              <p:cNvSpPr>
+                <a:spLocks noGrp="1" noRot="1" noChangeAspect="1" noMove="1" noResize="1" noEditPoints="1" noAdjustHandles="1" noChangeArrowheads="1" noChangeShapeType="1" noTextEdit="1"/>
+              </p:cNvSpPr>
+              <p:nvPr>
+                <p:ph type="body" idx="1"/>
+              </p:nvPr>
+            </p:nvSpPr>
+            <p:spPr>
+              <a:blipFill>
+                <a:blip r:embed="rId2"/>
+                <a:stretch>
+                  <a:fillRect/>
+                </a:stretch>
+              </a:blipFill>
+            </p:spPr>
+            <p:txBody>
+              <a:bodyPr/>
+              <a:lstStyle/>
+              <a:p>
+                <a:r>
+                  <a:rPr lang="en-US">
+                    <a:noFill/>
+                  </a:rPr>
+                  <a:t> </a:t>
+                </a:r>
+              </a:p>
+            </p:txBody>
+          </p:sp>
+        </mc:Fallback>
+      </mc:AlternateContent>
+      <p:sp>
+        <p:nvSpPr>
+          <p:cNvPr id="4" name="Slide Number Placeholder 3">
+            <a:extLst>
+              <a:ext uri="{FF2B5EF4-FFF2-40B4-BE49-F238E27FC236}">
+                <a16:creationId xmlns:a16="http://schemas.microsoft.com/office/drawing/2014/main" id="{FA97D418-73BB-D98C-44F4-D74F9C0DF8B7}"/>
+              </a:ext>
+            </a:extLst>
+          </p:cNvPr>
+          <p:cNvSpPr>
+            <a:spLocks noGrp="1"/>
+          </p:cNvSpPr>
+          <p:nvPr>
+            <p:ph type="sldNum" idx="12"/>
+          </p:nvPr>
+        </p:nvSpPr>
+        <p:spPr/>
+        <p:txBody>
+          <a:bodyPr/>
+          <a:lstStyle/>
+          <a:p>
+            <a:pPr marL="0" lvl="0" indent="0" algn="r" rtl="0">
+              <a:spcBef>
+                <a:spcPts val="0"/>
+              </a:spcBef>
+              <a:spcAft>
+                <a:spcPts val="0"/>
+              </a:spcAft>
+              <a:buNone/>
+            </a:pPr>
+            <a:fld id="{00000000-1234-1234-1234-123412341234}" type="slidenum">
+              <a:rPr lang="en" smtClean="0"/>
+              <a:t>37</a:t>
+            </a:fld>
+            <a:endParaRPr lang="en"/>
+          </a:p>
+        </p:txBody>
+      </p:sp>
+    </p:spTree>
+    <p:extLst>
+      <p:ext uri="{BB962C8B-B14F-4D97-AF65-F5344CB8AC3E}">
+        <p14:creationId xmlns:p14="http://schemas.microsoft.com/office/powerpoint/2010/main" val="208969475"/>
+      </p:ext>
+    </p:extLst>
+  </p:cSld>
+  <p:clrMapOvr>
+    <a:masterClrMapping/>
+  </p:clrMapOvr>
+</p:sld>
+</file>
+
 <file path=ppt/slides/slide4.xml><?xml version="1.0" encoding="utf-8"?>
 <p:sld xmlns:a="http://schemas.openxmlformats.org/drawingml/2006/main" xmlns:r="http://schemas.openxmlformats.org/officeDocument/2006/relationships" xmlns:p="http://schemas.openxmlformats.org/presentationml/2006/main">
   <p:cSld>
@@ -32776,7 +39494,19 @@
             </a:pPr>
             <a:r>
               <a:rPr lang="en-US" dirty="0"/>
-              <a:t>In particular, having composition be guided by a formal grammar can bridge semantic and syntactic approaches, motivating how such operations should be applied</a:t>
+              <a:t>In particular, having composition be </a:t>
+            </a:r>
+            <a:r>
+              <a:rPr lang="en-US" dirty="0">
+                <a:solidFill>
+                  <a:srgbClr val="7030A0"/>
+                </a:solidFill>
+              </a:rPr>
+              <a:t>guided by a formal grammar </a:t>
+            </a:r>
+            <a:r>
+              <a:rPr lang="en-US" dirty="0"/>
+              <a:t>can bridge semantic and syntactic approaches, motivating how such operations should be applied</a:t>
             </a:r>
           </a:p>
           <a:p>
@@ -32792,7 +39522,19 @@
             </a:pPr>
             <a:r>
               <a:rPr lang="en-US" dirty="0"/>
-              <a:t>There is already successful work integrating Combinatory Categorial Grammars (CCGs; </a:t>
+              <a:t>There is </a:t>
+            </a:r>
+            <a:r>
+              <a:rPr lang="en-US" dirty="0">
+                <a:solidFill>
+                  <a:srgbClr val="7030A0"/>
+                </a:solidFill>
+              </a:rPr>
+              <a:t>already successful work </a:t>
+            </a:r>
+            <a:r>
+              <a:rPr lang="en-US" dirty="0"/>
+              <a:t>integrating Combinatory Categorial Grammars (CCGs; </a:t>
             </a:r>
             <a:r>
               <a:rPr lang="en-US" dirty="0">
@@ -32832,7 +39574,19 @@
             </a:pPr>
             <a:r>
               <a:rPr lang="en-US" dirty="0"/>
-              <a:t>This work integrates such a model distributional semantics with Minimalist Grammars (MGs; Stabler, 1996), which formalize the (broad strokes) syntactic approach of the Minimalist Program</a:t>
+              <a:t>This work </a:t>
+            </a:r>
+            <a:r>
+              <a:rPr lang="en-US" dirty="0">
+                <a:solidFill>
+                  <a:srgbClr val="7030A0"/>
+                </a:solidFill>
+              </a:rPr>
+              <a:t>integrates such a model distributional semantics with Minimalist Grammars</a:t>
+            </a:r>
+            <a:r>
+              <a:rPr lang="en-US" dirty="0"/>
+              <a:t> (MGs; Stabler, 1996), which formalize the (broad strokes) syntactic approach of the Minimalist Program</a:t>
             </a:r>
             <a:endParaRPr dirty="0"/>
           </a:p>
@@ -33113,20 +39867,48 @@
           <a:p>
             <a:r>
               <a:rPr lang="en-US" dirty="0"/>
-              <a:t>MGs formalize “Minimalist Program-like” syntax</a:t>
+              <a:t>MGs formalize </a:t>
+            </a:r>
+            <a:r>
+              <a:rPr lang="en-US" dirty="0">
+                <a:solidFill>
+                  <a:srgbClr val="7030A0"/>
+                </a:solidFill>
+              </a:rPr>
+              <a:t>“Minimalist Program-like” syntax</a:t>
             </a:r>
           </a:p>
           <a:p>
             <a:pPr lvl="1"/>
             <a:r>
               <a:rPr lang="en-US" dirty="0"/>
-              <a:t>In this way, incorporating distributional semantics into MGs provides a link to “mainstream” syntactic theory</a:t>
+              <a:t>In this way, incorporating distributional semantics into MGs provides </a:t>
+            </a:r>
+            <a:r>
+              <a:rPr lang="en-US" dirty="0">
+                <a:solidFill>
+                  <a:srgbClr val="7030A0"/>
+                </a:solidFill>
+              </a:rPr>
+              <a:t>a link to “mainstream” syntactic theory</a:t>
             </a:r>
           </a:p>
           <a:p>
             <a:r>
               <a:rPr lang="en-US" dirty="0"/>
-              <a:t>MGs have also been useful in analyzing sentence processing (</a:t>
+              <a:t>MGs have also been useful in </a:t>
+            </a:r>
+            <a:r>
+              <a:rPr lang="en-US" dirty="0">
+                <a:solidFill>
+                  <a:srgbClr val="7030A0"/>
+                </a:solidFill>
+              </a:rPr>
+              <a:t>analyzing sentence processing</a:t>
+            </a:r>
+            <a:r>
+              <a:rPr lang="en-US" dirty="0"/>
+              <a:t> (</a:t>
             </a:r>
             <a:r>
               <a:rPr lang="en-US" dirty="0" err="1">
@@ -33160,11 +39942,31 @@
           <a:p>
             <a:r>
               <a:rPr lang="en-US" dirty="0"/>
-              <a:t>There is also a vector-based analysis for the </a:t>
+              <a:t>There is also a </a:t>
+            </a:r>
+            <a:r>
+              <a:rPr lang="en-US" dirty="0">
+                <a:solidFill>
+                  <a:srgbClr val="7030A0"/>
+                </a:solidFill>
+              </a:rPr>
+              <a:t>vector-based analysis </a:t>
+            </a:r>
+            <a:r>
+              <a:rPr lang="en-US" dirty="0"/>
+              <a:t>for the </a:t>
+            </a:r>
+            <a:r>
+              <a:rPr lang="en-US" i="1" dirty="0">
+                <a:solidFill>
+                  <a:srgbClr val="7030A0"/>
+                </a:solidFill>
+              </a:rPr>
+              <a:t>syntax</a:t>
             </a:r>
             <a:r>
               <a:rPr lang="en-US" i="1" dirty="0"/>
-              <a:t>syntax </a:t>
+              <a:t> </a:t>
             </a:r>
             <a:r>
               <a:rPr lang="en-US" dirty="0"/>
@@ -36043,6 +42845,26 @@
 </a:theme>
 </file>
 
+<file path=ppt/webextensions/taskpanes.xml><?xml version="1.0" encoding="utf-8"?>
+<wetp:taskpanes xmlns:wetp="http://schemas.microsoft.com/office/webextensions/taskpanes/2010/11">
+  <wetp:taskpane dockstate="right" visibility="0" width="350" row="1">
+    <wetp:webextensionref xmlns:r="http://schemas.openxmlformats.org/officeDocument/2006/relationships" r:id="rId1"/>
+  </wetp:taskpane>
+</wetp:taskpanes>
+</file>
+
+<file path=ppt/webextensions/webextension1.xml><?xml version="1.0" encoding="utf-8"?>
+<we:webextension xmlns:we="http://schemas.microsoft.com/office/webextensions/webextension/2010/11" id="{D21140D2-6137-4AE8-9710-3E53DA955798}">
+  <we:reference id="wa200007297" version="1.5.0.0" store="en-US" storeType="OMEX"/>
+  <we:alternateReferences>
+    <we:reference id="wa200007297" version="1.5.0.0" store="wa200007297" storeType="OMEX"/>
+  </we:alternateReferences>
+  <we:properties/>
+  <we:bindings/>
+  <we:snapshot xmlns:r="http://schemas.openxmlformats.org/officeDocument/2006/relationships"/>
+</we:webextension>
+</file>
+
 <file path=docMetadata/LabelInfo.xml><?xml version="1.0" encoding="utf-8"?>
 <clbl:labelList xmlns:clbl="http://schemas.microsoft.com/office/2020/mipLabelMetadata">
   <clbl:label id="{170051ed-867f-4092-a6af-8a42e27b7e09}" enabled="1" method="Standard" siteId="{5217e0e7-539d-4563-b1bf-7c6dcf074f91}" contentBits="0" removed="0"/>
